--- a/08_presentation/Презентация_ИНГОССЕМЬЯ.pptx
+++ b/08_presentation/Презентация_ИНГОССЕМЬЯ.pptx
@@ -25,9 +25,10 @@
     <p:sldId id="273" r:id="rId19"/>
     <p:sldId id="274" r:id="rId20"/>
     <p:sldId id="275" r:id="rId21"/>
+    <p:sldId id="276" r:id="rId22"/>
   </p:sldIdLst>
   <p:notesMasterIdLst>
-    <p:notesMasterId r:id="rId22"/>
+    <p:notesMasterId r:id="rId23"/>
   </p:notesMasterIdLst>
   <p:sldSz cx="9144000" cy="5143500"/>
   <p:notesSz cx="5143500" cy="9144000"/>
@@ -126,19 +127,19 @@
   <p:extLst>
     <p:ext uri="{521415D9-36F7-43E2-AB2F-B90AF26B5E84}">
       <p14:sectionLst xmlns:p14="http://schemas.microsoft.com/office/powerpoint/2010/main">
-        <p14:section name="Титул" id="{25a9dc1d-ddc9-fb91-173c-be66dc5107ff}">
+        <p14:section name="Титул" id="{ecbd9b1d-a5f6-b74b-a5b6-d9b1e8920561}">
           <p14:sldIdLst>
             <p14:sldId id="256"/>
           </p14:sldIdLst>
         </p14:section>
-        <p14:section name="Сегмент и проблема" id="{9b46ea88-e0f3-42ea-c486-945bb2efd76c}">
+        <p14:section name="Сегмент и проблема" id="{f7e73c10-71ee-836f-aeeb-889484f95998}">
           <p14:sldIdLst>
             <p14:sldId id="257"/>
             <p14:sldId id="258"/>
             <p14:sldId id="259"/>
           </p14:sldIdLst>
         </p14:section>
-        <p14:section name="Рынок и решение" id="{ae2dcd7a-4406-afa8-a6a8-1d70de5c4861}">
+        <p14:section name="Рынок и решение" id="{8aa547a6-d48b-f454-dd92-8c131d7c9980}">
           <p14:sldIdLst>
             <p14:sldId id="260"/>
             <p14:sldId id="261"/>
@@ -150,7 +151,7 @@
             <p14:sldId id="267"/>
           </p14:sldIdLst>
         </p14:section>
-        <p14:section name="Экономика" id="{ac9bf9e7-1fb5-ccd7-dc3f-2ee3452cade8}">
+        <p14:section name="Экономика" id="{98b843a6-ff05-75d6-42f7-affb71d49ff8}">
           <p14:sldIdLst>
             <p14:sldId id="268"/>
             <p14:sldId id="269"/>
@@ -158,16 +159,17 @@
             <p14:sldId id="271"/>
           </p14:sldIdLst>
         </p14:section>
-        <p14:section name="MVP и решение" id="{ee36c7f0-736f-9fba-18bf-52ec588ab4fe}">
+        <p14:section name="MVP и решение" id="{90e4cce6-76ea-bda5-f750-aef3b7d9885a}">
           <p14:sldIdLst>
             <p14:sldId id="272"/>
             <p14:sldId id="273"/>
             <p14:sldId id="274"/>
           </p14:sldIdLst>
         </p14:section>
-        <p14:section name="Приложение" id="{1a864c4a-2da9-dcdf-d2cf-48cc924901dd}">
+        <p14:section name="Приложение" id="{d326a35d-3386-5737-19fc-dcb428e7b5e2}">
           <p14:sldIdLst>
             <p14:sldId id="275"/>
+            <p14:sldId id="276"/>
           </p14:sldIdLst>
         </p14:section>
       </p14:sectionLst>
@@ -1155,1766 +1157,6 @@
     </a:lvl9pPr>
   </p:notesStyle>
 </p:notesMaster>
-</file>
-
-<file path=ppt/notesSlides/notesSlide1.xml><?xml version="1.0" encoding="utf-8"?>
-<p:notes xmlns:a="http://schemas.openxmlformats.org/drawingml/2006/main" xmlns:r="http://schemas.openxmlformats.org/officeDocument/2006/relationships" xmlns:p="http://schemas.openxmlformats.org/presentationml/2006/main">
-  <p:cSld>
-    <p:spTree>
-      <p:nvGrpSpPr>
-        <p:cNvPr id="1" name=""/>
-        <p:cNvGrpSpPr/>
-        <p:nvPr/>
-      </p:nvGrpSpPr>
-      <p:grpSpPr>
-        <a:xfrm>
-          <a:off x="0" y="0"/>
-          <a:ext cx="0" cy="0"/>
-          <a:chOff x="0" y="0"/>
-          <a:chExt cx="0" cy="0"/>
-        </a:xfrm>
-      </p:grpSpPr>
-      <p:sp>
-        <p:nvSpPr>
-          <p:cNvPr id="2" name="Slide Image Placeholder 1"/>
-          <p:cNvSpPr>
-            <a:spLocks noGrp="1" noRot="1" noChangeAspect="1"/>
-          </p:cNvSpPr>
-          <p:nvPr>
-            <p:ph type="sldImg"/>
-          </p:nvPr>
-        </p:nvSpPr>
-        <p:spPr/>
-      </p:sp>
-      <p:sp>
-        <p:nvSpPr>
-          <p:cNvPr id="3" name="Notes Placeholder 2"/>
-          <p:cNvSpPr>
-            <a:spLocks noGrp="1"/>
-          </p:cNvSpPr>
-          <p:nvPr>
-            <p:ph type="body" idx="1"/>
-          </p:nvPr>
-        </p:nvSpPr>
-        <p:spPr/>
-        <p:txBody>
-          <a:bodyPr/>
-          <a:lstStyle/>
-          <a:p>
-            <a:r>
-              <a:rPr lang="en-US" dirty="0"/>
-              <a:t>Мы команда проекта ИНГОССЕМЬЯ. Взрослые дети организуют медпомощь пожилым родителям на расстоянии, и между «справляюсь сам» и сиделкой сейчас ничего нет. Наш сервис закрывает этот разрыв силами координаторов и медицинской инфраструктуры Ингосстраха. Дальше покажем, что подтверждают данные, как работает сервис и сколько стоит проверка.</a:t>
-            </a:r>
-            <a:endParaRPr lang="en-US" dirty="0"/>
-          </a:p>
-        </p:txBody>
-      </p:sp>
-      <p:sp>
-        <p:nvSpPr>
-          <p:cNvPr id="4" name="Slide Number Placeholder 3"/>
-          <p:cNvSpPr>
-            <a:spLocks noGrp="1"/>
-          </p:cNvSpPr>
-          <p:nvPr>
-            <p:ph type="sldNum" sz="quarter" idx="10"/>
-          </p:nvPr>
-        </p:nvSpPr>
-        <p:spPr/>
-        <p:txBody>
-          <a:bodyPr/>
-          <a:lstStyle/>
-          <a:p>
-            <a:fld id="{F7021451-1387-4CA6-816F-3879F97B5CBC}" type="slidenum">
-              <a:rPr lang="en-US"/>
-              <a:t>1</a:t>
-            </a:fld>
-            <a:endParaRPr lang="en-US"/>
-          </a:p>
-        </p:txBody>
-      </p:sp>
-    </p:spTree>
-    <p:extLst>
-      <p:ext uri="{BB962C8B-B14F-4D97-AF65-F5344CB8AC3E}">
-        <p14:creationId xmlns:p14="http://schemas.microsoft.com/office/powerpoint/2010/main" val="1024086991"/>
-      </p:ext>
-    </p:extLst>
-  </p:cSld>
-  <p:clrMapOvr>
-    <a:masterClrMapping/>
-  </p:clrMapOvr>
-</p:notes>
-</file>
-
-<file path=ppt/notesSlides/notesSlide10.xml><?xml version="1.0" encoding="utf-8"?>
-<p:notes xmlns:a="http://schemas.openxmlformats.org/drawingml/2006/main" xmlns:r="http://schemas.openxmlformats.org/officeDocument/2006/relationships" xmlns:p="http://schemas.openxmlformats.org/presentationml/2006/main">
-  <p:cSld>
-    <p:spTree>
-      <p:nvGrpSpPr>
-        <p:cNvPr id="1" name=""/>
-        <p:cNvGrpSpPr/>
-        <p:nvPr/>
-      </p:nvGrpSpPr>
-      <p:grpSpPr>
-        <a:xfrm>
-          <a:off x="0" y="0"/>
-          <a:ext cx="0" cy="0"/>
-          <a:chOff x="0" y="0"/>
-          <a:chExt cx="0" cy="0"/>
-        </a:xfrm>
-      </p:grpSpPr>
-      <p:sp>
-        <p:nvSpPr>
-          <p:cNvPr id="2" name="Slide Image Placeholder 1"/>
-          <p:cNvSpPr>
-            <a:spLocks noGrp="1" noRot="1" noChangeAspect="1"/>
-          </p:cNvSpPr>
-          <p:nvPr>
-            <p:ph type="sldImg"/>
-          </p:nvPr>
-        </p:nvSpPr>
-        <p:spPr/>
-      </p:sp>
-      <p:sp>
-        <p:nvSpPr>
-          <p:cNvPr id="3" name="Notes Placeholder 2"/>
-          <p:cNvSpPr>
-            <a:spLocks noGrp="1"/>
-          </p:cNvSpPr>
-          <p:nvPr>
-            <p:ph type="body" idx="1"/>
-          </p:nvPr>
-        </p:nvSpPr>
-        <p:spPr/>
-        <p:txBody>
-          <a:bodyPr/>
-          <a:lstStyle/>
-          <a:p>
-            <a:r>
-              <a:rPr lang="en-US" dirty="0"/>
-              <a:t>Справа рабочее место координатора: очередь по срочности, скрипт звонка и отчет ребенку в один клик. Именно этот экран определяет, сколько семей тянет один координатор, а значит и юнит-экономику: по модели около 128 семей на человека.</a:t>
-            </a:r>
-            <a:endParaRPr lang="en-US" dirty="0"/>
-          </a:p>
-        </p:txBody>
-      </p:sp>
-      <p:sp>
-        <p:nvSpPr>
-          <p:cNvPr id="4" name="Slide Number Placeholder 3"/>
-          <p:cNvSpPr>
-            <a:spLocks noGrp="1"/>
-          </p:cNvSpPr>
-          <p:nvPr>
-            <p:ph type="sldNum" sz="quarter" idx="10"/>
-          </p:nvPr>
-        </p:nvSpPr>
-        <p:spPr/>
-        <p:txBody>
-          <a:bodyPr/>
-          <a:lstStyle/>
-          <a:p>
-            <a:fld id="{F7021451-1387-4CA6-816F-3879F97B5CBC}" type="slidenum">
-              <a:rPr lang="en-US"/>
-              <a:t>10</a:t>
-            </a:fld>
-            <a:endParaRPr lang="en-US"/>
-          </a:p>
-        </p:txBody>
-      </p:sp>
-    </p:spTree>
-    <p:extLst>
-      <p:ext uri="{BB962C8B-B14F-4D97-AF65-F5344CB8AC3E}">
-        <p14:creationId xmlns:p14="http://schemas.microsoft.com/office/powerpoint/2010/main" val="1024086991"/>
-      </p:ext>
-    </p:extLst>
-  </p:cSld>
-  <p:clrMapOvr>
-    <a:masterClrMapping/>
-  </p:clrMapOvr>
-</p:notes>
-</file>
-
-<file path=ppt/notesSlides/notesSlide11.xml><?xml version="1.0" encoding="utf-8"?>
-<p:notes xmlns:a="http://schemas.openxmlformats.org/drawingml/2006/main" xmlns:r="http://schemas.openxmlformats.org/officeDocument/2006/relationships" xmlns:p="http://schemas.openxmlformats.org/presentationml/2006/main">
-  <p:cSld>
-    <p:spTree>
-      <p:nvGrpSpPr>
-        <p:cNvPr id="1" name=""/>
-        <p:cNvGrpSpPr/>
-        <p:nvPr/>
-      </p:nvGrpSpPr>
-      <p:grpSpPr>
-        <a:xfrm>
-          <a:off x="0" y="0"/>
-          <a:ext cx="0" cy="0"/>
-          <a:chOff x="0" y="0"/>
-          <a:chExt cx="0" cy="0"/>
-        </a:xfrm>
-      </p:grpSpPr>
-      <p:sp>
-        <p:nvSpPr>
-          <p:cNvPr id="2" name="Slide Image Placeholder 1"/>
-          <p:cNvSpPr>
-            <a:spLocks noGrp="1" noRot="1" noChangeAspect="1"/>
-          </p:cNvSpPr>
-          <p:nvPr>
-            <p:ph type="sldImg"/>
-          </p:nvPr>
-        </p:nvSpPr>
-        <p:spPr/>
-      </p:sp>
-      <p:sp>
-        <p:nvSpPr>
-          <p:cNvPr id="3" name="Notes Placeholder 2"/>
-          <p:cNvSpPr>
-            <a:spLocks noGrp="1"/>
-          </p:cNvSpPr>
-          <p:nvPr>
-            <p:ph type="body" idx="1"/>
-          </p:nvPr>
-        </p:nvSpPr>
-        <p:spPr/>
-        <p:txBody>
-          <a:bodyPr/>
-          <a:lstStyle/>
-          <a:p>
-            <a:r>
-              <a:rPr lang="en-US" dirty="0"/>
-              <a:t>Мы называем только те ресурсы, которые реально работают в сценарии. Главный из них: операторы медицинского контакт-центра ДМС уже каждый день организуют медпомощь, мы переупаковываем эту компетенцию для семьи без полиса. Есть и слабые места: IngoMobile недоступен в Google Play и App Store с 31.01.2025, а с 01.06.2025 финорганизациям запрещено информировать клиентов через иностранные мессенджеры, поэтому MVP не зависит от приложения.</a:t>
-            </a:r>
-            <a:endParaRPr lang="en-US" dirty="0"/>
-          </a:p>
-        </p:txBody>
-      </p:sp>
-      <p:sp>
-        <p:nvSpPr>
-          <p:cNvPr id="4" name="Slide Number Placeholder 3"/>
-          <p:cNvSpPr>
-            <a:spLocks noGrp="1"/>
-          </p:cNvSpPr>
-          <p:nvPr>
-            <p:ph type="sldNum" sz="quarter" idx="10"/>
-          </p:nvPr>
-        </p:nvSpPr>
-        <p:spPr/>
-        <p:txBody>
-          <a:bodyPr/>
-          <a:lstStyle/>
-          <a:p>
-            <a:fld id="{F7021451-1387-4CA6-816F-3879F97B5CBC}" type="slidenum">
-              <a:rPr lang="en-US"/>
-              <a:t>11</a:t>
-            </a:fld>
-            <a:endParaRPr lang="en-US"/>
-          </a:p>
-        </p:txBody>
-      </p:sp>
-    </p:spTree>
-    <p:extLst>
-      <p:ext uri="{BB962C8B-B14F-4D97-AF65-F5344CB8AC3E}">
-        <p14:creationId xmlns:p14="http://schemas.microsoft.com/office/powerpoint/2010/main" val="1024086991"/>
-      </p:ext>
-    </p:extLst>
-  </p:cSld>
-  <p:clrMapOvr>
-    <a:masterClrMapping/>
-  </p:clrMapOvr>
-</p:notes>
-</file>
-
-<file path=ppt/notesSlides/notesSlide12.xml><?xml version="1.0" encoding="utf-8"?>
-<p:notes xmlns:a="http://schemas.openxmlformats.org/drawingml/2006/main" xmlns:r="http://schemas.openxmlformats.org/officeDocument/2006/relationships" xmlns:p="http://schemas.openxmlformats.org/presentationml/2006/main">
-  <p:cSld>
-    <p:spTree>
-      <p:nvGrpSpPr>
-        <p:cNvPr id="1" name=""/>
-        <p:cNvGrpSpPr/>
-        <p:nvPr/>
-      </p:nvGrpSpPr>
-      <p:grpSpPr>
-        <a:xfrm>
-          <a:off x="0" y="0"/>
-          <a:ext cx="0" cy="0"/>
-          <a:chOff x="0" y="0"/>
-          <a:chExt cx="0" cy="0"/>
-        </a:xfrm>
-      </p:grpSpPr>
-      <p:sp>
-        <p:nvSpPr>
-          <p:cNvPr id="2" name="Slide Image Placeholder 1"/>
-          <p:cNvSpPr>
-            <a:spLocks noGrp="1" noRot="1" noChangeAspect="1"/>
-          </p:cNvSpPr>
-          <p:nvPr>
-            <p:ph type="sldImg"/>
-          </p:nvPr>
-        </p:nvSpPr>
-        <p:spPr/>
-      </p:sp>
-      <p:sp>
-        <p:nvSpPr>
-          <p:cNvPr id="3" name="Notes Placeholder 2"/>
-          <p:cNvSpPr>
-            <a:spLocks noGrp="1"/>
-          </p:cNvSpPr>
-          <p:nvPr>
-            <p:ph type="body" idx="1"/>
-          </p:nvPr>
-        </p:nvSpPr>
-        <p:spPr/>
-        <p:txBody>
-          <a:bodyPr/>
-          <a:lstStyle/>
-          <a:p>
-            <a:r>
-              <a:rPr lang="en-US" dirty="0"/>
-              <a:t>Мы встроили в продукт особые условия для ветеранов СВО и ветеранов, и это не разовая акция. У семей участников СВО та же задача стоит острее: участник на службе не может каждый день звонить родителю, а у родителей погибших участников рядом вообще нет ребенка, поэтому для них тариф «Базовый» бесплатный. Участникам СВО на службе скидка 50%, ветеранам боевых действий 30%, ветеранам ВОВ и ветеранам труда 10%. Но главное не скидка, а навигатор: координатор помогает получить положенную по закону внеочередную медпомощь и льготные лекарства. Фонд «Защитники Отечества» для нас партнер: его социальные координаторы решают социальные вопросы и передают нам медицинские задачи по родителю. Льготы стоят сервису 46,8 миллиона рублей за пять лет, и эта сумма уже вычтена из всех цифр модели.</a:t>
-            </a:r>
-            <a:endParaRPr lang="en-US" dirty="0"/>
-          </a:p>
-        </p:txBody>
-      </p:sp>
-      <p:sp>
-        <p:nvSpPr>
-          <p:cNvPr id="4" name="Slide Number Placeholder 3"/>
-          <p:cNvSpPr>
-            <a:spLocks noGrp="1"/>
-          </p:cNvSpPr>
-          <p:nvPr>
-            <p:ph type="sldNum" sz="quarter" idx="10"/>
-          </p:nvPr>
-        </p:nvSpPr>
-        <p:spPr/>
-        <p:txBody>
-          <a:bodyPr/>
-          <a:lstStyle/>
-          <a:p>
-            <a:fld id="{F7021451-1387-4CA6-816F-3879F97B5CBC}" type="slidenum">
-              <a:rPr lang="en-US"/>
-              <a:t>12</a:t>
-            </a:fld>
-            <a:endParaRPr lang="en-US"/>
-          </a:p>
-        </p:txBody>
-      </p:sp>
-    </p:spTree>
-    <p:extLst>
-      <p:ext uri="{BB962C8B-B14F-4D97-AF65-F5344CB8AC3E}">
-        <p14:creationId xmlns:p14="http://schemas.microsoft.com/office/powerpoint/2010/main" val="1024086991"/>
-      </p:ext>
-    </p:extLst>
-  </p:cSld>
-  <p:clrMapOvr>
-    <a:masterClrMapping/>
-  </p:clrMapOvr>
-</p:notes>
-</file>
-
-<file path=ppt/notesSlides/notesSlide13.xml><?xml version="1.0" encoding="utf-8"?>
-<p:notes xmlns:a="http://schemas.openxmlformats.org/drawingml/2006/main" xmlns:r="http://schemas.openxmlformats.org/officeDocument/2006/relationships" xmlns:p="http://schemas.openxmlformats.org/presentationml/2006/main">
-  <p:cSld>
-    <p:spTree>
-      <p:nvGrpSpPr>
-        <p:cNvPr id="1" name=""/>
-        <p:cNvGrpSpPr/>
-        <p:nvPr/>
-      </p:nvGrpSpPr>
-      <p:grpSpPr>
-        <a:xfrm>
-          <a:off x="0" y="0"/>
-          <a:ext cx="0" cy="0"/>
-          <a:chOff x="0" y="0"/>
-          <a:chExt cx="0" cy="0"/>
-        </a:xfrm>
-      </p:grpSpPr>
-      <p:sp>
-        <p:nvSpPr>
-          <p:cNvPr id="2" name="Slide Image Placeholder 1"/>
-          <p:cNvSpPr>
-            <a:spLocks noGrp="1" noRot="1" noChangeAspect="1"/>
-          </p:cNvSpPr>
-          <p:nvPr>
-            <p:ph type="sldImg"/>
-          </p:nvPr>
-        </p:nvSpPr>
-        <p:spPr/>
-      </p:sp>
-      <p:sp>
-        <p:nvSpPr>
-          <p:cNvPr id="3" name="Notes Placeholder 2"/>
-          <p:cNvSpPr>
-            <a:spLocks noGrp="1"/>
-          </p:cNvSpPr>
-          <p:nvPr>
-            <p:ph type="body" idx="1"/>
-          </p:nvPr>
-        </p:nvSpPr>
-        <p:spPr/>
-        <p:txBody>
-          <a:bodyPr/>
-          <a:lstStyle/>
-          <a:p>
-            <a:r>
-              <a:rPr lang="en-US" dirty="0"/>
-              <a:t>Пользуются сервисом ребенок и родитель, платит ребенок или работодатель. Подписку продает отдельная сервисная компания группы, потому что статья 6 закона об организации страхового дела ограничивает страховщика страховой деятельностью; схему подтвердит юрист в первый месяц MVP. Плюс кросс-продажи ДМС и полиса ухода и льготы ветеранам со средней скидкой 4,8%. Сильнее всего экономику двигают нагрузка на координатора, стоимость привлечения и отток, поэтому все три мы меряем в MVP.</a:t>
-            </a:r>
-            <a:endParaRPr lang="en-US" dirty="0"/>
-          </a:p>
-        </p:txBody>
-      </p:sp>
-      <p:sp>
-        <p:nvSpPr>
-          <p:cNvPr id="4" name="Slide Number Placeholder 3"/>
-          <p:cNvSpPr>
-            <a:spLocks noGrp="1"/>
-          </p:cNvSpPr>
-          <p:nvPr>
-            <p:ph type="sldNum" sz="quarter" idx="10"/>
-          </p:nvPr>
-        </p:nvSpPr>
-        <p:spPr/>
-        <p:txBody>
-          <a:bodyPr/>
-          <a:lstStyle/>
-          <a:p>
-            <a:fld id="{F7021451-1387-4CA6-816F-3879F97B5CBC}" type="slidenum">
-              <a:rPr lang="en-US"/>
-              <a:t>13</a:t>
-            </a:fld>
-            <a:endParaRPr lang="en-US"/>
-          </a:p>
-        </p:txBody>
-      </p:sp>
-    </p:spTree>
-    <p:extLst>
-      <p:ext uri="{BB962C8B-B14F-4D97-AF65-F5344CB8AC3E}">
-        <p14:creationId xmlns:p14="http://schemas.microsoft.com/office/powerpoint/2010/main" val="1024086991"/>
-      </p:ext>
-    </p:extLst>
-  </p:cSld>
-  <p:clrMapOvr>
-    <a:masterClrMapping/>
-  </p:clrMapOvr>
-</p:notes>
-</file>
-
-<file path=ppt/notesSlides/notesSlide14.xml><?xml version="1.0" encoding="utf-8"?>
-<p:notes xmlns:a="http://schemas.openxmlformats.org/drawingml/2006/main" xmlns:r="http://schemas.openxmlformats.org/officeDocument/2006/relationships" xmlns:p="http://schemas.openxmlformats.org/presentationml/2006/main">
-  <p:cSld>
-    <p:spTree>
-      <p:nvGrpSpPr>
-        <p:cNvPr id="1" name=""/>
-        <p:cNvGrpSpPr/>
-        <p:nvPr/>
-      </p:nvGrpSpPr>
-      <p:grpSpPr>
-        <a:xfrm>
-          <a:off x="0" y="0"/>
-          <a:ext cx="0" cy="0"/>
-          <a:chOff x="0" y="0"/>
-          <a:chExt cx="0" cy="0"/>
-        </a:xfrm>
-      </p:grpSpPr>
-      <p:sp>
-        <p:nvSpPr>
-          <p:cNvPr id="2" name="Slide Image Placeholder 1"/>
-          <p:cNvSpPr>
-            <a:spLocks noGrp="1" noRot="1" noChangeAspect="1"/>
-          </p:cNvSpPr>
-          <p:nvPr>
-            <p:ph type="sldImg"/>
-          </p:nvPr>
-        </p:nvSpPr>
-        <p:spPr/>
-      </p:sp>
-      <p:sp>
-        <p:nvSpPr>
-          <p:cNvPr id="3" name="Notes Placeholder 2"/>
-          <p:cNvSpPr>
-            <a:spLocks noGrp="1"/>
-          </p:cNvSpPr>
-          <p:nvPr>
-            <p:ph type="body" idx="1"/>
-          </p:nvPr>
-        </p:nvSpPr>
-        <p:spPr/>
-        <p:txBody>
-          <a:bodyPr/>
-          <a:lstStyle/>
-          <a:p>
-            <a:r>
-              <a:rPr lang="en-US" dirty="0"/>
-              <a:t>Первая версия, где живой координатор звонит каждой семье раз в неделю, теряла 515 рублей на каждой семье: чем больше клиентов, тем глубже минус. Мы отдали рутину роботу и телемедицине, перенесли координаторов в регион и подняли цену. Теперь семья приносит 862 рублей маржинального дохода с учетом льгот ветеранам, а LTV/CAC 3,0. Поэтому главная гипотеза MVP именно про триаж.</a:t>
-            </a:r>
-            <a:endParaRPr lang="en-US" dirty="0"/>
-          </a:p>
-        </p:txBody>
-      </p:sp>
-      <p:sp>
-        <p:nvSpPr>
-          <p:cNvPr id="4" name="Slide Number Placeholder 3"/>
-          <p:cNvSpPr>
-            <a:spLocks noGrp="1"/>
-          </p:cNvSpPr>
-          <p:nvPr>
-            <p:ph type="sldNum" sz="quarter" idx="10"/>
-          </p:nvPr>
-        </p:nvSpPr>
-        <p:spPr/>
-        <p:txBody>
-          <a:bodyPr/>
-          <a:lstStyle/>
-          <a:p>
-            <a:fld id="{F7021451-1387-4CA6-816F-3879F97B5CBC}" type="slidenum">
-              <a:rPr lang="en-US"/>
-              <a:t>14</a:t>
-            </a:fld>
-            <a:endParaRPr lang="en-US"/>
-          </a:p>
-        </p:txBody>
-      </p:sp>
-    </p:spTree>
-    <p:extLst>
-      <p:ext uri="{BB962C8B-B14F-4D97-AF65-F5344CB8AC3E}">
-        <p14:creationId xmlns:p14="http://schemas.microsoft.com/office/powerpoint/2010/main" val="1024086991"/>
-      </p:ext>
-    </p:extLst>
-  </p:cSld>
-  <p:clrMapOvr>
-    <a:masterClrMapping/>
-  </p:clrMapOvr>
-</p:notes>
-</file>
-
-<file path=ppt/notesSlides/notesSlide15.xml><?xml version="1.0" encoding="utf-8"?>
-<p:notes xmlns:a="http://schemas.openxmlformats.org/drawingml/2006/main" xmlns:r="http://schemas.openxmlformats.org/officeDocument/2006/relationships" xmlns:p="http://schemas.openxmlformats.org/presentationml/2006/main">
-  <p:cSld>
-    <p:spTree>
-      <p:nvGrpSpPr>
-        <p:cNvPr id="1" name=""/>
-        <p:cNvGrpSpPr/>
-        <p:nvPr/>
-      </p:nvGrpSpPr>
-      <p:grpSpPr>
-        <a:xfrm>
-          <a:off x="0" y="0"/>
-          <a:ext cx="0" cy="0"/>
-          <a:chOff x="0" y="0"/>
-          <a:chExt cx="0" cy="0"/>
-        </a:xfrm>
-      </p:grpSpPr>
-      <p:sp>
-        <p:nvSpPr>
-          <p:cNvPr id="2" name="Slide Image Placeholder 1"/>
-          <p:cNvSpPr>
-            <a:spLocks noGrp="1" noRot="1" noChangeAspect="1"/>
-          </p:cNvSpPr>
-          <p:nvPr>
-            <p:ph type="sldImg"/>
-          </p:nvPr>
-        </p:nvSpPr>
-        <p:spPr/>
-      </p:sp>
-      <p:sp>
-        <p:nvSpPr>
-          <p:cNvPr id="3" name="Notes Placeholder 2"/>
-          <p:cNvSpPr>
-            <a:spLocks noGrp="1"/>
-          </p:cNvSpPr>
-          <p:nvPr>
-            <p:ph type="body" idx="1"/>
-          </p:nvPr>
-        </p:nvSpPr>
-        <p:spPr/>
-        <p:txBody>
-          <a:bodyPr/>
-          <a:lstStyle/>
-          <a:p>
-            <a:r>
-              <a:rPr lang="en-US" dirty="0"/>
-              <a:t>Мы не скрываем, что проект не быстрый. В базе операционная безубыточность на 24-м месяце, окупаемость на 43-м, NPV за три года минус 21,1 миллиона, за пять лет плюс 23,5. Льготы ветеранам уже вычтены. Пессимистичный сценарий уходит в глубокий минус, поэтому решение о росте мы привязываем к результатам MVP, а не к прогнозу.</a:t>
-            </a:r>
-            <a:endParaRPr lang="en-US" dirty="0"/>
-          </a:p>
-        </p:txBody>
-      </p:sp>
-      <p:sp>
-        <p:nvSpPr>
-          <p:cNvPr id="4" name="Slide Number Placeholder 3"/>
-          <p:cNvSpPr>
-            <a:spLocks noGrp="1"/>
-          </p:cNvSpPr>
-          <p:nvPr>
-            <p:ph type="sldNum" sz="quarter" idx="10"/>
-          </p:nvPr>
-        </p:nvSpPr>
-        <p:spPr/>
-        <p:txBody>
-          <a:bodyPr/>
-          <a:lstStyle/>
-          <a:p>
-            <a:fld id="{F7021451-1387-4CA6-816F-3879F97B5CBC}" type="slidenum">
-              <a:rPr lang="en-US"/>
-              <a:t>15</a:t>
-            </a:fld>
-            <a:endParaRPr lang="en-US"/>
-          </a:p>
-        </p:txBody>
-      </p:sp>
-    </p:spTree>
-    <p:extLst>
-      <p:ext uri="{BB962C8B-B14F-4D97-AF65-F5344CB8AC3E}">
-        <p14:creationId xmlns:p14="http://schemas.microsoft.com/office/powerpoint/2010/main" val="1024086991"/>
-      </p:ext>
-    </p:extLst>
-  </p:cSld>
-  <p:clrMapOvr>
-    <a:masterClrMapping/>
-  </p:clrMapOvr>
-</p:notes>
-</file>
-
-<file path=ppt/notesSlides/notesSlide16.xml><?xml version="1.0" encoding="utf-8"?>
-<p:notes xmlns:a="http://schemas.openxmlformats.org/drawingml/2006/main" xmlns:r="http://schemas.openxmlformats.org/officeDocument/2006/relationships" xmlns:p="http://schemas.openxmlformats.org/presentationml/2006/main">
-  <p:cSld>
-    <p:spTree>
-      <p:nvGrpSpPr>
-        <p:cNvPr id="1" name=""/>
-        <p:cNvGrpSpPr/>
-        <p:nvPr/>
-      </p:nvGrpSpPr>
-      <p:grpSpPr>
-        <a:xfrm>
-          <a:off x="0" y="0"/>
-          <a:ext cx="0" cy="0"/>
-          <a:chOff x="0" y="0"/>
-          <a:chExt cx="0" cy="0"/>
-        </a:xfrm>
-      </p:grpSpPr>
-      <p:sp>
-        <p:nvSpPr>
-          <p:cNvPr id="2" name="Slide Image Placeholder 1"/>
-          <p:cNvSpPr>
-            <a:spLocks noGrp="1" noRot="1" noChangeAspect="1"/>
-          </p:cNvSpPr>
-          <p:nvPr>
-            <p:ph type="sldImg"/>
-          </p:nvPr>
-        </p:nvSpPr>
-        <p:spPr/>
-      </p:sp>
-      <p:sp>
-        <p:nvSpPr>
-          <p:cNvPr id="3" name="Notes Placeholder 2"/>
-          <p:cNvSpPr>
-            <a:spLocks noGrp="1"/>
-          </p:cNvSpPr>
-          <p:nvPr>
-            <p:ph type="body" idx="1"/>
-          </p:nvPr>
-        </p:nvSpPr>
-        <p:spPr/>
-        <p:txBody>
-          <a:bodyPr/>
-          <a:lstStyle/>
-          <a:p>
-            <a:r>
-              <a:rPr lang="en-US" dirty="0"/>
-              <a:t>Торнадо показывает, что главные рычаги это цена тарифов, минуты координатора на семью и его зарплата. Монте-Карло на 5 000 прогонов дает положительный NPV за пять лет в 70,8% случаев, а за три года только в 12,7%. Пиковая потребность в деньгах в 95% прогонов не выше 63,3 миллиона. Внизу три риска, которые мы закрываем дизайном MVP: согласие родителя на медданные, пропуск тревоги роботом и отказ родителя от «контроля».</a:t>
-            </a:r>
-            <a:endParaRPr lang="en-US" dirty="0"/>
-          </a:p>
-        </p:txBody>
-      </p:sp>
-      <p:sp>
-        <p:nvSpPr>
-          <p:cNvPr id="4" name="Slide Number Placeholder 3"/>
-          <p:cNvSpPr>
-            <a:spLocks noGrp="1"/>
-          </p:cNvSpPr>
-          <p:nvPr>
-            <p:ph type="sldNum" sz="quarter" idx="10"/>
-          </p:nvPr>
-        </p:nvSpPr>
-        <p:spPr/>
-        <p:txBody>
-          <a:bodyPr/>
-          <a:lstStyle/>
-          <a:p>
-            <a:fld id="{F7021451-1387-4CA6-816F-3879F97B5CBC}" type="slidenum">
-              <a:rPr lang="en-US"/>
-              <a:t>16</a:t>
-            </a:fld>
-            <a:endParaRPr lang="en-US"/>
-          </a:p>
-        </p:txBody>
-      </p:sp>
-    </p:spTree>
-    <p:extLst>
-      <p:ext uri="{BB962C8B-B14F-4D97-AF65-F5344CB8AC3E}">
-        <p14:creationId xmlns:p14="http://schemas.microsoft.com/office/powerpoint/2010/main" val="1024086991"/>
-      </p:ext>
-    </p:extLst>
-  </p:cSld>
-  <p:clrMapOvr>
-    <a:masterClrMapping/>
-  </p:clrMapOvr>
-</p:notes>
-</file>
-
-<file path=ppt/notesSlides/notesSlide17.xml><?xml version="1.0" encoding="utf-8"?>
-<p:notes xmlns:a="http://schemas.openxmlformats.org/drawingml/2006/main" xmlns:r="http://schemas.openxmlformats.org/officeDocument/2006/relationships" xmlns:p="http://schemas.openxmlformats.org/presentationml/2006/main">
-  <p:cSld>
-    <p:spTree>
-      <p:nvGrpSpPr>
-        <p:cNvPr id="1" name=""/>
-        <p:cNvGrpSpPr/>
-        <p:nvPr/>
-      </p:nvGrpSpPr>
-      <p:grpSpPr>
-        <a:xfrm>
-          <a:off x="0" y="0"/>
-          <a:ext cx="0" cy="0"/>
-          <a:chOff x="0" y="0"/>
-          <a:chExt cx="0" cy="0"/>
-        </a:xfrm>
-      </p:grpSpPr>
-      <p:sp>
-        <p:nvSpPr>
-          <p:cNvPr id="2" name="Slide Image Placeholder 1"/>
-          <p:cNvSpPr>
-            <a:spLocks noGrp="1" noRot="1" noChangeAspect="1"/>
-          </p:cNvSpPr>
-          <p:nvPr>
-            <p:ph type="sldImg"/>
-          </p:nvPr>
-        </p:nvSpPr>
-        <p:spPr/>
-      </p:sp>
-      <p:sp>
-        <p:nvSpPr>
-          <p:cNvPr id="3" name="Notes Placeholder 2"/>
-          <p:cNvSpPr>
-            <a:spLocks noGrp="1"/>
-          </p:cNvSpPr>
-          <p:nvPr>
-            <p:ph type="body" idx="1"/>
-          </p:nvPr>
-        </p:nvSpPr>
-        <p:spPr/>
-        <p:txBody>
-          <a:bodyPr/>
-          <a:lstStyle/>
-          <a:p>
-            <a:r>
-              <a:rPr lang="en-US" dirty="0"/>
-              <a:t>MVP частично ручной и не требует новой разработки в IngoMobile. Больше половины бюджета это команда: три координатора из действующих операторов ДМС, супервизор и продакт. Первый месяц уходит на юридическую схему, бот, скрипты, курс по льготам ветеранов и договор о пилоте с фондом «Защитники Отечества», во втором запускаем 50 семей, в третьем растем до 150, из них около 15 семей ветеранов, и тестируем цену 2 490 и 4 990 рублей. В конце двенадцатой недели принимаем решение.</a:t>
-            </a:r>
-            <a:endParaRPr lang="en-US" dirty="0"/>
-          </a:p>
-        </p:txBody>
-      </p:sp>
-      <p:sp>
-        <p:nvSpPr>
-          <p:cNvPr id="4" name="Slide Number Placeholder 3"/>
-          <p:cNvSpPr>
-            <a:spLocks noGrp="1"/>
-          </p:cNvSpPr>
-          <p:nvPr>
-            <p:ph type="sldNum" sz="quarter" idx="10"/>
-          </p:nvPr>
-        </p:nvSpPr>
-        <p:spPr/>
-        <p:txBody>
-          <a:bodyPr/>
-          <a:lstStyle/>
-          <a:p>
-            <a:fld id="{F7021451-1387-4CA6-816F-3879F97B5CBC}" type="slidenum">
-              <a:rPr lang="en-US"/>
-              <a:t>17</a:t>
-            </a:fld>
-            <a:endParaRPr lang="en-US"/>
-          </a:p>
-        </p:txBody>
-      </p:sp>
-    </p:spTree>
-    <p:extLst>
-      <p:ext uri="{BB962C8B-B14F-4D97-AF65-F5344CB8AC3E}">
-        <p14:creationId xmlns:p14="http://schemas.microsoft.com/office/powerpoint/2010/main" val="1024086991"/>
-      </p:ext>
-    </p:extLst>
-  </p:cSld>
-  <p:clrMapOvr>
-    <a:masterClrMapping/>
-  </p:clrMapOvr>
-</p:notes>
-</file>
-
-<file path=ppt/notesSlides/notesSlide18.xml><?xml version="1.0" encoding="utf-8"?>
-<p:notes xmlns:a="http://schemas.openxmlformats.org/drawingml/2006/main" xmlns:r="http://schemas.openxmlformats.org/officeDocument/2006/relationships" xmlns:p="http://schemas.openxmlformats.org/presentationml/2006/main">
-  <p:cSld>
-    <p:spTree>
-      <p:nvGrpSpPr>
-        <p:cNvPr id="1" name=""/>
-        <p:cNvGrpSpPr/>
-        <p:nvPr/>
-      </p:nvGrpSpPr>
-      <p:grpSpPr>
-        <a:xfrm>
-          <a:off x="0" y="0"/>
-          <a:ext cx="0" cy="0"/>
-          <a:chOff x="0" y="0"/>
-          <a:chExt cx="0" cy="0"/>
-        </a:xfrm>
-      </p:grpSpPr>
-      <p:sp>
-        <p:nvSpPr>
-          <p:cNvPr id="2" name="Slide Image Placeholder 1"/>
-          <p:cNvSpPr>
-            <a:spLocks noGrp="1" noRot="1" noChangeAspect="1"/>
-          </p:cNvSpPr>
-          <p:nvPr>
-            <p:ph type="sldImg"/>
-          </p:nvPr>
-        </p:nvSpPr>
-        <p:spPr/>
-      </p:sp>
-      <p:sp>
-        <p:nvSpPr>
-          <p:cNvPr id="3" name="Notes Placeholder 2"/>
-          <p:cNvSpPr>
-            <a:spLocks noGrp="1"/>
-          </p:cNvSpPr>
-          <p:nvPr>
-            <p:ph type="body" idx="1"/>
-          </p:nvPr>
-        </p:nvSpPr>
-        <p:spPr/>
-        <p:txBody>
-          <a:bodyPr/>
-          <a:lstStyle/>
-          <a:p>
-            <a:r>
-              <a:rPr lang="en-US" dirty="0"/>
-              <a:t>Каждая гипотеза имеет способ проверки и числовой порог, заданный заранее. H4 выделена: если триаж не удержит 49 минут на семью, экономика возвращается к версии 1. Правило решения простое: все пороги пройдены, просим деньги на рост; часть, перестраиваем и меряем снова; провал H3 или H4, останавливаемся. H6 проверяет канал через фонд «Защитники Отечества»: если он не сработает, льготы остаются, а канал убираем из модели.</a:t>
-            </a:r>
-            <a:endParaRPr lang="en-US" dirty="0"/>
-          </a:p>
-        </p:txBody>
-      </p:sp>
-      <p:sp>
-        <p:nvSpPr>
-          <p:cNvPr id="4" name="Slide Number Placeholder 3"/>
-          <p:cNvSpPr>
-            <a:spLocks noGrp="1"/>
-          </p:cNvSpPr>
-          <p:nvPr>
-            <p:ph type="sldNum" sz="quarter" idx="10"/>
-          </p:nvPr>
-        </p:nvSpPr>
-        <p:spPr/>
-        <p:txBody>
-          <a:bodyPr/>
-          <a:lstStyle/>
-          <a:p>
-            <a:fld id="{F7021451-1387-4CA6-816F-3879F97B5CBC}" type="slidenum">
-              <a:rPr lang="en-US"/>
-              <a:t>18</a:t>
-            </a:fld>
-            <a:endParaRPr lang="en-US"/>
-          </a:p>
-        </p:txBody>
-      </p:sp>
-    </p:spTree>
-    <p:extLst>
-      <p:ext uri="{BB962C8B-B14F-4D97-AF65-F5344CB8AC3E}">
-        <p14:creationId xmlns:p14="http://schemas.microsoft.com/office/powerpoint/2010/main" val="1024086991"/>
-      </p:ext>
-    </p:extLst>
-  </p:cSld>
-  <p:clrMapOvr>
-    <a:masterClrMapping/>
-  </p:clrMapOvr>
-</p:notes>
-</file>
-
-<file path=ppt/notesSlides/notesSlide19.xml><?xml version="1.0" encoding="utf-8"?>
-<p:notes xmlns:a="http://schemas.openxmlformats.org/drawingml/2006/main" xmlns:r="http://schemas.openxmlformats.org/officeDocument/2006/relationships" xmlns:p="http://schemas.openxmlformats.org/presentationml/2006/main">
-  <p:cSld>
-    <p:spTree>
-      <p:nvGrpSpPr>
-        <p:cNvPr id="1" name=""/>
-        <p:cNvGrpSpPr/>
-        <p:nvPr/>
-      </p:nvGrpSpPr>
-      <p:grpSpPr>
-        <a:xfrm>
-          <a:off x="0" y="0"/>
-          <a:ext cx="0" cy="0"/>
-          <a:chOff x="0" y="0"/>
-          <a:chExt cx="0" cy="0"/>
-        </a:xfrm>
-      </p:grpSpPr>
-      <p:sp>
-        <p:nvSpPr>
-          <p:cNvPr id="2" name="Slide Image Placeholder 1"/>
-          <p:cNvSpPr>
-            <a:spLocks noGrp="1" noRot="1" noChangeAspect="1"/>
-          </p:cNvSpPr>
-          <p:nvPr>
-            <p:ph type="sldImg"/>
-          </p:nvPr>
-        </p:nvSpPr>
-        <p:spPr/>
-      </p:sp>
-      <p:sp>
-        <p:nvSpPr>
-          <p:cNvPr id="3" name="Notes Placeholder 2"/>
-          <p:cNvSpPr>
-            <a:spLocks noGrp="1"/>
-          </p:cNvSpPr>
-          <p:nvPr>
-            <p:ph type="body" idx="1"/>
-          </p:nvPr>
-        </p:nvSpPr>
-        <p:spPr/>
-        <p:txBody>
-          <a:bodyPr/>
-          <a:lstStyle/>
-          <a:p>
-            <a:r>
-              <a:rPr lang="en-US" dirty="0"/>
-              <a:t>Наш честный ответ: да, чтобы инвестировать в трехмесячную проверку, и нет, чтобы сразу масштабировать. За проверку говорят открытые данные, пустая ниша между «сам» и сиделкой и готовые блоки Ингосстраха. Против пока то, что спрос и готовность платить не подтверждены реальными людьми и деньгами, а NPV за три года положителен только в 12,7% прогонов. Поэтому просим 4,87 миллиона с жесткой точкой решения на двенадцатой неделе.</a:t>
-            </a:r>
-            <a:endParaRPr lang="en-US" dirty="0"/>
-          </a:p>
-        </p:txBody>
-      </p:sp>
-      <p:sp>
-        <p:nvSpPr>
-          <p:cNvPr id="4" name="Slide Number Placeholder 3"/>
-          <p:cNvSpPr>
-            <a:spLocks noGrp="1"/>
-          </p:cNvSpPr>
-          <p:nvPr>
-            <p:ph type="sldNum" sz="quarter" idx="10"/>
-          </p:nvPr>
-        </p:nvSpPr>
-        <p:spPr/>
-        <p:txBody>
-          <a:bodyPr/>
-          <a:lstStyle/>
-          <a:p>
-            <a:fld id="{F7021451-1387-4CA6-816F-3879F97B5CBC}" type="slidenum">
-              <a:rPr lang="en-US"/>
-              <a:t>19</a:t>
-            </a:fld>
-            <a:endParaRPr lang="en-US"/>
-          </a:p>
-        </p:txBody>
-      </p:sp>
-    </p:spTree>
-    <p:extLst>
-      <p:ext uri="{BB962C8B-B14F-4D97-AF65-F5344CB8AC3E}">
-        <p14:creationId xmlns:p14="http://schemas.microsoft.com/office/powerpoint/2010/main" val="1024086991"/>
-      </p:ext>
-    </p:extLst>
-  </p:cSld>
-  <p:clrMapOvr>
-    <a:masterClrMapping/>
-  </p:clrMapOvr>
-</p:notes>
-</file>
-
-<file path=ppt/notesSlides/notesSlide2.xml><?xml version="1.0" encoding="utf-8"?>
-<p:notes xmlns:a="http://schemas.openxmlformats.org/drawingml/2006/main" xmlns:r="http://schemas.openxmlformats.org/officeDocument/2006/relationships" xmlns:p="http://schemas.openxmlformats.org/presentationml/2006/main">
-  <p:cSld>
-    <p:spTree>
-      <p:nvGrpSpPr>
-        <p:cNvPr id="1" name=""/>
-        <p:cNvGrpSpPr/>
-        <p:nvPr/>
-      </p:nvGrpSpPr>
-      <p:grpSpPr>
-        <a:xfrm>
-          <a:off x="0" y="0"/>
-          <a:ext cx="0" cy="0"/>
-          <a:chOff x="0" y="0"/>
-          <a:chExt cx="0" cy="0"/>
-        </a:xfrm>
-      </p:grpSpPr>
-      <p:sp>
-        <p:nvSpPr>
-          <p:cNvPr id="2" name="Slide Image Placeholder 1"/>
-          <p:cNvSpPr>
-            <a:spLocks noGrp="1" noRot="1" noChangeAspect="1"/>
-          </p:cNvSpPr>
-          <p:nvPr>
-            <p:ph type="sldImg"/>
-          </p:nvPr>
-        </p:nvSpPr>
-        <p:spPr/>
-      </p:sp>
-      <p:sp>
-        <p:nvSpPr>
-          <p:cNvPr id="3" name="Notes Placeholder 2"/>
-          <p:cNvSpPr>
-            <a:spLocks noGrp="1"/>
-          </p:cNvSpPr>
-          <p:nvPr>
-            <p:ph type="body" idx="1"/>
-          </p:nvPr>
-        </p:nvSpPr>
-        <p:spPr/>
-        <p:txBody>
-          <a:bodyPr/>
-          <a:lstStyle/>
-          <a:p>
-            <a:r>
-              <a:rPr lang="en-US" dirty="0"/>
-              <a:t>Сегмент мы описываем по поведению, а не по возрасту: это человек, который сам организует медпомощь родителю, хотя живет отдельно. Пользователей двое, ребенок в чате и родитель по телефону, а решает и платит ребенок или его работодатель. Триггер почти всегда событие: диагноз, госпитализация или первый случай, когда о проблеме узнали поздно.</a:t>
-            </a:r>
-            <a:endParaRPr lang="en-US" dirty="0"/>
-          </a:p>
-        </p:txBody>
-      </p:sp>
-      <p:sp>
-        <p:nvSpPr>
-          <p:cNvPr id="4" name="Slide Number Placeholder 3"/>
-          <p:cNvSpPr>
-            <a:spLocks noGrp="1"/>
-          </p:cNvSpPr>
-          <p:nvPr>
-            <p:ph type="sldNum" sz="quarter" idx="10"/>
-          </p:nvPr>
-        </p:nvSpPr>
-        <p:spPr/>
-        <p:txBody>
-          <a:bodyPr/>
-          <a:lstStyle/>
-          <a:p>
-            <a:fld id="{F7021451-1387-4CA6-816F-3879F97B5CBC}" type="slidenum">
-              <a:rPr lang="en-US"/>
-              <a:t>2</a:t>
-            </a:fld>
-            <a:endParaRPr lang="en-US"/>
-          </a:p>
-        </p:txBody>
-      </p:sp>
-    </p:spTree>
-    <p:extLst>
-      <p:ext uri="{BB962C8B-B14F-4D97-AF65-F5344CB8AC3E}">
-        <p14:creationId xmlns:p14="http://schemas.microsoft.com/office/powerpoint/2010/main" val="1024086991"/>
-      </p:ext>
-    </p:extLst>
-  </p:cSld>
-  <p:clrMapOvr>
-    <a:masterClrMapping/>
-  </p:clrMapOvr>
-</p:notes>
-</file>
-
-<file path=ppt/notesSlides/notesSlide20.xml><?xml version="1.0" encoding="utf-8"?>
-<p:notes xmlns:a="http://schemas.openxmlformats.org/drawingml/2006/main" xmlns:r="http://schemas.openxmlformats.org/officeDocument/2006/relationships" xmlns:p="http://schemas.openxmlformats.org/presentationml/2006/main">
-  <p:cSld>
-    <p:spTree>
-      <p:nvGrpSpPr>
-        <p:cNvPr id="1" name=""/>
-        <p:cNvGrpSpPr/>
-        <p:nvPr/>
-      </p:nvGrpSpPr>
-      <p:grpSpPr>
-        <a:xfrm>
-          <a:off x="0" y="0"/>
-          <a:ext cx="0" cy="0"/>
-          <a:chOff x="0" y="0"/>
-          <a:chExt cx="0" cy="0"/>
-        </a:xfrm>
-      </p:grpSpPr>
-      <p:sp>
-        <p:nvSpPr>
-          <p:cNvPr id="2" name="Slide Image Placeholder 1"/>
-          <p:cNvSpPr>
-            <a:spLocks noGrp="1" noRot="1" noChangeAspect="1"/>
-          </p:cNvSpPr>
-          <p:nvPr>
-            <p:ph type="sldImg"/>
-          </p:nvPr>
-        </p:nvSpPr>
-        <p:spPr/>
-      </p:sp>
-      <p:sp>
-        <p:nvSpPr>
-          <p:cNvPr id="3" name="Notes Placeholder 2"/>
-          <p:cNvSpPr>
-            <a:spLocks noGrp="1"/>
-          </p:cNvSpPr>
-          <p:nvPr>
-            <p:ph type="body" idx="1"/>
-          </p:nvPr>
-        </p:nvSpPr>
-        <p:spPr/>
-        <p:txBody>
-          <a:bodyPr/>
-          <a:lstStyle/>
-          <a:p>
-            <a:r>
-              <a:rPr lang="en-US" dirty="0"/>
-              <a:t>Здесь все внешние источники с кодами, которые стоят на слайдах. Факты перепроверены 22 октября 2026 года. Полная таблица фактов с вердиктами лежит в материалах исследования.</a:t>
-            </a:r>
-            <a:endParaRPr lang="en-US" dirty="0"/>
-          </a:p>
-        </p:txBody>
-      </p:sp>
-      <p:sp>
-        <p:nvSpPr>
-          <p:cNvPr id="4" name="Slide Number Placeholder 3"/>
-          <p:cNvSpPr>
-            <a:spLocks noGrp="1"/>
-          </p:cNvSpPr>
-          <p:nvPr>
-            <p:ph type="sldNum" sz="quarter" idx="10"/>
-          </p:nvPr>
-        </p:nvSpPr>
-        <p:spPr/>
-        <p:txBody>
-          <a:bodyPr/>
-          <a:lstStyle/>
-          <a:p>
-            <a:fld id="{F7021451-1387-4CA6-816F-3879F97B5CBC}" type="slidenum">
-              <a:rPr lang="en-US"/>
-              <a:t>20</a:t>
-            </a:fld>
-            <a:endParaRPr lang="en-US"/>
-          </a:p>
-        </p:txBody>
-      </p:sp>
-    </p:spTree>
-    <p:extLst>
-      <p:ext uri="{BB962C8B-B14F-4D97-AF65-F5344CB8AC3E}">
-        <p14:creationId xmlns:p14="http://schemas.microsoft.com/office/powerpoint/2010/main" val="1024086991"/>
-      </p:ext>
-    </p:extLst>
-  </p:cSld>
-  <p:clrMapOvr>
-    <a:masterClrMapping/>
-  </p:clrMapOvr>
-</p:notes>
-</file>
-
-<file path=ppt/notesSlides/notesSlide3.xml><?xml version="1.0" encoding="utf-8"?>
-<p:notes xmlns:a="http://schemas.openxmlformats.org/drawingml/2006/main" xmlns:r="http://schemas.openxmlformats.org/officeDocument/2006/relationships" xmlns:p="http://schemas.openxmlformats.org/presentationml/2006/main">
-  <p:cSld>
-    <p:spTree>
-      <p:nvGrpSpPr>
-        <p:cNvPr id="1" name=""/>
-        <p:cNvGrpSpPr/>
-        <p:nvPr/>
-      </p:nvGrpSpPr>
-      <p:grpSpPr>
-        <a:xfrm>
-          <a:off x="0" y="0"/>
-          <a:ext cx="0" cy="0"/>
-          <a:chOff x="0" y="0"/>
-          <a:chExt cx="0" cy="0"/>
-        </a:xfrm>
-      </p:grpSpPr>
-      <p:sp>
-        <p:nvSpPr>
-          <p:cNvPr id="2" name="Slide Image Placeholder 1"/>
-          <p:cNvSpPr>
-            <a:spLocks noGrp="1" noRot="1" noChangeAspect="1"/>
-          </p:cNvSpPr>
-          <p:nvPr>
-            <p:ph type="sldImg"/>
-          </p:nvPr>
-        </p:nvSpPr>
-        <p:spPr/>
-      </p:sp>
-      <p:sp>
-        <p:nvSpPr>
-          <p:cNvPr id="3" name="Notes Placeholder 2"/>
-          <p:cNvSpPr>
-            <a:spLocks noGrp="1"/>
-          </p:cNvSpPr>
-          <p:nvPr>
-            <p:ph type="body" idx="1"/>
-          </p:nvPr>
-        </p:nvSpPr>
-        <p:spPr/>
-        <p:txBody>
-          <a:bodyPr/>
-          <a:lstStyle/>
-          <a:p>
-            <a:r>
-              <a:rPr lang="en-US" dirty="0"/>
-              <a:t>Здесь только перепроверенные открытые данные, у каждого числа метка: факт из источника или наш расчет. Главная цифра: система долговременного ухода охватывает 11% нуждающихся, остальное тянут семьи. Мы честно показываем и то, что против нас: рынок ухаживающих не растет, а доли детей, живущих отдельно, в открытых данных нет, поэтому это допущение для анкеты.</a:t>
-            </a:r>
-            <a:endParaRPr lang="en-US" dirty="0"/>
-          </a:p>
-        </p:txBody>
-      </p:sp>
-      <p:sp>
-        <p:nvSpPr>
-          <p:cNvPr id="4" name="Slide Number Placeholder 3"/>
-          <p:cNvSpPr>
-            <a:spLocks noGrp="1"/>
-          </p:cNvSpPr>
-          <p:nvPr>
-            <p:ph type="sldNum" sz="quarter" idx="10"/>
-          </p:nvPr>
-        </p:nvSpPr>
-        <p:spPr/>
-        <p:txBody>
-          <a:bodyPr/>
-          <a:lstStyle/>
-          <a:p>
-            <a:fld id="{F7021451-1387-4CA6-816F-3879F97B5CBC}" type="slidenum">
-              <a:rPr lang="en-US"/>
-              <a:t>3</a:t>
-            </a:fld>
-            <a:endParaRPr lang="en-US"/>
-          </a:p>
-        </p:txBody>
-      </p:sp>
-    </p:spTree>
-    <p:extLst>
-      <p:ext uri="{BB962C8B-B14F-4D97-AF65-F5344CB8AC3E}">
-        <p14:creationId xmlns:p14="http://schemas.microsoft.com/office/powerpoint/2010/main" val="1024086991"/>
-      </p:ext>
-    </p:extLst>
-  </p:cSld>
-  <p:clrMapOvr>
-    <a:masterClrMapping/>
-  </p:clrMapOvr>
-</p:notes>
-</file>
-
-<file path=ppt/notesSlides/notesSlide4.xml><?xml version="1.0" encoding="utf-8"?>
-<p:notes xmlns:a="http://schemas.openxmlformats.org/drawingml/2006/main" xmlns:r="http://schemas.openxmlformats.org/officeDocument/2006/relationships" xmlns:p="http://schemas.openxmlformats.org/presentationml/2006/main">
-  <p:cSld>
-    <p:spTree>
-      <p:nvGrpSpPr>
-        <p:cNvPr id="1" name=""/>
-        <p:cNvGrpSpPr/>
-        <p:nvPr/>
-      </p:nvGrpSpPr>
-      <p:grpSpPr>
-        <a:xfrm>
-          <a:off x="0" y="0"/>
-          <a:ext cx="0" cy="0"/>
-          <a:chOff x="0" y="0"/>
-          <a:chExt cx="0" cy="0"/>
-        </a:xfrm>
-      </p:grpSpPr>
-      <p:sp>
-        <p:nvSpPr>
-          <p:cNvPr id="2" name="Slide Image Placeholder 1"/>
-          <p:cNvSpPr>
-            <a:spLocks noGrp="1" noRot="1" noChangeAspect="1"/>
-          </p:cNvSpPr>
-          <p:nvPr>
-            <p:ph type="sldImg"/>
-          </p:nvPr>
-        </p:nvSpPr>
-        <p:spPr/>
-      </p:sp>
-      <p:sp>
-        <p:nvSpPr>
-          <p:cNvPr id="3" name="Notes Placeholder 2"/>
-          <p:cNvSpPr>
-            <a:spLocks noGrp="1"/>
-          </p:cNvSpPr>
-          <p:nvPr>
-            <p:ph type="body" idx="1"/>
-          </p:nvPr>
-        </p:nvSpPr>
-        <p:spPr/>
-        <p:txBody>
-          <a:bodyPr/>
-          <a:lstStyle/>
-          <a:p>
-            <a:r>
-              <a:rPr lang="en-US" dirty="0"/>
-              <a:t>Это единственный слайд, который мы заполним после полевого исследования 23-25 октября. Мы заранее зафиксировали порог H1 и структуру: сколько людей опросили, три повторяющихся паттерна, цитаты и то, что противоречит гипотезе. Если порог не пройден, мы покажем это здесь прямо и поменяем решение.</a:t>
-            </a:r>
-            <a:endParaRPr lang="en-US" dirty="0"/>
-          </a:p>
-        </p:txBody>
-      </p:sp>
-      <p:sp>
-        <p:nvSpPr>
-          <p:cNvPr id="4" name="Slide Number Placeholder 3"/>
-          <p:cNvSpPr>
-            <a:spLocks noGrp="1"/>
-          </p:cNvSpPr>
-          <p:nvPr>
-            <p:ph type="sldNum" sz="quarter" idx="10"/>
-          </p:nvPr>
-        </p:nvSpPr>
-        <p:spPr/>
-        <p:txBody>
-          <a:bodyPr/>
-          <a:lstStyle/>
-          <a:p>
-            <a:fld id="{F7021451-1387-4CA6-816F-3879F97B5CBC}" type="slidenum">
-              <a:rPr lang="en-US"/>
-              <a:t>4</a:t>
-            </a:fld>
-            <a:endParaRPr lang="en-US"/>
-          </a:p>
-        </p:txBody>
-      </p:sp>
-    </p:spTree>
-    <p:extLst>
-      <p:ext uri="{BB962C8B-B14F-4D97-AF65-F5344CB8AC3E}">
-        <p14:creationId xmlns:p14="http://schemas.microsoft.com/office/powerpoint/2010/main" val="1024086991"/>
-      </p:ext>
-    </p:extLst>
-  </p:cSld>
-  <p:clrMapOvr>
-    <a:masterClrMapping/>
-  </p:clrMapOvr>
-</p:notes>
-</file>
-
-<file path=ppt/notesSlides/notesSlide5.xml><?xml version="1.0" encoding="utf-8"?>
-<p:notes xmlns:a="http://schemas.openxmlformats.org/drawingml/2006/main" xmlns:r="http://schemas.openxmlformats.org/officeDocument/2006/relationships" xmlns:p="http://schemas.openxmlformats.org/presentationml/2006/main">
-  <p:cSld>
-    <p:spTree>
-      <p:nvGrpSpPr>
-        <p:cNvPr id="1" name=""/>
-        <p:cNvGrpSpPr/>
-        <p:nvPr/>
-      </p:nvGrpSpPr>
-      <p:grpSpPr>
-        <a:xfrm>
-          <a:off x="0" y="0"/>
-          <a:ext cx="0" cy="0"/>
-          <a:chOff x="0" y="0"/>
-          <a:chExt cx="0" cy="0"/>
-        </a:xfrm>
-      </p:grpSpPr>
-      <p:sp>
-        <p:nvSpPr>
-          <p:cNvPr id="2" name="Slide Image Placeholder 1"/>
-          <p:cNvSpPr>
-            <a:spLocks noGrp="1" noRot="1" noChangeAspect="1"/>
-          </p:cNvSpPr>
-          <p:nvPr>
-            <p:ph type="sldImg"/>
-          </p:nvPr>
-        </p:nvSpPr>
-        <p:spPr/>
-      </p:sp>
-      <p:sp>
-        <p:nvSpPr>
-          <p:cNvPr id="3" name="Notes Placeholder 2"/>
-          <p:cNvSpPr>
-            <a:spLocks noGrp="1"/>
-          </p:cNvSpPr>
-          <p:nvPr>
-            <p:ph type="body" idx="1"/>
-          </p:nvPr>
-        </p:nvSpPr>
-        <p:spPr/>
-        <p:txBody>
-          <a:bodyPr/>
-          <a:lstStyle/>
-          <a:p>
-            <a:r>
-              <a:rPr lang="en-US" dirty="0"/>
-              <a:t>Мы начинали с карты поведения, а не со списка конкурентов. Сегодня ребенок либо все делает сам, либо нанимает сиделку за 30-72 тысячи в месяц. ДМС и полис ухода платят за лечение или после наступления случая, но никто не организует помощь для самостоятельного родителя. Этот разрыв и закрывает ИНГОССЕМЬЯ.</a:t>
-            </a:r>
-            <a:endParaRPr lang="en-US" dirty="0"/>
-          </a:p>
-        </p:txBody>
-      </p:sp>
-      <p:sp>
-        <p:nvSpPr>
-          <p:cNvPr id="4" name="Slide Number Placeholder 3"/>
-          <p:cNvSpPr>
-            <a:spLocks noGrp="1"/>
-          </p:cNvSpPr>
-          <p:nvPr>
-            <p:ph type="sldNum" sz="quarter" idx="10"/>
-          </p:nvPr>
-        </p:nvSpPr>
-        <p:spPr/>
-        <p:txBody>
-          <a:bodyPr/>
-          <a:lstStyle/>
-          <a:p>
-            <a:fld id="{F7021451-1387-4CA6-816F-3879F97B5CBC}" type="slidenum">
-              <a:rPr lang="en-US"/>
-              <a:t>5</a:t>
-            </a:fld>
-            <a:endParaRPr lang="en-US"/>
-          </a:p>
-        </p:txBody>
-      </p:sp>
-    </p:spTree>
-    <p:extLst>
-      <p:ext uri="{BB962C8B-B14F-4D97-AF65-F5344CB8AC3E}">
-        <p14:creationId xmlns:p14="http://schemas.microsoft.com/office/powerpoint/2010/main" val="1024086991"/>
-      </p:ext>
-    </p:extLst>
-  </p:cSld>
-  <p:clrMapOvr>
-    <a:masterClrMapping/>
-  </p:clrMapOvr>
-</p:notes>
-</file>
-
-<file path=ppt/notesSlides/notesSlide6.xml><?xml version="1.0" encoding="utf-8"?>
-<p:notes xmlns:a="http://schemas.openxmlformats.org/drawingml/2006/main" xmlns:r="http://schemas.openxmlformats.org/officeDocument/2006/relationships" xmlns:p="http://schemas.openxmlformats.org/presentationml/2006/main">
-  <p:cSld>
-    <p:spTree>
-      <p:nvGrpSpPr>
-        <p:cNvPr id="1" name=""/>
-        <p:cNvGrpSpPr/>
-        <p:nvPr/>
-      </p:nvGrpSpPr>
-      <p:grpSpPr>
-        <a:xfrm>
-          <a:off x="0" y="0"/>
-          <a:ext cx="0" cy="0"/>
-          <a:chOff x="0" y="0"/>
-          <a:chExt cx="0" cy="0"/>
-        </a:xfrm>
-      </p:grpSpPr>
-      <p:sp>
-        <p:nvSpPr>
-          <p:cNvPr id="2" name="Slide Image Placeholder 1"/>
-          <p:cNvSpPr>
-            <a:spLocks noGrp="1" noRot="1" noChangeAspect="1"/>
-          </p:cNvSpPr>
-          <p:nvPr>
-            <p:ph type="sldImg"/>
-          </p:nvPr>
-        </p:nvSpPr>
-        <p:spPr/>
-      </p:sp>
-      <p:sp>
-        <p:nvSpPr>
-          <p:cNvPr id="3" name="Notes Placeholder 2"/>
-          <p:cNvSpPr>
-            <a:spLocks noGrp="1"/>
-          </p:cNvSpPr>
-          <p:nvPr>
-            <p:ph type="body" idx="1"/>
-          </p:nvPr>
-        </p:nvSpPr>
-        <p:spPr/>
-        <p:txBody>
-          <a:bodyPr/>
-          <a:lstStyle/>
-          <a:p>
-            <a:r>
-              <a:rPr lang="en-US" dirty="0"/>
-              <a:t>Размер считаем от людей 65+ через несколько долей, и каждая доля помечена. Две из них пока допущения, поэтому TAM 5,85 миллиона семей это порядок величины. Важнее другое: для базового сценария нам нужно 10 654 семей через пять лет, это 0,52% от SAM, так что запас по рынку большой даже при более скромных долях.</a:t>
-            </a:r>
-            <a:endParaRPr lang="en-US" dirty="0"/>
-          </a:p>
-        </p:txBody>
-      </p:sp>
-      <p:sp>
-        <p:nvSpPr>
-          <p:cNvPr id="4" name="Slide Number Placeholder 3"/>
-          <p:cNvSpPr>
-            <a:spLocks noGrp="1"/>
-          </p:cNvSpPr>
-          <p:nvPr>
-            <p:ph type="sldNum" sz="quarter" idx="10"/>
-          </p:nvPr>
-        </p:nvSpPr>
-        <p:spPr/>
-        <p:txBody>
-          <a:bodyPr/>
-          <a:lstStyle/>
-          <a:p>
-            <a:fld id="{F7021451-1387-4CA6-816F-3879F97B5CBC}" type="slidenum">
-              <a:rPr lang="en-US"/>
-              <a:t>6</a:t>
-            </a:fld>
-            <a:endParaRPr lang="en-US"/>
-          </a:p>
-        </p:txBody>
-      </p:sp>
-    </p:spTree>
-    <p:extLst>
-      <p:ext uri="{BB962C8B-B14F-4D97-AF65-F5344CB8AC3E}">
-        <p14:creationId xmlns:p14="http://schemas.microsoft.com/office/powerpoint/2010/main" val="1024086991"/>
-      </p:ext>
-    </p:extLst>
-  </p:cSld>
-  <p:clrMapOvr>
-    <a:masterClrMapping/>
-  </p:clrMapOvr>
-</p:notes>
-</file>
-
-<file path=ppt/notesSlides/notesSlide7.xml><?xml version="1.0" encoding="utf-8"?>
-<p:notes xmlns:a="http://schemas.openxmlformats.org/drawingml/2006/main" xmlns:r="http://schemas.openxmlformats.org/officeDocument/2006/relationships" xmlns:p="http://schemas.openxmlformats.org/presentationml/2006/main">
-  <p:cSld>
-    <p:spTree>
-      <p:nvGrpSpPr>
-        <p:cNvPr id="1" name=""/>
-        <p:cNvGrpSpPr/>
-        <p:nvPr/>
-      </p:nvGrpSpPr>
-      <p:grpSpPr>
-        <a:xfrm>
-          <a:off x="0" y="0"/>
-          <a:ext cx="0" cy="0"/>
-          <a:chOff x="0" y="0"/>
-          <a:chExt cx="0" cy="0"/>
-        </a:xfrm>
-      </p:grpSpPr>
-      <p:sp>
-        <p:nvSpPr>
-          <p:cNvPr id="2" name="Slide Image Placeholder 1"/>
-          <p:cNvSpPr>
-            <a:spLocks noGrp="1" noRot="1" noChangeAspect="1"/>
-          </p:cNvSpPr>
-          <p:nvPr>
-            <p:ph type="sldImg"/>
-          </p:nvPr>
-        </p:nvSpPr>
-        <p:spPr/>
-      </p:sp>
-      <p:sp>
-        <p:nvSpPr>
-          <p:cNvPr id="3" name="Notes Placeholder 2"/>
-          <p:cNvSpPr>
-            <a:spLocks noGrp="1"/>
-          </p:cNvSpPr>
-          <p:nvPr>
-            <p:ph type="body" idx="1"/>
-          </p:nvPr>
-        </p:nvSpPr>
-        <p:spPr/>
-        <p:txBody>
-          <a:bodyPr/>
-          <a:lstStyle/>
-          <a:p>
-            <a:r>
-              <a:rPr lang="en-US" dirty="0"/>
-              <a:t>Ценностное предложение мы собрали строго по формуле кейса. Слева экран, который ребенок получает в день, когда мама пропустила лекарство. Отличие для пользователя измеримо: меньше часов на организацию, новости в тот же день и один номер вместо трех. Цена 2 490 рублей пока допущение, ее проверим тестом цены и анкетой.</a:t>
-            </a:r>
-            <a:endParaRPr lang="en-US" dirty="0"/>
-          </a:p>
-        </p:txBody>
-      </p:sp>
-      <p:sp>
-        <p:nvSpPr>
-          <p:cNvPr id="4" name="Slide Number Placeholder 3"/>
-          <p:cNvSpPr>
-            <a:spLocks noGrp="1"/>
-          </p:cNvSpPr>
-          <p:nvPr>
-            <p:ph type="sldNum" sz="quarter" idx="10"/>
-          </p:nvPr>
-        </p:nvSpPr>
-        <p:spPr/>
-        <p:txBody>
-          <a:bodyPr/>
-          <a:lstStyle/>
-          <a:p>
-            <a:fld id="{F7021451-1387-4CA6-816F-3879F97B5CBC}" type="slidenum">
-              <a:rPr lang="en-US"/>
-              <a:t>7</a:t>
-            </a:fld>
-            <a:endParaRPr lang="en-US"/>
-          </a:p>
-        </p:txBody>
-      </p:sp>
-    </p:spTree>
-    <p:extLst>
-      <p:ext uri="{BB962C8B-B14F-4D97-AF65-F5344CB8AC3E}">
-        <p14:creationId xmlns:p14="http://schemas.microsoft.com/office/powerpoint/2010/main" val="1024086991"/>
-      </p:ext>
-    </p:extLst>
-  </p:cSld>
-  <p:clrMapOvr>
-    <a:masterClrMapping/>
-  </p:clrMapOvr>
-</p:notes>
-</file>
-
-<file path=ppt/notesSlides/notesSlide8.xml><?xml version="1.0" encoding="utf-8"?>
-<p:notes xmlns:a="http://schemas.openxmlformats.org/drawingml/2006/main" xmlns:r="http://schemas.openxmlformats.org/officeDocument/2006/relationships" xmlns:p="http://schemas.openxmlformats.org/presentationml/2006/main">
-  <p:cSld>
-    <p:spTree>
-      <p:nvGrpSpPr>
-        <p:cNvPr id="1" name=""/>
-        <p:cNvGrpSpPr/>
-        <p:nvPr/>
-      </p:nvGrpSpPr>
-      <p:grpSpPr>
-        <a:xfrm>
-          <a:off x="0" y="0"/>
-          <a:ext cx="0" cy="0"/>
-          <a:chOff x="0" y="0"/>
-          <a:chExt cx="0" cy="0"/>
-        </a:xfrm>
-      </p:grpSpPr>
-      <p:sp>
-        <p:nvSpPr>
-          <p:cNvPr id="2" name="Slide Image Placeholder 1"/>
-          <p:cNvSpPr>
-            <a:spLocks noGrp="1" noRot="1" noChangeAspect="1"/>
-          </p:cNvSpPr>
-          <p:nvPr>
-            <p:ph type="sldImg"/>
-          </p:nvPr>
-        </p:nvSpPr>
-        <p:spPr/>
-      </p:sp>
-      <p:sp>
-        <p:nvSpPr>
-          <p:cNvPr id="3" name="Notes Placeholder 2"/>
-          <p:cNvSpPr>
-            <a:spLocks noGrp="1"/>
-          </p:cNvSpPr>
-          <p:nvPr>
-            <p:ph type="body" idx="1"/>
-          </p:nvPr>
-        </p:nvSpPr>
-        <p:spPr/>
-        <p:txBody>
-          <a:bodyPr/>
-          <a:lstStyle/>
-          <a:p>
-            <a:r>
-              <a:rPr lang="en-US" dirty="0"/>
-              <a:t>Сценарий идет от триггера до возврата: ребенок подключает родителя в чат-боте в MAX за 5 минут, координатор знакомится с родителем и берет у него письменное согласие на медданные. Дальше каждый день короткий звонок робота, а живой человек подключается раз в месяц или по тревоге. Нижняя строка показывает, на какие системы Ингосстраха опирается каждый шаг: контакт-центр, телемедицина, клиники ДМС, МедРокет, IngoRead.</a:t>
-            </a:r>
-            <a:endParaRPr lang="en-US" dirty="0"/>
-          </a:p>
-        </p:txBody>
-      </p:sp>
-      <p:sp>
-        <p:nvSpPr>
-          <p:cNvPr id="4" name="Slide Number Placeholder 3"/>
-          <p:cNvSpPr>
-            <a:spLocks noGrp="1"/>
-          </p:cNvSpPr>
-          <p:nvPr>
-            <p:ph type="sldNum" sz="quarter" idx="10"/>
-          </p:nvPr>
-        </p:nvSpPr>
-        <p:spPr/>
-        <p:txBody>
-          <a:bodyPr/>
-          <a:lstStyle/>
-          <a:p>
-            <a:fld id="{F7021451-1387-4CA6-816F-3879F97B5CBC}" type="slidenum">
-              <a:rPr lang="en-US"/>
-              <a:t>8</a:t>
-            </a:fld>
-            <a:endParaRPr lang="en-US"/>
-          </a:p>
-        </p:txBody>
-      </p:sp>
-    </p:spTree>
-    <p:extLst>
-      <p:ext uri="{BB962C8B-B14F-4D97-AF65-F5344CB8AC3E}">
-        <p14:creationId xmlns:p14="http://schemas.microsoft.com/office/powerpoint/2010/main" val="1024086991"/>
-      </p:ext>
-    </p:extLst>
-  </p:cSld>
-  <p:clrMapOvr>
-    <a:masterClrMapping/>
-  </p:clrMapOvr>
-</p:notes>
-</file>
-
-<file path=ppt/notesSlides/notesSlide9.xml><?xml version="1.0" encoding="utf-8"?>
-<p:notes xmlns:a="http://schemas.openxmlformats.org/drawingml/2006/main" xmlns:r="http://schemas.openxmlformats.org/officeDocument/2006/relationships" xmlns:p="http://schemas.openxmlformats.org/presentationml/2006/main">
-  <p:cSld>
-    <p:spTree>
-      <p:nvGrpSpPr>
-        <p:cNvPr id="1" name=""/>
-        <p:cNvGrpSpPr/>
-        <p:nvPr/>
-      </p:nvGrpSpPr>
-      <p:grpSpPr>
-        <a:xfrm>
-          <a:off x="0" y="0"/>
-          <a:ext cx="0" cy="0"/>
-          <a:chOff x="0" y="0"/>
-          <a:chExt cx="0" cy="0"/>
-        </a:xfrm>
-      </p:grpSpPr>
-      <p:sp>
-        <p:nvSpPr>
-          <p:cNvPr id="2" name="Slide Image Placeholder 1"/>
-          <p:cNvSpPr>
-            <a:spLocks noGrp="1" noRot="1" noChangeAspect="1"/>
-          </p:cNvSpPr>
-          <p:nvPr>
-            <p:ph type="sldImg"/>
-          </p:nvPr>
-        </p:nvSpPr>
-        <p:spPr/>
-      </p:sp>
-      <p:sp>
-        <p:nvSpPr>
-          <p:cNvPr id="3" name="Notes Placeholder 2"/>
-          <p:cNvSpPr>
-            <a:spLocks noGrp="1"/>
-          </p:cNvSpPr>
-          <p:nvPr>
-            <p:ph type="body" idx="1"/>
-          </p:nvPr>
-        </p:nvSpPr>
-        <p:spPr/>
-        <p:txBody>
-          <a:bodyPr/>
-          <a:lstStyle/>
-          <a:p>
-            <a:r>
-              <a:rPr lang="en-US" dirty="0"/>
-              <a:t>Это кликабельный прототип. Ребенок получает те же события в мини-приложении MAX на телефоне и в личном кабинете на компьютере: ленту с пометкой «требует внимания» и месячную сводку с предложением ДМС без давления. Родителю приложения не нужны, ему звонят на обычный телефон.</a:t>
-            </a:r>
-            <a:endParaRPr lang="en-US" dirty="0"/>
-          </a:p>
-        </p:txBody>
-      </p:sp>
-      <p:sp>
-        <p:nvSpPr>
-          <p:cNvPr id="4" name="Slide Number Placeholder 3"/>
-          <p:cNvSpPr>
-            <a:spLocks noGrp="1"/>
-          </p:cNvSpPr>
-          <p:nvPr>
-            <p:ph type="sldNum" sz="quarter" idx="10"/>
-          </p:nvPr>
-        </p:nvSpPr>
-        <p:spPr/>
-        <p:txBody>
-          <a:bodyPr/>
-          <a:lstStyle/>
-          <a:p>
-            <a:fld id="{F7021451-1387-4CA6-816F-3879F97B5CBC}" type="slidenum">
-              <a:rPr lang="en-US"/>
-              <a:t>9</a:t>
-            </a:fld>
-            <a:endParaRPr lang="en-US"/>
-          </a:p>
-        </p:txBody>
-      </p:sp>
-    </p:spTree>
-    <p:extLst>
-      <p:ext uri="{BB962C8B-B14F-4D97-AF65-F5344CB8AC3E}">
-        <p14:creationId xmlns:p14="http://schemas.microsoft.com/office/powerpoint/2010/main" val="1024086991"/>
-      </p:ext>
-    </p:extLst>
-  </p:cSld>
-  <p:clrMapOvr>
-    <a:masterClrMapping/>
-  </p:clrMapOvr>
-</p:notes>
 </file>
 
 <file path=ppt/slideLayouts/slideLayout1.xml><?xml version="1.0" encoding="utf-8"?>
@@ -3762,7 +2004,7 @@
       </p:sp>
       <p:pic>
         <p:nvPicPr>
-          <p:cNvPr id="11" name="Image 0" descr="/Users/mihailkraynev/Documents/Dev/ingosstrah project/08_presentation/build_source/img/ph_feed.png">    </p:cNvPr>
+          <p:cNvPr id="11" name="Image 0" descr="">    </p:cNvPr>
           <p:cNvPicPr>
             <a:picLocks noChangeAspect="1"/>
           </p:cNvPicPr>
@@ -3852,7 +2094,7 @@
       </p:sp>
       <p:pic>
         <p:nvPicPr>
-          <p:cNvPr id="3" name="Image 0" descr="/Users/mihailkraynev/Documents/Dev/ingosstrah project/08_presentation/build_source/img/coord.png">    </p:cNvPr>
+          <p:cNvPr id="3" name="Image 0" descr="">    </p:cNvPr>
           <p:cNvPicPr>
             <a:picLocks noChangeAspect="1"/>
           </p:cNvPicPr>
@@ -4024,8 +2266,10 @@
             <a:off x="5786747" y="2514600"/>
             <a:ext cx="457200" cy="457200"/>
           </a:xfrm>
-          <a:prstGeom prst="ellipse">
-            <a:avLst/>
+          <a:prstGeom prst="roundRect">
+            <a:avLst>
+              <a:gd name="adj" fmla="val 28000"/>
+            </a:avLst>
           </a:prstGeom>
           <a:solidFill>
             <a:srgbClr val="EEF1FD"/>
@@ -4035,7 +2279,7 @@
       </p:sp>
       <p:pic>
         <p:nvPicPr>
-          <p:cNvPr id="9" name="Image 1" descr="/Users/mihailkraynev/Documents/Dev/ingosstrah project/08_presentation/build_source/img/icons/list-checks_blue.png">    </p:cNvPr>
+          <p:cNvPr id="9" name="Image 1" descr="">    </p:cNvPr>
           <p:cNvPicPr>
             <a:picLocks noChangeAspect="1"/>
           </p:cNvPicPr>
@@ -4049,8 +2293,8 @@
         </p:blipFill>
         <p:spPr>
           <a:xfrm>
-            <a:off x="5887331" y="2615184"/>
-            <a:ext cx="256032" cy="256032"/>
+            <a:off x="5873615" y="2601468"/>
+            <a:ext cx="283464" cy="283464"/>
           </a:xfrm>
           <a:prstGeom prst="rect">
             <a:avLst/>
@@ -4146,8 +2390,10 @@
             <a:off x="5786747" y="3291840"/>
             <a:ext cx="457200" cy="457200"/>
           </a:xfrm>
-          <a:prstGeom prst="ellipse">
-            <a:avLst/>
+          <a:prstGeom prst="roundRect">
+            <a:avLst>
+              <a:gd name="adj" fmla="val 28000"/>
+            </a:avLst>
           </a:prstGeom>
           <a:solidFill>
             <a:srgbClr val="EEF1FD"/>
@@ -4157,7 +2403,7 @@
       </p:sp>
       <p:pic>
         <p:nvPicPr>
-          <p:cNvPr id="13" name="Image 2" descr="/Users/mihailkraynev/Documents/Dev/ingosstrah project/08_presentation/build_source/img/icons/phone-call_blue.png">    </p:cNvPr>
+          <p:cNvPr id="13" name="Image 2" descr="">    </p:cNvPr>
           <p:cNvPicPr>
             <a:picLocks noChangeAspect="1"/>
           </p:cNvPicPr>
@@ -4171,8 +2417,8 @@
         </p:blipFill>
         <p:spPr>
           <a:xfrm>
-            <a:off x="5887331" y="3392424"/>
-            <a:ext cx="256032" cy="256032"/>
+            <a:off x="5873615" y="3378708"/>
+            <a:ext cx="283464" cy="283464"/>
           </a:xfrm>
           <a:prstGeom prst="rect">
             <a:avLst/>
@@ -4268,8 +2514,10 @@
             <a:off x="5786747" y="4069080"/>
             <a:ext cx="457200" cy="457200"/>
           </a:xfrm>
-          <a:prstGeom prst="ellipse">
-            <a:avLst/>
+          <a:prstGeom prst="roundRect">
+            <a:avLst>
+              <a:gd name="adj" fmla="val 28000"/>
+            </a:avLst>
           </a:prstGeom>
           <a:solidFill>
             <a:srgbClr val="EEF1FD"/>
@@ -4279,7 +2527,7 @@
       </p:sp>
       <p:pic>
         <p:nvPicPr>
-          <p:cNvPr id="17" name="Image 3" descr="/Users/mihailkraynev/Documents/Dev/ingosstrah project/08_presentation/build_source/img/icons/send_blue.png">    </p:cNvPr>
+          <p:cNvPr id="17" name="Image 3" descr="">    </p:cNvPr>
           <p:cNvPicPr>
             <a:picLocks noChangeAspect="1"/>
           </p:cNvPicPr>
@@ -4293,8 +2541,8 @@
         </p:blipFill>
         <p:spPr>
           <a:xfrm>
-            <a:off x="5887331" y="4169664"/>
-            <a:ext cx="256032" cy="256032"/>
+            <a:off x="5873615" y="4155948"/>
+            <a:ext cx="283464" cy="283464"/>
           </a:xfrm>
           <a:prstGeom prst="rect">
             <a:avLst/>
@@ -4376,45 +2624,6 @@
               <a:t>собирается сам, отправка в 1 клик</a:t>
             </a:r>
             <a:endParaRPr lang="en-US" sz="950" dirty="0"/>
-          </a:p>
-        </p:txBody>
-      </p:sp>
-      <p:sp>
-        <p:nvSpPr>
-          <p:cNvPr id="20" name="Text 14"/>
-          <p:cNvSpPr txBox="1"/>
-          <p:nvPr/>
-        </p:nvSpPr>
-        <p:spPr>
-          <a:xfrm>
-            <a:off x="457200" y="4736592"/>
-            <a:ext cx="7772400" cy="274320"/>
-          </a:xfrm>
-          <a:prstGeom prst="rect">
-            <a:avLst/>
-          </a:prstGeom>
-          <a:noFill/>
-          <a:ln/>
-        </p:spPr>
-        <p:txBody>
-          <a:bodyPr wrap="square" lIns="0" tIns="0" rIns="0" bIns="0" rtlCol="0" anchor="b"/>
-          <a:lstStyle/>
-          <a:p>
-            <a:pPr indent="0" marL="0">
-              <a:buNone/>
-            </a:pPr>
-            <a:r>
-              <a:rPr lang="en-US" sz="750" dirty="0">
-                <a:solidFill>
-                  <a:srgbClr val="5A6280"/>
-                </a:solidFill>
-                <a:latin typeface="Arial" pitchFamily="34" charset="0"/>
-                <a:ea typeface="Arial" pitchFamily="34" charset="-122"/>
-                <a:cs typeface="Arial" pitchFamily="34" charset="-120"/>
-              </a:rPr>
-              <a:t>Источники: кликабельный прототип 06_prototype/Прототип_ИНГОССЕМЬЯ.html, режим «Координатор»; нагрузка: расчет финмодели; данные семей вымышленные</a:t>
-            </a:r>
-            <a:endParaRPr lang="en-US" sz="750" dirty="0"/>
           </a:p>
         </p:txBody>
       </p:sp>
@@ -4565,8 +2774,10 @@
             <a:off x="621792" y="1385316"/>
             <a:ext cx="566928" cy="566928"/>
           </a:xfrm>
-          <a:prstGeom prst="ellipse">
-            <a:avLst/>
+          <a:prstGeom prst="roundRect">
+            <a:avLst>
+              <a:gd name="adj" fmla="val 28000"/>
+            </a:avLst>
           </a:prstGeom>
           <a:solidFill>
             <a:srgbClr val="FFFFFF"/>
@@ -4576,7 +2787,7 @@
       </p:sp>
       <p:pic>
         <p:nvPicPr>
-          <p:cNvPr id="5" name="Image 0" descr="/Users/mihailkraynev/Documents/Dev/ingosstrah project/08_presentation/build_source/img/icons/headset_blue.png">    </p:cNvPr>
+          <p:cNvPr id="5" name="Image 0" descr="">    </p:cNvPr>
           <p:cNvPicPr>
             <a:picLocks noChangeAspect="1"/>
           </p:cNvPicPr>
@@ -4590,8 +2801,8 @@
         </p:blipFill>
         <p:spPr>
           <a:xfrm>
-            <a:off x="746516" y="1510040"/>
-            <a:ext cx="317480" cy="317480"/>
+            <a:off x="729508" y="1493032"/>
+            <a:ext cx="351495" cy="351495"/>
           </a:xfrm>
           <a:prstGeom prst="rect">
             <a:avLst/>
@@ -4709,8 +2920,10 @@
             <a:off x="3425952" y="1385316"/>
             <a:ext cx="566928" cy="566928"/>
           </a:xfrm>
-          <a:prstGeom prst="ellipse">
-            <a:avLst/>
+          <a:prstGeom prst="roundRect">
+            <a:avLst>
+              <a:gd name="adj" fmla="val 28000"/>
+            </a:avLst>
           </a:prstGeom>
           <a:solidFill>
             <a:srgbClr val="FFFFFF"/>
@@ -4720,7 +2933,7 @@
       </p:sp>
       <p:pic>
         <p:nvPicPr>
-          <p:cNvPr id="10" name="Image 1" descr="/Users/mihailkraynev/Documents/Dev/ingosstrah project/08_presentation/build_source/img/icons/hospital_blue.png">    </p:cNvPr>
+          <p:cNvPr id="10" name="Image 1" descr="">    </p:cNvPr>
           <p:cNvPicPr>
             <a:picLocks noChangeAspect="1"/>
           </p:cNvPicPr>
@@ -4734,8 +2947,8 @@
         </p:blipFill>
         <p:spPr>
           <a:xfrm>
-            <a:off x="3550676" y="1510040"/>
-            <a:ext cx="317480" cy="317480"/>
+            <a:off x="3533668" y="1493032"/>
+            <a:ext cx="351495" cy="351495"/>
           </a:xfrm>
           <a:prstGeom prst="rect">
             <a:avLst/>
@@ -4853,8 +3066,10 @@
             <a:off x="6230112" y="1385316"/>
             <a:ext cx="566928" cy="566928"/>
           </a:xfrm>
-          <a:prstGeom prst="ellipse">
-            <a:avLst/>
+          <a:prstGeom prst="roundRect">
+            <a:avLst>
+              <a:gd name="adj" fmla="val 28000"/>
+            </a:avLst>
           </a:prstGeom>
           <a:solidFill>
             <a:srgbClr val="FFFFFF"/>
@@ -4864,7 +3079,7 @@
       </p:sp>
       <p:pic>
         <p:nvPicPr>
-          <p:cNvPr id="15" name="Image 2" descr="/Users/mihailkraynev/Documents/Dev/ingosstrah project/08_presentation/build_source/img/icons/video_blue.png">    </p:cNvPr>
+          <p:cNvPr id="15" name="Image 2" descr="">    </p:cNvPr>
           <p:cNvPicPr>
             <a:picLocks noChangeAspect="1"/>
           </p:cNvPicPr>
@@ -4878,8 +3093,8 @@
         </p:blipFill>
         <p:spPr>
           <a:xfrm>
-            <a:off x="6354836" y="1510040"/>
-            <a:ext cx="317480" cy="317480"/>
+            <a:off x="6337828" y="1493032"/>
+            <a:ext cx="351495" cy="351495"/>
           </a:xfrm>
           <a:prstGeom prst="rect">
             <a:avLst/>
@@ -4997,8 +3212,10 @@
             <a:off x="621792" y="2619756"/>
             <a:ext cx="566928" cy="566928"/>
           </a:xfrm>
-          <a:prstGeom prst="ellipse">
-            <a:avLst/>
+          <a:prstGeom prst="roundRect">
+            <a:avLst>
+              <a:gd name="adj" fmla="val 28000"/>
+            </a:avLst>
           </a:prstGeom>
           <a:solidFill>
             <a:srgbClr val="FFFFFF"/>
@@ -5008,7 +3225,7 @@
       </p:sp>
       <p:pic>
         <p:nvPicPr>
-          <p:cNvPr id="20" name="Image 3" descr="/Users/mihailkraynev/Documents/Dev/ingosstrah project/08_presentation/build_source/img/icons/file-text_blue.png">    </p:cNvPr>
+          <p:cNvPr id="20" name="Image 3" descr="">    </p:cNvPr>
           <p:cNvPicPr>
             <a:picLocks noChangeAspect="1"/>
           </p:cNvPicPr>
@@ -5022,8 +3239,8 @@
         </p:blipFill>
         <p:spPr>
           <a:xfrm>
-            <a:off x="746516" y="2744480"/>
-            <a:ext cx="317480" cy="317480"/>
+            <a:off x="729508" y="2727472"/>
+            <a:ext cx="351495" cy="351495"/>
           </a:xfrm>
           <a:prstGeom prst="rect">
             <a:avLst/>
@@ -5141,8 +3358,10 @@
             <a:off x="3425952" y="2619756"/>
             <a:ext cx="566928" cy="566928"/>
           </a:xfrm>
-          <a:prstGeom prst="ellipse">
-            <a:avLst/>
+          <a:prstGeom prst="roundRect">
+            <a:avLst>
+              <a:gd name="adj" fmla="val 28000"/>
+            </a:avLst>
           </a:prstGeom>
           <a:solidFill>
             <a:srgbClr val="FFFFFF"/>
@@ -5152,7 +3371,7 @@
       </p:sp>
       <p:pic>
         <p:nvPicPr>
-          <p:cNvPr id="25" name="Image 4" descr="/Users/mihailkraynev/Documents/Dev/ingosstrah project/08_presentation/build_source/img/icons/bot_blue.png">    </p:cNvPr>
+          <p:cNvPr id="25" name="Image 4" descr="">    </p:cNvPr>
           <p:cNvPicPr>
             <a:picLocks noChangeAspect="1"/>
           </p:cNvPicPr>
@@ -5166,8 +3385,8 @@
         </p:blipFill>
         <p:spPr>
           <a:xfrm>
-            <a:off x="3550676" y="2744480"/>
-            <a:ext cx="317480" cy="317480"/>
+            <a:off x="3533668" y="2727472"/>
+            <a:ext cx="351495" cy="351495"/>
           </a:xfrm>
           <a:prstGeom prst="rect">
             <a:avLst/>
@@ -5285,8 +3504,10 @@
             <a:off x="6230112" y="2619756"/>
             <a:ext cx="566928" cy="566928"/>
           </a:xfrm>
-          <a:prstGeom prst="ellipse">
-            <a:avLst/>
+          <a:prstGeom prst="roundRect">
+            <a:avLst>
+              <a:gd name="adj" fmla="val 28000"/>
+            </a:avLst>
           </a:prstGeom>
           <a:solidFill>
             <a:srgbClr val="FFFFFF"/>
@@ -5296,7 +3517,7 @@
       </p:sp>
       <p:pic>
         <p:nvPicPr>
-          <p:cNvPr id="30" name="Image 5" descr="/Users/mihailkraynev/Documents/Dev/ingosstrah project/08_presentation/build_source/img/icons/shield-check_blue.png">    </p:cNvPr>
+          <p:cNvPr id="30" name="Image 5" descr="">    </p:cNvPr>
           <p:cNvPicPr>
             <a:picLocks noChangeAspect="1"/>
           </p:cNvPicPr>
@@ -5310,8 +3531,8 @@
         </p:blipFill>
         <p:spPr>
           <a:xfrm>
-            <a:off x="6354836" y="2744480"/>
-            <a:ext cx="317480" cy="317480"/>
+            <a:off x="6337828" y="2727472"/>
+            <a:ext cx="351495" cy="351495"/>
           </a:xfrm>
           <a:prstGeom prst="rect">
             <a:avLst/>
@@ -5429,8 +3650,10 @@
             <a:off x="640080" y="3863340"/>
             <a:ext cx="457200" cy="457200"/>
           </a:xfrm>
-          <a:prstGeom prst="ellipse">
-            <a:avLst/>
+          <a:prstGeom prst="roundRect">
+            <a:avLst>
+              <a:gd name="adj" fmla="val 28000"/>
+            </a:avLst>
           </a:prstGeom>
           <a:solidFill>
             <a:srgbClr val="1E3FD8"/>
@@ -5440,7 +3663,7 @@
       </p:sp>
       <p:pic>
         <p:nvPicPr>
-          <p:cNvPr id="35" name="Image 6" descr="/Users/mihailkraynev/Documents/Dev/ingosstrah project/08_presentation/build_source/img/icons/smartphone_white.png">    </p:cNvPr>
+          <p:cNvPr id="35" name="Image 6" descr="">    </p:cNvPr>
           <p:cNvPicPr>
             <a:picLocks noChangeAspect="1"/>
           </p:cNvPicPr>
@@ -5454,8 +3677,8 @@
         </p:blipFill>
         <p:spPr>
           <a:xfrm>
-            <a:off x="740664" y="3963924"/>
-            <a:ext cx="256032" cy="256032"/>
+            <a:off x="726948" y="3950208"/>
+            <a:ext cx="283464" cy="283464"/>
           </a:xfrm>
           <a:prstGeom prst="rect">
             <a:avLst/>
@@ -5512,45 +3735,6 @@
               <a:t>IngoMobile нет в Google Play и App Store, а иностранные мессенджеры для финорганизаций запрещены (41-ФЗ). Поэтому MVP идет через MAX, СМС и звонки</a:t>
             </a:r>
             <a:endParaRPr lang="en-US" sz="1050" dirty="0"/>
-          </a:p>
-        </p:txBody>
-      </p:sp>
-      <p:sp>
-        <p:nvSpPr>
-          <p:cNvPr id="37" name="Text 28"/>
-          <p:cNvSpPr txBox="1"/>
-          <p:nvPr/>
-        </p:nvSpPr>
-        <p:spPr>
-          <a:xfrm>
-            <a:off x="457200" y="4736592"/>
-            <a:ext cx="7772400" cy="274320"/>
-          </a:xfrm>
-          <a:prstGeom prst="rect">
-            <a:avLst/>
-          </a:prstGeom>
-          <a:noFill/>
-          <a:ln/>
-        </p:spPr>
-        <p:txBody>
-          <a:bodyPr wrap="square" lIns="0" tIns="0" rIns="0" bIns="0" rtlCol="0" anchor="b"/>
-          <a:lstStyle/>
-          <a:p>
-            <a:pPr indent="0" marL="0">
-              <a:buNone/>
-            </a:pPr>
-            <a:r>
-              <a:rPr lang="en-US" sz="750" dirty="0">
-                <a:solidFill>
-                  <a:srgbClr val="5A6280"/>
-                </a:solidFill>
-                <a:latin typeface="Arial" pitchFamily="34" charset="0"/>
-                <a:ea typeface="Arial" pitchFamily="34" charset="-122"/>
-                <a:cs typeface="Arial" pitchFamily="34" charset="-120"/>
-              </a:rPr>
-              <a:t>Источники: S9 ingos.ru; S12 МедРокет, 11.2025; S11 Эксперт РА, 02.12.2025; S14 RuStore; S15 Habr; клиники и IngoRead по ресерчу команды; CX World Awards 2025 по материалам кейса</a:t>
-            </a:r>
-            <a:endParaRPr lang="en-US" sz="750" dirty="0"/>
           </a:p>
         </p:txBody>
       </p:sp>
@@ -5670,7 +3854,7 @@
       </p:sp>
       <p:pic>
         <p:nvPicPr>
-          <p:cNvPr id="3" name="Image 0" descr="/Users/mihailkraynev/Documents/Dev/ingosstrah project/08_presentation/build_source/img/ph_tariff.png">    </p:cNvPr>
+          <p:cNvPr id="3" name="Image 0" descr="">    </p:cNvPr>
           <p:cNvPicPr>
             <a:picLocks noChangeAspect="1"/>
           </p:cNvPicPr>
@@ -6142,8 +4326,10 @@
             <a:off x="2606252" y="3291840"/>
             <a:ext cx="347472" cy="347472"/>
           </a:xfrm>
-          <a:prstGeom prst="ellipse">
-            <a:avLst/>
+          <a:prstGeom prst="roundRect">
+            <a:avLst>
+              <a:gd name="adj" fmla="val 28000"/>
+            </a:avLst>
           </a:prstGeom>
           <a:solidFill>
             <a:srgbClr val="EEF1FD"/>
@@ -6153,7 +4339,7 @@
       </p:sp>
       <p:pic>
         <p:nvPicPr>
-          <p:cNvPr id="18" name="Image 1" descr="/Users/mihailkraynev/Documents/Dev/ingosstrah project/08_presentation/build_source/img/icons/route_blue.png">    </p:cNvPr>
+          <p:cNvPr id="18" name="Image 1" descr="">    </p:cNvPr>
           <p:cNvPicPr>
             <a:picLocks noChangeAspect="1"/>
           </p:cNvPicPr>
@@ -6167,8 +4353,8 @@
         </p:blipFill>
         <p:spPr>
           <a:xfrm>
-            <a:off x="2682696" y="3368284"/>
-            <a:ext cx="194584" cy="194584"/>
+            <a:off x="2672272" y="3357860"/>
+            <a:ext cx="215433" cy="215433"/>
           </a:xfrm>
           <a:prstGeom prst="rect">
             <a:avLst/>
@@ -6225,8 +4411,10 @@
             <a:off x="2606252" y="3703320"/>
             <a:ext cx="347472" cy="347472"/>
           </a:xfrm>
-          <a:prstGeom prst="ellipse">
-            <a:avLst/>
+          <a:prstGeom prst="roundRect">
+            <a:avLst>
+              <a:gd name="adj" fmla="val 28000"/>
+            </a:avLst>
           </a:prstGeom>
           <a:solidFill>
             <a:srgbClr val="EEF1FD"/>
@@ -6236,7 +4424,7 @@
       </p:sp>
       <p:pic>
         <p:nvPicPr>
-          <p:cNvPr id="21" name="Image 2" descr="/Users/mihailkraynev/Documents/Dev/ingosstrah project/08_presentation/build_source/img/icons/brain_blue.png">    </p:cNvPr>
+          <p:cNvPr id="21" name="Image 2" descr="">    </p:cNvPr>
           <p:cNvPicPr>
             <a:picLocks noChangeAspect="1"/>
           </p:cNvPicPr>
@@ -6250,8 +4438,8 @@
         </p:blipFill>
         <p:spPr>
           <a:xfrm>
-            <a:off x="2682696" y="3779764"/>
-            <a:ext cx="194584" cy="194584"/>
+            <a:off x="2672272" y="3769340"/>
+            <a:ext cx="215433" cy="215433"/>
           </a:xfrm>
           <a:prstGeom prst="rect">
             <a:avLst/>
@@ -6308,8 +4496,10 @@
             <a:off x="2606252" y="4114800"/>
             <a:ext cx="347472" cy="347472"/>
           </a:xfrm>
-          <a:prstGeom prst="ellipse">
-            <a:avLst/>
+          <a:prstGeom prst="roundRect">
+            <a:avLst>
+              <a:gd name="adj" fmla="val 28000"/>
+            </a:avLst>
           </a:prstGeom>
           <a:solidFill>
             <a:srgbClr val="EEF1FD"/>
@@ -6319,7 +4509,7 @@
       </p:sp>
       <p:pic>
         <p:nvPicPr>
-          <p:cNvPr id="24" name="Image 3" descr="/Users/mihailkraynev/Documents/Dev/ingosstrah project/08_presentation/build_source/img/icons/id-card_blue.png">    </p:cNvPr>
+          <p:cNvPr id="24" name="Image 3" descr="">    </p:cNvPr>
           <p:cNvPicPr>
             <a:picLocks noChangeAspect="1"/>
           </p:cNvPicPr>
@@ -6333,8 +4523,8 @@
         </p:blipFill>
         <p:spPr>
           <a:xfrm>
-            <a:off x="2682696" y="4191244"/>
-            <a:ext cx="194584" cy="194584"/>
+            <a:off x="2672272" y="4180820"/>
+            <a:ext cx="215433" cy="215433"/>
           </a:xfrm>
           <a:prstGeom prst="rect">
             <a:avLst/>
@@ -6413,8 +4603,10 @@
             <a:off x="6382724" y="1307592"/>
             <a:ext cx="457200" cy="457200"/>
           </a:xfrm>
-          <a:prstGeom prst="ellipse">
-            <a:avLst/>
+          <a:prstGeom prst="roundRect">
+            <a:avLst>
+              <a:gd name="adj" fmla="val 28000"/>
+            </a:avLst>
           </a:prstGeom>
           <a:solidFill>
             <a:srgbClr val="1E3FD8"/>
@@ -6424,7 +4616,7 @@
       </p:sp>
       <p:pic>
         <p:nvPicPr>
-          <p:cNvPr id="28" name="Image 4" descr="/Users/mihailkraynev/Documents/Dev/ingosstrah project/08_presentation/build_source/img/icons/heart-handshake_white.png">    </p:cNvPr>
+          <p:cNvPr id="28" name="Image 4" descr="">    </p:cNvPr>
           <p:cNvPicPr>
             <a:picLocks noChangeAspect="1"/>
           </p:cNvPicPr>
@@ -6438,8 +4630,8 @@
         </p:blipFill>
         <p:spPr>
           <a:xfrm>
-            <a:off x="6483308" y="1408176"/>
-            <a:ext cx="256032" cy="256032"/>
+            <a:off x="6469592" y="1394460"/>
+            <a:ext cx="283464" cy="283464"/>
           </a:xfrm>
           <a:prstGeom prst="rect">
             <a:avLst/>
@@ -6716,45 +4908,6 @@
               <a:t>в месяц через фонд с 6-го месяца, проверяем H6</a:t>
             </a:r>
             <a:endParaRPr lang="en-US" sz="850" dirty="0"/>
-          </a:p>
-        </p:txBody>
-      </p:sp>
-      <p:sp>
-        <p:nvSpPr>
-          <p:cNvPr id="36" name="Text 29"/>
-          <p:cNvSpPr txBox="1"/>
-          <p:nvPr/>
-        </p:nvSpPr>
-        <p:spPr>
-          <a:xfrm>
-            <a:off x="457200" y="4736592"/>
-            <a:ext cx="7772400" cy="274320"/>
-          </a:xfrm>
-          <a:prstGeom prst="rect">
-            <a:avLst/>
-          </a:prstGeom>
-          <a:noFill/>
-          <a:ln/>
-        </p:spPr>
-        <p:txBody>
-          <a:bodyPr wrap="square" lIns="0" tIns="0" rIns="0" bIns="0" rtlCol="0" anchor="b"/>
-          <a:lstStyle/>
-          <a:p>
-            <a:pPr indent="0" marL="0">
-              <a:buNone/>
-            </a:pPr>
-            <a:r>
-              <a:rPr lang="en-US" sz="750" dirty="0">
-                <a:solidFill>
-                  <a:srgbClr val="5A6280"/>
-                </a:solidFill>
-                <a:latin typeface="Arial" pitchFamily="34" charset="0"/>
-                <a:ea typeface="Arial" pitchFamily="34" charset="-122"/>
-                <a:cs typeface="Arial" pitchFamily="34" charset="-120"/>
-              </a:rPr>
-              <a:t>Источники: S28 83-ФЗ от 21.04.2025 (Гарант); S29 ВЗГЛЯД, 01.06.2026; S30 ТВ Звезда, А. Цивилева; доли и скидки: допущения команды; Финансовая_модель_ИНГОССЕМЬЯ.xlsx, лист «Льготы ветеранам»</a:t>
-            </a:r>
-            <a:endParaRPr lang="en-US" sz="750" dirty="0"/>
           </a:p>
         </p:txBody>
       </p:sp>
@@ -6883,8 +5036,10 @@
             <a:off x="457200" y="1143000"/>
             <a:ext cx="566928" cy="566928"/>
           </a:xfrm>
-          <a:prstGeom prst="ellipse">
-            <a:avLst/>
+          <a:prstGeom prst="roundRect">
+            <a:avLst>
+              <a:gd name="adj" fmla="val 28000"/>
+            </a:avLst>
           </a:prstGeom>
           <a:solidFill>
             <a:srgbClr val="EEF1FD"/>
@@ -6894,7 +5049,7 @@
       </p:sp>
       <p:pic>
         <p:nvPicPr>
-          <p:cNvPr id="4" name="Image 0" descr="/Users/mihailkraynev/Documents/Dev/ingosstrah project/08_presentation/build_source/img/icons/wallet_blue.png">    </p:cNvPr>
+          <p:cNvPr id="4" name="Image 0" descr="">    </p:cNvPr>
           <p:cNvPicPr>
             <a:picLocks noChangeAspect="1"/>
           </p:cNvPicPr>
@@ -6908,8 +5063,8 @@
         </p:blipFill>
         <p:spPr>
           <a:xfrm>
-            <a:off x="581924" y="1267724"/>
-            <a:ext cx="317480" cy="317480"/>
+            <a:off x="564916" y="1250716"/>
+            <a:ext cx="351495" cy="351495"/>
           </a:xfrm>
           <a:prstGeom prst="rect">
             <a:avLst/>
@@ -7029,8 +5184,10 @@
             <a:off x="2606040" y="1143000"/>
             <a:ext cx="566928" cy="566928"/>
           </a:xfrm>
-          <a:prstGeom prst="ellipse">
-            <a:avLst/>
+          <a:prstGeom prst="roundRect">
+            <a:avLst>
+              <a:gd name="adj" fmla="val 28000"/>
+            </a:avLst>
           </a:prstGeom>
           <a:solidFill>
             <a:srgbClr val="EEF1FD"/>
@@ -7040,7 +5197,7 @@
       </p:sp>
       <p:pic>
         <p:nvPicPr>
-          <p:cNvPr id="9" name="Image 1" descr="/Users/mihailkraynev/Documents/Dev/ingosstrah project/08_presentation/build_source/img/icons/landmark_blue.png">    </p:cNvPr>
+          <p:cNvPr id="9" name="Image 1" descr="">    </p:cNvPr>
           <p:cNvPicPr>
             <a:picLocks noChangeAspect="1"/>
           </p:cNvPicPr>
@@ -7054,8 +5211,8 @@
         </p:blipFill>
         <p:spPr>
           <a:xfrm>
-            <a:off x="2730764" y="1267724"/>
-            <a:ext cx="317480" cy="317480"/>
+            <a:off x="2713756" y="1250716"/>
+            <a:ext cx="351495" cy="351495"/>
           </a:xfrm>
           <a:prstGeom prst="rect">
             <a:avLst/>
@@ -7175,8 +5332,10 @@
             <a:off x="4754880" y="1143000"/>
             <a:ext cx="566928" cy="566928"/>
           </a:xfrm>
-          <a:prstGeom prst="ellipse">
-            <a:avLst/>
+          <a:prstGeom prst="roundRect">
+            <a:avLst>
+              <a:gd name="adj" fmla="val 28000"/>
+            </a:avLst>
           </a:prstGeom>
           <a:solidFill>
             <a:srgbClr val="EEF1FD"/>
@@ -7186,7 +5345,7 @@
       </p:sp>
       <p:pic>
         <p:nvPicPr>
-          <p:cNvPr id="14" name="Image 2" descr="/Users/mihailkraynev/Documents/Dev/ingosstrah project/08_presentation/build_source/img/icons/headset_blue.png">    </p:cNvPr>
+          <p:cNvPr id="14" name="Image 2" descr="">    </p:cNvPr>
           <p:cNvPicPr>
             <a:picLocks noChangeAspect="1"/>
           </p:cNvPicPr>
@@ -7200,8 +5359,8 @@
         </p:blipFill>
         <p:spPr>
           <a:xfrm>
-            <a:off x="4879604" y="1267724"/>
-            <a:ext cx="317480" cy="317480"/>
+            <a:off x="4862596" y="1250716"/>
+            <a:ext cx="351495" cy="351495"/>
           </a:xfrm>
           <a:prstGeom prst="rect">
             <a:avLst/>
@@ -7321,8 +5480,10 @@
             <a:off x="6903720" y="1143000"/>
             <a:ext cx="566928" cy="566928"/>
           </a:xfrm>
-          <a:prstGeom prst="ellipse">
-            <a:avLst/>
+          <a:prstGeom prst="roundRect">
+            <a:avLst>
+              <a:gd name="adj" fmla="val 28000"/>
+            </a:avLst>
           </a:prstGeom>
           <a:solidFill>
             <a:srgbClr val="B8F02A"/>
@@ -7332,7 +5493,7 @@
       </p:sp>
       <p:pic>
         <p:nvPicPr>
-          <p:cNvPr id="19" name="Image 3" descr="/Users/mihailkraynev/Documents/Dev/ingosstrah project/08_presentation/build_source/img/icons/user-round_navy.png">    </p:cNvPr>
+          <p:cNvPr id="19" name="Image 3" descr="">    </p:cNvPr>
           <p:cNvPicPr>
             <a:picLocks noChangeAspect="1"/>
           </p:cNvPicPr>
@@ -7346,8 +5507,8 @@
         </p:blipFill>
         <p:spPr>
           <a:xfrm>
-            <a:off x="7028444" y="1267724"/>
-            <a:ext cx="317480" cy="317480"/>
+            <a:off x="7011436" y="1250716"/>
+            <a:ext cx="351495" cy="351495"/>
           </a:xfrm>
           <a:prstGeom prst="rect">
             <a:avLst/>
@@ -8268,45 +6429,6 @@
               <a:t>отток в 1-й месяц и дальше</a:t>
             </a:r>
             <a:endParaRPr lang="en-US" sz="900" dirty="0"/>
-          </a:p>
-        </p:txBody>
-      </p:sp>
-      <p:sp>
-        <p:nvSpPr>
-          <p:cNvPr id="47" name="Text 41"/>
-          <p:cNvSpPr txBox="1"/>
-          <p:nvPr/>
-        </p:nvSpPr>
-        <p:spPr>
-          <a:xfrm>
-            <a:off x="457200" y="4736592"/>
-            <a:ext cx="7772400" cy="274320"/>
-          </a:xfrm>
-          <a:prstGeom prst="rect">
-            <a:avLst/>
-          </a:prstGeom>
-          <a:noFill/>
-          <a:ln/>
-        </p:spPr>
-        <p:txBody>
-          <a:bodyPr wrap="square" lIns="0" tIns="0" rIns="0" bIns="0" rtlCol="0" anchor="b"/>
-          <a:lstStyle/>
-          <a:p>
-            <a:pPr indent="0" marL="0">
-              <a:buNone/>
-            </a:pPr>
-            <a:r>
-              <a:rPr lang="en-US" sz="750" dirty="0">
-                <a:solidFill>
-                  <a:srgbClr val="5A6280"/>
-                </a:solidFill>
-                <a:latin typeface="Arial" pitchFamily="34" charset="0"/>
-                <a:ea typeface="Arial" pitchFamily="34" charset="-122"/>
-                <a:cs typeface="Arial" pitchFamily="34" charset="-120"/>
-              </a:rPr>
-              <a:t>Источники: Финансовая_модель_ИНГОССЕМЬЯ.xlsx, базовый сценарий; НДС 22% по 425-ФЗ учтен в ARPU; подписку продает сервисная компания группы (ст. 6 закона 4015-1), схему подтверждает юрист</a:t>
-            </a:r>
-            <a:endParaRPr lang="en-US" sz="750" dirty="0"/>
           </a:p>
         </p:txBody>
       </p:sp>
@@ -8529,8 +6651,10 @@
             <a:off x="5577840" y="1508760"/>
             <a:ext cx="384048" cy="384048"/>
           </a:xfrm>
-          <a:prstGeom prst="ellipse">
-            <a:avLst/>
+          <a:prstGeom prst="roundRect">
+            <a:avLst>
+              <a:gd name="adj" fmla="val 28000"/>
+            </a:avLst>
           </a:prstGeom>
           <a:solidFill>
             <a:srgbClr val="EEF1FD"/>
@@ -8540,7 +6664,7 @@
       </p:sp>
       <p:pic>
         <p:nvPicPr>
-          <p:cNvPr id="7" name="Image 0" descr="/Users/mihailkraynev/Documents/Dev/ingosstrah project/08_presentation/build_source/img/icons/bot_blue.png">    </p:cNvPr>
+          <p:cNvPr id="7" name="Image 0" descr="">    </p:cNvPr>
           <p:cNvPicPr>
             <a:picLocks noChangeAspect="1"/>
           </p:cNvPicPr>
@@ -8554,8 +6678,8 @@
         </p:blipFill>
         <p:spPr>
           <a:xfrm>
-            <a:off x="5662331" y="1593251"/>
-            <a:ext cx="215067" cy="215067"/>
+            <a:off x="5650809" y="1581729"/>
+            <a:ext cx="238110" cy="238110"/>
           </a:xfrm>
           <a:prstGeom prst="rect">
             <a:avLst/>
@@ -8626,8 +6750,10 @@
             <a:off x="5577840" y="2039112"/>
             <a:ext cx="384048" cy="384048"/>
           </a:xfrm>
-          <a:prstGeom prst="ellipse">
-            <a:avLst/>
+          <a:prstGeom prst="roundRect">
+            <a:avLst>
+              <a:gd name="adj" fmla="val 28000"/>
+            </a:avLst>
           </a:prstGeom>
           <a:solidFill>
             <a:srgbClr val="EEF1FD"/>
@@ -8637,7 +6763,7 @@
       </p:sp>
       <p:pic>
         <p:nvPicPr>
-          <p:cNvPr id="10" name="Image 1" descr="/Users/mihailkraynev/Documents/Dev/ingosstrah project/08_presentation/build_source/img/icons/building-2_blue.png">    </p:cNvPr>
+          <p:cNvPr id="10" name="Image 1" descr="">    </p:cNvPr>
           <p:cNvPicPr>
             <a:picLocks noChangeAspect="1"/>
           </p:cNvPicPr>
@@ -8651,8 +6777,8 @@
         </p:blipFill>
         <p:spPr>
           <a:xfrm>
-            <a:off x="5662331" y="2123603"/>
-            <a:ext cx="215067" cy="215067"/>
+            <a:off x="5650809" y="2112081"/>
+            <a:ext cx="238110" cy="238110"/>
           </a:xfrm>
           <a:prstGeom prst="rect">
             <a:avLst/>
@@ -8723,8 +6849,10 @@
             <a:off x="5577840" y="2569464"/>
             <a:ext cx="384048" cy="384048"/>
           </a:xfrm>
-          <a:prstGeom prst="ellipse">
-            <a:avLst/>
+          <a:prstGeom prst="roundRect">
+            <a:avLst>
+              <a:gd name="adj" fmla="val 28000"/>
+            </a:avLst>
           </a:prstGeom>
           <a:solidFill>
             <a:srgbClr val="EEF1FD"/>
@@ -8734,7 +6862,7 @@
       </p:sp>
       <p:pic>
         <p:nvPicPr>
-          <p:cNvPr id="13" name="Image 2" descr="/Users/mihailkraynev/Documents/Dev/ingosstrah project/08_presentation/build_source/img/icons/wallet_blue.png">    </p:cNvPr>
+          <p:cNvPr id="13" name="Image 2" descr="">    </p:cNvPr>
           <p:cNvPicPr>
             <a:picLocks noChangeAspect="1"/>
           </p:cNvPicPr>
@@ -8748,8 +6876,8 @@
         </p:blipFill>
         <p:spPr>
           <a:xfrm>
-            <a:off x="5662331" y="2653955"/>
-            <a:ext cx="215067" cy="215067"/>
+            <a:off x="5650809" y="2642433"/>
+            <a:ext cx="238110" cy="238110"/>
           </a:xfrm>
           <a:prstGeom prst="rect">
             <a:avLst/>
@@ -9106,45 +7234,6 @@
               <a:t>доля маржи</a:t>
             </a:r>
             <a:endParaRPr lang="en-US" sz="850" dirty="0"/>
-          </a:p>
-        </p:txBody>
-      </p:sp>
-      <p:sp>
-        <p:nvSpPr>
-          <p:cNvPr id="24" name="Text 18"/>
-          <p:cNvSpPr txBox="1"/>
-          <p:nvPr/>
-        </p:nvSpPr>
-        <p:spPr>
-          <a:xfrm>
-            <a:off x="457200" y="4736592"/>
-            <a:ext cx="7772400" cy="274320"/>
-          </a:xfrm>
-          <a:prstGeom prst="rect">
-            <a:avLst/>
-          </a:prstGeom>
-          <a:noFill/>
-          <a:ln/>
-        </p:spPr>
-        <p:txBody>
-          <a:bodyPr wrap="square" lIns="0" tIns="0" rIns="0" bIns="0" rtlCol="0" anchor="b"/>
-          <a:lstStyle/>
-          <a:p>
-            <a:pPr indent="0" marL="0">
-              <a:buNone/>
-            </a:pPr>
-            <a:r>
-              <a:rPr lang="en-US" sz="750" dirty="0">
-                <a:solidFill>
-                  <a:srgbClr val="5A6280"/>
-                </a:solidFill>
-                <a:latin typeface="Arial" pitchFamily="34" charset="0"/>
-                <a:ea typeface="Arial" pitchFamily="34" charset="-122"/>
-                <a:cs typeface="Arial" pitchFamily="34" charset="-120"/>
-              </a:rPr>
-              <a:t>Источники: Финансовая_модель_ИНГОССЕМЬЯ.xlsx, юнит-экономика базового сценария и версии 1; все значения: расчет модели с учетом льгот ветеранам</a:t>
-            </a:r>
-            <a:endParaRPr lang="en-US" sz="750" dirty="0"/>
           </a:p>
         </p:txBody>
       </p:sp>
@@ -9264,7 +7353,7 @@
       </p:sp>
       <p:pic>
         <p:nvPicPr>
-          <p:cNvPr id="3" name="Image 0" descr="/Users/mihailkraynev/Documents/Dev/ingosstrah project/08_presentation/build_source/img/Накопленный_результат_по_сценариям.png">    </p:cNvPr>
+          <p:cNvPr id="3" name="Image 0" descr="">    </p:cNvPr>
           <p:cNvPicPr>
             <a:picLocks noChangeAspect="1"/>
           </p:cNvPicPr>
@@ -10855,45 +8944,6 @@
       </p:sp>
       <p:sp>
         <p:nvSpPr>
-          <p:cNvPr id="18" name="Text 14"/>
-          <p:cNvSpPr txBox="1"/>
-          <p:nvPr/>
-        </p:nvSpPr>
-        <p:spPr>
-          <a:xfrm>
-            <a:off x="457200" y="4736592"/>
-            <a:ext cx="7772400" cy="274320"/>
-          </a:xfrm>
-          <a:prstGeom prst="rect">
-            <a:avLst/>
-          </a:prstGeom>
-          <a:noFill/>
-          <a:ln/>
-        </p:spPr>
-        <p:txBody>
-          <a:bodyPr wrap="square" lIns="0" tIns="0" rIns="0" bIns="0" rtlCol="0" anchor="b"/>
-          <a:lstStyle/>
-          <a:p>
-            <a:pPr indent="0" marL="0">
-              <a:buNone/>
-            </a:pPr>
-            <a:r>
-              <a:rPr lang="en-US" sz="750" dirty="0">
-                <a:solidFill>
-                  <a:srgbClr val="5A6280"/>
-                </a:solidFill>
-                <a:latin typeface="Arial" pitchFamily="34" charset="0"/>
-                <a:ea typeface="Arial" pitchFamily="34" charset="-122"/>
-                <a:cs typeface="Arial" pitchFamily="34" charset="-120"/>
-              </a:rPr>
-              <a:t>Источники: Финансовая_модель_ИНГОССЕМЬЯ.xlsx, лист «Сводка»; горизонт 60 месяцев; все значения: расчет модели с учетом льгот ветеранам, входные параметры: допущения</a:t>
-            </a:r>
-            <a:endParaRPr lang="en-US" sz="750" dirty="0"/>
-          </a:p>
-        </p:txBody>
-      </p:sp>
-      <p:sp>
-        <p:nvSpPr>
           <p:cNvPr id="25" name="Slide Number Placeholder 0"/>
           <p:cNvSpPr>
             <a:spLocks noGrp="1"/>
@@ -11008,7 +9058,7 @@
       </p:sp>
       <p:pic>
         <p:nvPicPr>
-          <p:cNvPr id="3" name="Image 0" descr="/Users/mihailkraynev/Documents/Dev/ingosstrah project/08_presentation/build_source/img/Чувствительность_NPV.png">    </p:cNvPr>
+          <p:cNvPr id="3" name="Image 0" descr="">    </p:cNvPr>
           <p:cNvPicPr>
             <a:picLocks noChangeAspect="1"/>
           </p:cNvPicPr>
@@ -11032,7 +9082,7 @@
       </p:pic>
       <p:pic>
         <p:nvPicPr>
-          <p:cNvPr id="4" name="Image 1" descr="/Users/mihailkraynev/Documents/Dev/ingosstrah project/08_presentation/build_source/img/Монте_Карло_NPV.png">    </p:cNvPr>
+          <p:cNvPr id="4" name="Image 1" descr="">    </p:cNvPr>
           <p:cNvPicPr>
             <a:picLocks noChangeAspect="1"/>
           </p:cNvPicPr>
@@ -11154,8 +9204,10 @@
             <a:off x="585216" y="3557016"/>
             <a:ext cx="384048" cy="384048"/>
           </a:xfrm>
-          <a:prstGeom prst="ellipse">
-            <a:avLst/>
+          <a:prstGeom prst="roundRect">
+            <a:avLst>
+              <a:gd name="adj" fmla="val 28000"/>
+            </a:avLst>
           </a:prstGeom>
           <a:solidFill>
             <a:srgbClr val="FFFFFF"/>
@@ -11165,7 +9217,7 @@
       </p:sp>
       <p:pic>
         <p:nvPicPr>
-          <p:cNvPr id="8" name="Image 2" descr="/Users/mihailkraynev/Documents/Dev/ingosstrah project/08_presentation/build_source/img/icons/pill_blue.png">    </p:cNvPr>
+          <p:cNvPr id="8" name="Image 2" descr="">    </p:cNvPr>
           <p:cNvPicPr>
             <a:picLocks noChangeAspect="1"/>
           </p:cNvPicPr>
@@ -11179,8 +9231,8 @@
         </p:blipFill>
         <p:spPr>
           <a:xfrm>
-            <a:off x="669707" y="3641507"/>
-            <a:ext cx="215067" cy="215067"/>
+            <a:off x="658185" y="3629985"/>
+            <a:ext cx="238110" cy="238110"/>
           </a:xfrm>
           <a:prstGeom prst="rect">
             <a:avLst/>
@@ -11298,8 +9350,10 @@
             <a:off x="3389376" y="3557016"/>
             <a:ext cx="384048" cy="384048"/>
           </a:xfrm>
-          <a:prstGeom prst="ellipse">
-            <a:avLst/>
+          <a:prstGeom prst="roundRect">
+            <a:avLst>
+              <a:gd name="adj" fmla="val 28000"/>
+            </a:avLst>
           </a:prstGeom>
           <a:solidFill>
             <a:srgbClr val="FFFFFF"/>
@@ -11309,7 +9363,7 @@
       </p:sp>
       <p:pic>
         <p:nvPicPr>
-          <p:cNvPr id="13" name="Image 3" descr="/Users/mihailkraynev/Documents/Dev/ingosstrah project/08_presentation/build_source/img/icons/bell_blue.png">    </p:cNvPr>
+          <p:cNvPr id="13" name="Image 3" descr="">    </p:cNvPr>
           <p:cNvPicPr>
             <a:picLocks noChangeAspect="1"/>
           </p:cNvPicPr>
@@ -11323,8 +9377,8 @@
         </p:blipFill>
         <p:spPr>
           <a:xfrm>
-            <a:off x="3473867" y="3641507"/>
-            <a:ext cx="215067" cy="215067"/>
+            <a:off x="3462345" y="3629985"/>
+            <a:ext cx="238110" cy="238110"/>
           </a:xfrm>
           <a:prstGeom prst="rect">
             <a:avLst/>
@@ -11442,8 +9496,10 @@
             <a:off x="6193536" y="3557016"/>
             <a:ext cx="384048" cy="384048"/>
           </a:xfrm>
-          <a:prstGeom prst="ellipse">
-            <a:avLst/>
+          <a:prstGeom prst="roundRect">
+            <a:avLst>
+              <a:gd name="adj" fmla="val 28000"/>
+            </a:avLst>
           </a:prstGeom>
           <a:solidFill>
             <a:srgbClr val="FFFFFF"/>
@@ -11453,7 +9509,7 @@
       </p:sp>
       <p:pic>
         <p:nvPicPr>
-          <p:cNvPr id="18" name="Image 4" descr="/Users/mihailkraynev/Documents/Dev/ingosstrah project/08_presentation/build_source/img/icons/heart-handshake_blue.png">    </p:cNvPr>
+          <p:cNvPr id="18" name="Image 4" descr="">    </p:cNvPr>
           <p:cNvPicPr>
             <a:picLocks noChangeAspect="1"/>
           </p:cNvPicPr>
@@ -11467,8 +9523,8 @@
         </p:blipFill>
         <p:spPr>
           <a:xfrm>
-            <a:off x="6278027" y="3641507"/>
-            <a:ext cx="215067" cy="215067"/>
+            <a:off x="6266505" y="3629985"/>
+            <a:ext cx="238110" cy="238110"/>
           </a:xfrm>
           <a:prstGeom prst="rect">
             <a:avLst/>
@@ -11550,45 +9606,6 @@
               <a:t>Помощь, а не надзор: родитель решает, что видит ребенок (H3)</a:t>
             </a:r>
             <a:endParaRPr lang="en-US" sz="900" dirty="0"/>
-          </a:p>
-        </p:txBody>
-      </p:sp>
-      <p:sp>
-        <p:nvSpPr>
-          <p:cNvPr id="21" name="Text 14"/>
-          <p:cNvSpPr txBox="1"/>
-          <p:nvPr/>
-        </p:nvSpPr>
-        <p:spPr>
-          <a:xfrm>
-            <a:off x="457200" y="4736592"/>
-            <a:ext cx="7772400" cy="274320"/>
-          </a:xfrm>
-          <a:prstGeom prst="rect">
-            <a:avLst/>
-          </a:prstGeom>
-          <a:noFill/>
-          <a:ln/>
-        </p:spPr>
-        <p:txBody>
-          <a:bodyPr wrap="square" lIns="0" tIns="0" rIns="0" bIns="0" rtlCol="0" anchor="b"/>
-          <a:lstStyle/>
-          <a:p>
-            <a:pPr indent="0" marL="0">
-              <a:buNone/>
-            </a:pPr>
-            <a:r>
-              <a:rPr lang="en-US" sz="750" dirty="0">
-                <a:solidFill>
-                  <a:srgbClr val="5A6280"/>
-                </a:solidFill>
-                <a:latin typeface="Arial" pitchFamily="34" charset="0"/>
-                <a:ea typeface="Arial" pitchFamily="34" charset="-122"/>
-                <a:cs typeface="Arial" pitchFamily="34" charset="-120"/>
-              </a:rPr>
-              <a:t>Источники: Финансовая_модель_ИНГОССЕМЬЯ.xlsx, листы «Чувствительность» и «Монте-Карло»: 5 000 прогонов, параметры ±25%; P95 пиковой потребности 63,3 млн руб.; риски: пояснительная записка, раздел 12</a:t>
-            </a:r>
-            <a:endParaRPr lang="en-US" sz="750" dirty="0"/>
           </a:p>
         </p:txBody>
       </p:sp>
@@ -11714,8 +9731,8 @@
         </p:nvSpPr>
         <p:spPr>
           <a:xfrm>
-            <a:off x="457200" y="1097280"/>
-            <a:ext cx="2011680" cy="365760"/>
+            <a:off x="457200" y="1143000"/>
+            <a:ext cx="1783080" cy="411480"/>
           </a:xfrm>
           <a:prstGeom prst="rect">
             <a:avLst/>
@@ -11753,8 +9770,8 @@
         </p:nvSpPr>
         <p:spPr>
           <a:xfrm>
-            <a:off x="2423160" y="1097280"/>
-            <a:ext cx="1737360" cy="365760"/>
+            <a:off x="2286000" y="1143000"/>
+            <a:ext cx="1828800" cy="411480"/>
           </a:xfrm>
           <a:prstGeom prst="rect">
             <a:avLst/>
@@ -11808,8 +9825,8 @@
           <p:nvPr/>
         </p:nvGraphicFramePr>
         <p:xfrm>
-          <a:off x="320040" y="1508760"/>
-          <a:ext cx="3840480" cy="2880360"/>
+          <a:off x="320040" y="1645920"/>
+          <a:ext cx="3840480" cy="2697480"/>
         </p:xfrm>
         <a:graphic xmlns:a="http://schemas.openxmlformats.org/drawingml/2006/main">
           <a:graphicData uri="http://schemas.openxmlformats.org/drawingml/2006/chart">
@@ -11865,6 +9882,28 @@
         <p:spPr>
           <a:xfrm>
             <a:off x="4343400" y="1143000"/>
+            <a:ext cx="1374648" cy="2697480"/>
+          </a:xfrm>
+          <a:prstGeom prst="roundRect">
+            <a:avLst>
+              <a:gd name="adj" fmla="val 5322"/>
+            </a:avLst>
+          </a:prstGeom>
+          <a:solidFill>
+            <a:srgbClr val="EEF1FD"/>
+          </a:solidFill>
+          <a:ln/>
+        </p:spPr>
+      </p:sp>
+      <p:sp>
+        <p:nvSpPr>
+          <p:cNvPr id="8" name="Shape 5"/>
+          <p:cNvSpPr/>
+          <p:nvPr/>
+        </p:nvSpPr>
+        <p:spPr>
+          <a:xfrm>
+            <a:off x="4343400" y="1143000"/>
             <a:ext cx="1374648" cy="594360"/>
           </a:xfrm>
           <a:prstGeom prst="roundRect">
@@ -11880,23 +9919,23 @@
       </p:sp>
       <p:sp>
         <p:nvSpPr>
-          <p:cNvPr id="8" name="Text 5"/>
-          <p:cNvSpPr txBox="1"/>
-          <p:nvPr/>
-        </p:nvSpPr>
-        <p:spPr>
-          <a:xfrm>
-            <a:off x="4434840" y="1179576"/>
-            <a:ext cx="1191768" cy="228600"/>
-          </a:xfrm>
-          <a:prstGeom prst="rect">
-            <a:avLst/>
-          </a:prstGeom>
-          <a:noFill/>
-          <a:ln/>
-        </p:spPr>
-        <p:txBody>
-          <a:bodyPr wrap="square" lIns="0" tIns="0" rIns="0" bIns="0" rtlCol="0" anchor="t"/>
+          <p:cNvPr id="9" name="Text 6"/>
+          <p:cNvSpPr txBox="1"/>
+          <p:nvPr/>
+        </p:nvSpPr>
+        <p:spPr>
+          <a:xfrm>
+            <a:off x="4471416" y="1197864"/>
+            <a:ext cx="1118616" cy="219456"/>
+          </a:xfrm>
+          <a:prstGeom prst="rect">
+            <a:avLst/>
+          </a:prstGeom>
+          <a:noFill/>
+          <a:ln/>
+        </p:spPr>
+        <p:txBody>
+          <a:bodyPr wrap="square" lIns="0" tIns="0" rIns="0" bIns="0" rtlCol="0" anchor="ctr"/>
           <a:lstStyle/>
           <a:p>
             <a:pPr indent="0" marL="0">
@@ -11919,14 +9958,14 @@
       </p:sp>
       <p:sp>
         <p:nvSpPr>
-          <p:cNvPr id="9" name="Text 6"/>
-          <p:cNvSpPr txBox="1"/>
-          <p:nvPr/>
-        </p:nvSpPr>
-        <p:spPr>
-          <a:xfrm>
-            <a:off x="4434840" y="1408176"/>
-            <a:ext cx="1191768" cy="292608"/>
+          <p:cNvPr id="10" name="Text 7"/>
+          <p:cNvSpPr txBox="1"/>
+          <p:nvPr/>
+        </p:nvSpPr>
+        <p:spPr>
+          <a:xfrm>
+            <a:off x="4471416" y="1417320"/>
+            <a:ext cx="1118616" cy="274320"/>
           </a:xfrm>
           <a:prstGeom prst="rect">
             <a:avLst/>
@@ -11958,14 +9997,14 @@
       </p:sp>
       <p:sp>
         <p:nvSpPr>
-          <p:cNvPr id="10" name="Text 7"/>
-          <p:cNvSpPr txBox="1"/>
-          <p:nvPr/>
-        </p:nvSpPr>
-        <p:spPr>
-          <a:xfrm>
-            <a:off x="4343400" y="1874520"/>
-            <a:ext cx="1374648" cy="2011680"/>
+          <p:cNvPr id="11" name="Text 8"/>
+          <p:cNvSpPr txBox="1"/>
+          <p:nvPr/>
+        </p:nvSpPr>
+        <p:spPr>
+          <a:xfrm>
+            <a:off x="4434840" y="1901952"/>
+            <a:ext cx="1191768" cy="1847088"/>
           </a:xfrm>
           <a:prstGeom prst="rect">
             <a:avLst/>
@@ -11979,13 +10018,13 @@
           <a:p>
             <a:pPr marL="127000" indent="-127000">
               <a:spcAft>
-                <a:spcPts val="400"/>
+                <a:spcPts val="800"/>
               </a:spcAft>
               <a:buSzPct val="100000"/>
               <a:buChar char="•"/>
             </a:pPr>
             <a:r>
-              <a:rPr lang="en-US" sz="950" dirty="0">
+              <a:rPr lang="en-US" sz="1050" dirty="0">
                 <a:solidFill>
                   <a:srgbClr val="151B33"/>
                 </a:solidFill>
@@ -11995,18 +10034,18 @@
               </a:rPr>
               <a:t>Юрист: схема и согласия</a:t>
             </a:r>
-            <a:endParaRPr lang="en-US" sz="950" dirty="0"/>
+            <a:endParaRPr lang="en-US" sz="1050" dirty="0"/>
           </a:p>
           <a:p>
             <a:pPr marL="127000" indent="-127000">
               <a:spcAft>
-                <a:spcPts val="400"/>
+                <a:spcPts val="800"/>
               </a:spcAft>
               <a:buSzPct val="100000"/>
               <a:buChar char="•"/>
             </a:pPr>
             <a:r>
-              <a:rPr lang="en-US" sz="950" dirty="0">
+              <a:rPr lang="en-US" sz="1050" dirty="0">
                 <a:solidFill>
                   <a:srgbClr val="151B33"/>
                 </a:solidFill>
@@ -12016,18 +10055,18 @@
               </a:rPr>
               <a:t>Чат-бот в MAX</a:t>
             </a:r>
-            <a:endParaRPr lang="en-US" sz="950" dirty="0"/>
+            <a:endParaRPr lang="en-US" sz="1050" dirty="0"/>
           </a:p>
           <a:p>
             <a:pPr marL="127000" indent="-127000">
               <a:spcAft>
-                <a:spcPts val="400"/>
+                <a:spcPts val="800"/>
               </a:spcAft>
               <a:buSzPct val="100000"/>
               <a:buChar char="•"/>
             </a:pPr>
             <a:r>
-              <a:rPr lang="en-US" sz="950" dirty="0">
+              <a:rPr lang="en-US" sz="1050" dirty="0">
                 <a:solidFill>
                   <a:srgbClr val="151B33"/>
                 </a:solidFill>
@@ -12037,18 +10076,18 @@
               </a:rPr>
               <a:t>3 координатора</a:t>
             </a:r>
-            <a:endParaRPr lang="en-US" sz="950" dirty="0"/>
+            <a:endParaRPr lang="en-US" sz="1050" dirty="0"/>
           </a:p>
           <a:p>
             <a:pPr marL="127000" indent="-127000">
               <a:spcAft>
-                <a:spcPts val="400"/>
+                <a:spcPts val="800"/>
               </a:spcAft>
               <a:buSzPct val="100000"/>
               <a:buChar char="•"/>
             </a:pPr>
             <a:r>
-              <a:rPr lang="en-US" sz="950" dirty="0">
+              <a:rPr lang="en-US" sz="1050" dirty="0">
                 <a:solidFill>
                   <a:srgbClr val="151B33"/>
                 </a:solidFill>
@@ -12058,13 +10097,35 @@
               </a:rPr>
               <a:t>Пилот с фондом</a:t>
             </a:r>
-            <a:endParaRPr lang="en-US" sz="950" dirty="0"/>
-          </a:p>
-        </p:txBody>
-      </p:sp>
-      <p:sp>
-        <p:nvSpPr>
-          <p:cNvPr id="11" name="Shape 8"/>
+            <a:endParaRPr lang="en-US" sz="1050" dirty="0"/>
+          </a:p>
+        </p:txBody>
+      </p:sp>
+      <p:sp>
+        <p:nvSpPr>
+          <p:cNvPr id="12" name="Shape 9"/>
+          <p:cNvSpPr/>
+          <p:nvPr/>
+        </p:nvSpPr>
+        <p:spPr>
+          <a:xfrm>
+            <a:off x="5827776" y="1143000"/>
+            <a:ext cx="1374648" cy="2697480"/>
+          </a:xfrm>
+          <a:prstGeom prst="roundRect">
+            <a:avLst>
+              <a:gd name="adj" fmla="val 5322"/>
+            </a:avLst>
+          </a:prstGeom>
+          <a:solidFill>
+            <a:srgbClr val="EEF1FD"/>
+          </a:solidFill>
+          <a:ln/>
+        </p:spPr>
+      </p:sp>
+      <p:sp>
+        <p:nvSpPr>
+          <p:cNvPr id="13" name="Shape 10"/>
           <p:cNvSpPr/>
           <p:nvPr/>
         </p:nvSpPr>
@@ -12086,23 +10147,23 @@
       </p:sp>
       <p:sp>
         <p:nvSpPr>
-          <p:cNvPr id="12" name="Text 9"/>
-          <p:cNvSpPr txBox="1"/>
-          <p:nvPr/>
-        </p:nvSpPr>
-        <p:spPr>
-          <a:xfrm>
-            <a:off x="5919216" y="1179576"/>
-            <a:ext cx="1191768" cy="228600"/>
-          </a:xfrm>
-          <a:prstGeom prst="rect">
-            <a:avLst/>
-          </a:prstGeom>
-          <a:noFill/>
-          <a:ln/>
-        </p:spPr>
-        <p:txBody>
-          <a:bodyPr wrap="square" lIns="0" tIns="0" rIns="0" bIns="0" rtlCol="0" anchor="t"/>
+          <p:cNvPr id="14" name="Text 11"/>
+          <p:cNvSpPr txBox="1"/>
+          <p:nvPr/>
+        </p:nvSpPr>
+        <p:spPr>
+          <a:xfrm>
+            <a:off x="5955792" y="1197864"/>
+            <a:ext cx="1118616" cy="219456"/>
+          </a:xfrm>
+          <a:prstGeom prst="rect">
+            <a:avLst/>
+          </a:prstGeom>
+          <a:noFill/>
+          <a:ln/>
+        </p:spPr>
+        <p:txBody>
+          <a:bodyPr wrap="square" lIns="0" tIns="0" rIns="0" bIns="0" rtlCol="0" anchor="ctr"/>
           <a:lstStyle/>
           <a:p>
             <a:pPr indent="0" marL="0">
@@ -12125,14 +10186,14 @@
       </p:sp>
       <p:sp>
         <p:nvSpPr>
-          <p:cNvPr id="13" name="Text 10"/>
-          <p:cNvSpPr txBox="1"/>
-          <p:nvPr/>
-        </p:nvSpPr>
-        <p:spPr>
-          <a:xfrm>
-            <a:off x="5919216" y="1408176"/>
-            <a:ext cx="1191768" cy="292608"/>
+          <p:cNvPr id="15" name="Text 12"/>
+          <p:cNvSpPr txBox="1"/>
+          <p:nvPr/>
+        </p:nvSpPr>
+        <p:spPr>
+          <a:xfrm>
+            <a:off x="5955792" y="1417320"/>
+            <a:ext cx="1118616" cy="274320"/>
           </a:xfrm>
           <a:prstGeom prst="rect">
             <a:avLst/>
@@ -12164,14 +10225,14 @@
       </p:sp>
       <p:sp>
         <p:nvSpPr>
-          <p:cNvPr id="14" name="Text 11"/>
-          <p:cNvSpPr txBox="1"/>
-          <p:nvPr/>
-        </p:nvSpPr>
-        <p:spPr>
-          <a:xfrm>
-            <a:off x="5827776" y="1874520"/>
-            <a:ext cx="1374648" cy="2011680"/>
+          <p:cNvPr id="16" name="Text 13"/>
+          <p:cNvSpPr txBox="1"/>
+          <p:nvPr/>
+        </p:nvSpPr>
+        <p:spPr>
+          <a:xfrm>
+            <a:off x="5919216" y="1901952"/>
+            <a:ext cx="1191768" cy="1847088"/>
           </a:xfrm>
           <a:prstGeom prst="rect">
             <a:avLst/>
@@ -12185,13 +10246,13 @@
           <a:p>
             <a:pPr marL="127000" indent="-127000">
               <a:spcAft>
-                <a:spcPts val="400"/>
+                <a:spcPts val="800"/>
               </a:spcAft>
               <a:buSzPct val="100000"/>
               <a:buChar char="•"/>
             </a:pPr>
             <a:r>
-              <a:rPr lang="en-US" sz="950" dirty="0">
+              <a:rPr lang="en-US" sz="1050" dirty="0">
                 <a:solidFill>
                   <a:srgbClr val="151B33"/>
                 </a:solidFill>
@@ -12201,18 +10262,18 @@
               </a:rPr>
               <a:t>Сотрудники и клиенты ДМС</a:t>
             </a:r>
-            <a:endParaRPr lang="en-US" sz="950" dirty="0"/>
+            <a:endParaRPr lang="en-US" sz="1050" dirty="0"/>
           </a:p>
           <a:p>
             <a:pPr marL="127000" indent="-127000">
               <a:spcAft>
-                <a:spcPts val="400"/>
+                <a:spcPts val="800"/>
               </a:spcAft>
               <a:buSzPct val="100000"/>
               <a:buChar char="•"/>
             </a:pPr>
             <a:r>
-              <a:rPr lang="en-US" sz="950" dirty="0">
+              <a:rPr lang="en-US" sz="1050" dirty="0">
                 <a:solidFill>
                   <a:srgbClr val="151B33"/>
                 </a:solidFill>
@@ -12222,18 +10283,18 @@
               </a:rPr>
               <a:t>Лендинг с предоплатой (H2)</a:t>
             </a:r>
-            <a:endParaRPr lang="en-US" sz="950" dirty="0"/>
+            <a:endParaRPr lang="en-US" sz="1050" dirty="0"/>
           </a:p>
           <a:p>
             <a:pPr marL="127000" indent="-127000">
               <a:spcAft>
-                <a:spcPts val="400"/>
+                <a:spcPts val="800"/>
               </a:spcAft>
               <a:buSzPct val="100000"/>
               <a:buChar char="•"/>
             </a:pPr>
             <a:r>
-              <a:rPr lang="en-US" sz="950" dirty="0">
+              <a:rPr lang="en-US" sz="1050" dirty="0">
                 <a:solidFill>
                   <a:srgbClr val="151B33"/>
                 </a:solidFill>
@@ -12243,13 +10304,35 @@
               </a:rPr>
               <a:t>Хронометраж триажа (H4)</a:t>
             </a:r>
-            <a:endParaRPr lang="en-US" sz="950" dirty="0"/>
-          </a:p>
-        </p:txBody>
-      </p:sp>
-      <p:sp>
-        <p:nvSpPr>
-          <p:cNvPr id="15" name="Shape 12"/>
+            <a:endParaRPr lang="en-US" sz="1050" dirty="0"/>
+          </a:p>
+        </p:txBody>
+      </p:sp>
+      <p:sp>
+        <p:nvSpPr>
+          <p:cNvPr id="17" name="Shape 14"/>
+          <p:cNvSpPr/>
+          <p:nvPr/>
+        </p:nvSpPr>
+        <p:spPr>
+          <a:xfrm>
+            <a:off x="7312152" y="1143000"/>
+            <a:ext cx="1374648" cy="2697480"/>
+          </a:xfrm>
+          <a:prstGeom prst="roundRect">
+            <a:avLst>
+              <a:gd name="adj" fmla="val 5322"/>
+            </a:avLst>
+          </a:prstGeom>
+          <a:solidFill>
+            <a:srgbClr val="EEF1FD"/>
+          </a:solidFill>
+          <a:ln/>
+        </p:spPr>
+      </p:sp>
+      <p:sp>
+        <p:nvSpPr>
+          <p:cNvPr id="18" name="Shape 15"/>
           <p:cNvSpPr/>
           <p:nvPr/>
         </p:nvSpPr>
@@ -12271,23 +10354,23 @@
       </p:sp>
       <p:sp>
         <p:nvSpPr>
-          <p:cNvPr id="16" name="Text 13"/>
-          <p:cNvSpPr txBox="1"/>
-          <p:nvPr/>
-        </p:nvSpPr>
-        <p:spPr>
-          <a:xfrm>
-            <a:off x="7403592" y="1179576"/>
-            <a:ext cx="1191768" cy="228600"/>
-          </a:xfrm>
-          <a:prstGeom prst="rect">
-            <a:avLst/>
-          </a:prstGeom>
-          <a:noFill/>
-          <a:ln/>
-        </p:spPr>
-        <p:txBody>
-          <a:bodyPr wrap="square" lIns="0" tIns="0" rIns="0" bIns="0" rtlCol="0" anchor="t"/>
+          <p:cNvPr id="19" name="Text 16"/>
+          <p:cNvSpPr txBox="1"/>
+          <p:nvPr/>
+        </p:nvSpPr>
+        <p:spPr>
+          <a:xfrm>
+            <a:off x="7440168" y="1197864"/>
+            <a:ext cx="1118616" cy="219456"/>
+          </a:xfrm>
+          <a:prstGeom prst="rect">
+            <a:avLst/>
+          </a:prstGeom>
+          <a:noFill/>
+          <a:ln/>
+        </p:spPr>
+        <p:txBody>
+          <a:bodyPr wrap="square" lIns="0" tIns="0" rIns="0" bIns="0" rtlCol="0" anchor="ctr"/>
           <a:lstStyle/>
           <a:p>
             <a:pPr indent="0" marL="0">
@@ -12310,14 +10393,14 @@
       </p:sp>
       <p:sp>
         <p:nvSpPr>
-          <p:cNvPr id="17" name="Text 14"/>
-          <p:cNvSpPr txBox="1"/>
-          <p:nvPr/>
-        </p:nvSpPr>
-        <p:spPr>
-          <a:xfrm>
-            <a:off x="7403592" y="1408176"/>
-            <a:ext cx="1191768" cy="292608"/>
+          <p:cNvPr id="20" name="Text 17"/>
+          <p:cNvSpPr txBox="1"/>
+          <p:nvPr/>
+        </p:nvSpPr>
+        <p:spPr>
+          <a:xfrm>
+            <a:off x="7440168" y="1417320"/>
+            <a:ext cx="1118616" cy="274320"/>
           </a:xfrm>
           <a:prstGeom prst="rect">
             <a:avLst/>
@@ -12349,14 +10432,14 @@
       </p:sp>
       <p:sp>
         <p:nvSpPr>
-          <p:cNvPr id="18" name="Text 15"/>
-          <p:cNvSpPr txBox="1"/>
-          <p:nvPr/>
-        </p:nvSpPr>
-        <p:spPr>
-          <a:xfrm>
-            <a:off x="7312152" y="1874520"/>
-            <a:ext cx="1374648" cy="2011680"/>
+          <p:cNvPr id="21" name="Text 18"/>
+          <p:cNvSpPr txBox="1"/>
+          <p:nvPr/>
+        </p:nvSpPr>
+        <p:spPr>
+          <a:xfrm>
+            <a:off x="7403592" y="1901952"/>
+            <a:ext cx="1191768" cy="1847088"/>
           </a:xfrm>
           <a:prstGeom prst="rect">
             <a:avLst/>
@@ -12370,13 +10453,13 @@
           <a:p>
             <a:pPr marL="127000" indent="-127000">
               <a:spcAft>
-                <a:spcPts val="400"/>
+                <a:spcPts val="800"/>
               </a:spcAft>
               <a:buSzPct val="100000"/>
               <a:buChar char="•"/>
             </a:pPr>
             <a:r>
-              <a:rPr lang="en-US" sz="950" dirty="0">
+              <a:rPr lang="en-US" sz="1050" dirty="0">
                 <a:solidFill>
                   <a:srgbClr val="151B33"/>
                 </a:solidFill>
@@ -12386,18 +10469,18 @@
               </a:rPr>
               <a:t>Тест цены</a:t>
             </a:r>
-            <a:endParaRPr lang="en-US" sz="950" dirty="0"/>
+            <a:endParaRPr lang="en-US" sz="1050" dirty="0"/>
           </a:p>
           <a:p>
             <a:pPr marL="127000" indent="-127000">
               <a:spcAft>
-                <a:spcPts val="400"/>
+                <a:spcPts val="800"/>
               </a:spcAft>
               <a:buSzPct val="100000"/>
               <a:buChar char="•"/>
             </a:pPr>
             <a:r>
-              <a:rPr lang="en-US" sz="950" dirty="0">
+              <a:rPr lang="en-US" sz="1050" dirty="0">
                 <a:solidFill>
                   <a:srgbClr val="151B33"/>
                 </a:solidFill>
@@ -12407,18 +10490,18 @@
               </a:rPr>
               <a:t>15 семей ветеранов (H6)</a:t>
             </a:r>
-            <a:endParaRPr lang="en-US" sz="950" dirty="0"/>
+            <a:endParaRPr lang="en-US" sz="1050" dirty="0"/>
           </a:p>
           <a:p>
             <a:pPr marL="127000" indent="-127000">
               <a:spcAft>
-                <a:spcPts val="400"/>
+                <a:spcPts val="800"/>
               </a:spcAft>
               <a:buSzPct val="100000"/>
               <a:buChar char="•"/>
             </a:pPr>
             <a:r>
-              <a:rPr lang="en-US" sz="950" dirty="0">
+              <a:rPr lang="en-US" sz="1050" dirty="0">
                 <a:solidFill>
                   <a:srgbClr val="151B33"/>
                 </a:solidFill>
@@ -12428,13 +10511,13 @@
               </a:rPr>
               <a:t>B2B2C-пилоты (H5)</a:t>
             </a:r>
-            <a:endParaRPr lang="en-US" sz="950" dirty="0"/>
-          </a:p>
-        </p:txBody>
-      </p:sp>
-      <p:sp>
-        <p:nvSpPr>
-          <p:cNvPr id="19" name="Shape 16"/>
+            <a:endParaRPr lang="en-US" sz="1050" dirty="0"/>
+          </a:p>
+        </p:txBody>
+      </p:sp>
+      <p:sp>
+        <p:nvSpPr>
+          <p:cNvPr id="22" name="Shape 19"/>
           <p:cNvSpPr/>
           <p:nvPr/>
         </p:nvSpPr>
@@ -12456,17 +10539,19 @@
       </p:sp>
       <p:sp>
         <p:nvSpPr>
-          <p:cNvPr id="20" name="Shape 17"/>
+          <p:cNvPr id="23" name="Shape 20"/>
           <p:cNvSpPr/>
           <p:nvPr/>
         </p:nvSpPr>
         <p:spPr>
           <a:xfrm>
-            <a:off x="4453128" y="4114800"/>
+            <a:off x="4471416" y="4114800"/>
             <a:ext cx="365760" cy="365760"/>
           </a:xfrm>
-          <a:prstGeom prst="ellipse">
-            <a:avLst/>
+          <a:prstGeom prst="roundRect">
+            <a:avLst>
+              <a:gd name="adj" fmla="val 28000"/>
+            </a:avLst>
           </a:prstGeom>
           <a:solidFill>
             <a:srgbClr val="0A2A8A"/>
@@ -12476,7 +10561,7 @@
       </p:sp>
       <p:pic>
         <p:nvPicPr>
-          <p:cNvPr id="21" name="Image 0" descr="/Users/mihailkraynev/Documents/Dev/ingosstrah project/08_presentation/build_source/img/icons/calendar-check_white.png">    </p:cNvPr>
+          <p:cNvPr id="24" name="Image 0" descr="">    </p:cNvPr>
           <p:cNvPicPr>
             <a:picLocks noChangeAspect="1"/>
           </p:cNvPicPr>
@@ -12490,8 +10575,8 @@
         </p:blipFill>
         <p:spPr>
           <a:xfrm>
-            <a:off x="4533595" y="4195267"/>
-            <a:ext cx="204826" cy="204826"/>
+            <a:off x="4540910" y="4184294"/>
+            <a:ext cx="226771" cy="226771"/>
           </a:xfrm>
           <a:prstGeom prst="rect">
             <a:avLst/>
@@ -12500,14 +10585,14 @@
       </p:pic>
       <p:sp>
         <p:nvSpPr>
-          <p:cNvPr id="22" name="Text 18"/>
-          <p:cNvSpPr txBox="1"/>
-          <p:nvPr/>
-        </p:nvSpPr>
-        <p:spPr>
-          <a:xfrm>
-            <a:off x="4937760" y="4023360"/>
-            <a:ext cx="3566160" cy="548640"/>
+          <p:cNvPr id="25" name="Text 21"/>
+          <p:cNvSpPr txBox="1"/>
+          <p:nvPr/>
+        </p:nvSpPr>
+        <p:spPr>
+          <a:xfrm>
+            <a:off x="4983480" y="4023360"/>
+            <a:ext cx="3520440" cy="548640"/>
           </a:xfrm>
           <a:prstGeom prst="rect">
             <a:avLst/>
@@ -12534,45 +10619,6 @@
               <a:t>Неделя 12: решение по порогам H2-H6</a:t>
             </a:r>
             <a:endParaRPr lang="en-US" sz="1150" dirty="0"/>
-          </a:p>
-        </p:txBody>
-      </p:sp>
-      <p:sp>
-        <p:nvSpPr>
-          <p:cNvPr id="23" name="Text 19"/>
-          <p:cNvSpPr txBox="1"/>
-          <p:nvPr/>
-        </p:nvSpPr>
-        <p:spPr>
-          <a:xfrm>
-            <a:off x="457200" y="4736592"/>
-            <a:ext cx="7772400" cy="274320"/>
-          </a:xfrm>
-          <a:prstGeom prst="rect">
-            <a:avLst/>
-          </a:prstGeom>
-          <a:noFill/>
-          <a:ln/>
-        </p:spPr>
-        <p:txBody>
-          <a:bodyPr wrap="square" lIns="0" tIns="0" rIns="0" bIns="0" rtlCol="0" anchor="b"/>
-          <a:lstStyle/>
-          <a:p>
-            <a:pPr indent="0" marL="0">
-              <a:buNone/>
-            </a:pPr>
-            <a:r>
-              <a:rPr lang="en-US" sz="750" dirty="0">
-                <a:solidFill>
-                  <a:srgbClr val="5A6280"/>
-                </a:solidFill>
-                <a:latin typeface="Arial" pitchFamily="34" charset="0"/>
-                <a:ea typeface="Arial" pitchFamily="34" charset="-122"/>
-                <a:cs typeface="Arial" pitchFamily="34" charset="-120"/>
-              </a:rPr>
-              <a:t>Источники: Финансовая_модель_ИНГОССЕМЬЯ.xlsx, лист «Бюджет MVP»; дорожная карта 07_docs/diagrams/Дорожная_карта_MVP; выручка за MVP 316 277 руб. в бюджет не засчитана</a:t>
-            </a:r>
-            <a:endParaRPr lang="en-US" sz="750" dirty="0"/>
           </a:p>
         </p:txBody>
       </p:sp>
@@ -14931,45 +12977,6 @@
       </p:sp>
       <p:sp>
         <p:nvSpPr>
-          <p:cNvPr id="13" name="Text 10"/>
-          <p:cNvSpPr txBox="1"/>
-          <p:nvPr/>
-        </p:nvSpPr>
-        <p:spPr>
-          <a:xfrm>
-            <a:off x="457200" y="4736592"/>
-            <a:ext cx="7772400" cy="274320"/>
-          </a:xfrm>
-          <a:prstGeom prst="rect">
-            <a:avLst/>
-          </a:prstGeom>
-          <a:noFill/>
-          <a:ln/>
-        </p:spPr>
-        <p:txBody>
-          <a:bodyPr wrap="square" lIns="0" tIns="0" rIns="0" bIns="0" rtlCol="0" anchor="b"/>
-          <a:lstStyle/>
-          <a:p>
-            <a:pPr indent="0" marL="0">
-              <a:buNone/>
-            </a:pPr>
-            <a:r>
-              <a:rPr lang="en-US" sz="750" dirty="0">
-                <a:solidFill>
-                  <a:srgbClr val="5A6280"/>
-                </a:solidFill>
-                <a:latin typeface="Arial" pitchFamily="34" charset="0"/>
-                <a:ea typeface="Arial" pitchFamily="34" charset="-122"/>
-                <a:cs typeface="Arial" pitchFamily="34" charset="-120"/>
-              </a:rPr>
-              <a:t>Источники: пояснительная записка, раздел 11; правило решения: допущение команды; H4 главная гипотеза, на ней держится юнит-экономика</a:t>
-            </a:r>
-            <a:endParaRPr lang="en-US" sz="750" dirty="0"/>
-          </a:p>
-        </p:txBody>
-      </p:sp>
-      <p:sp>
-        <p:nvSpPr>
           <p:cNvPr id="25" name="Slide Number Placeholder 0"/>
           <p:cNvSpPr>
             <a:spLocks noGrp="1"/>
@@ -15130,8 +13137,10 @@
             <a:off x="457200" y="1508760"/>
             <a:ext cx="384048" cy="384048"/>
           </a:xfrm>
-          <a:prstGeom prst="ellipse">
-            <a:avLst/>
+          <a:prstGeom prst="roundRect">
+            <a:avLst>
+              <a:gd name="adj" fmla="val 28000"/>
+            </a:avLst>
           </a:prstGeom>
           <a:solidFill>
             <a:srgbClr val="1E3FD8"/>
@@ -15141,7 +13150,7 @@
       </p:sp>
       <p:pic>
         <p:nvPicPr>
-          <p:cNvPr id="5" name="Image 0" descr="/Users/mihailkraynev/Documents/Dev/ingosstrah project/08_presentation/build_source/img/icons/badge-check_white.png">    </p:cNvPr>
+          <p:cNvPr id="5" name="Image 0" descr="">    </p:cNvPr>
           <p:cNvPicPr>
             <a:picLocks noChangeAspect="1"/>
           </p:cNvPicPr>
@@ -15155,8 +13164,8 @@
         </p:blipFill>
         <p:spPr>
           <a:xfrm>
-            <a:off x="541691" y="1593251"/>
-            <a:ext cx="215067" cy="215067"/>
+            <a:off x="530169" y="1581729"/>
+            <a:ext cx="238110" cy="238110"/>
           </a:xfrm>
           <a:prstGeom prst="rect">
             <a:avLst/>
@@ -15340,8 +13349,10 @@
             <a:off x="4754880" y="1508760"/>
             <a:ext cx="384048" cy="384048"/>
           </a:xfrm>
-          <a:prstGeom prst="ellipse">
-            <a:avLst/>
+          <a:prstGeom prst="roundRect">
+            <a:avLst>
+              <a:gd name="adj" fmla="val 28000"/>
+            </a:avLst>
           </a:prstGeom>
           <a:solidFill>
             <a:srgbClr val="1E3FD8"/>
@@ -15351,7 +13362,7 @@
       </p:sp>
       <p:pic>
         <p:nvPicPr>
-          <p:cNvPr id="9" name="Image 1" descr="/Users/mihailkraynev/Documents/Dev/ingosstrah project/08_presentation/build_source/img/icons/circle-alert_white.png">    </p:cNvPr>
+          <p:cNvPr id="9" name="Image 1" descr="">    </p:cNvPr>
           <p:cNvPicPr>
             <a:picLocks noChangeAspect="1"/>
           </p:cNvPicPr>
@@ -15365,8 +13376,8 @@
         </p:blipFill>
         <p:spPr>
           <a:xfrm>
-            <a:off x="4839371" y="1593251"/>
-            <a:ext cx="215067" cy="215067"/>
+            <a:off x="4827849" y="1581729"/>
+            <a:ext cx="238110" cy="238110"/>
           </a:xfrm>
           <a:prstGeom prst="rect">
             <a:avLst/>
@@ -15791,8 +13802,10 @@
             <a:off x="621792" y="1719072"/>
             <a:ext cx="457200" cy="457200"/>
           </a:xfrm>
-          <a:prstGeom prst="ellipse">
-            <a:avLst/>
+          <a:prstGeom prst="roundRect">
+            <a:avLst>
+              <a:gd name="adj" fmla="val 28000"/>
+            </a:avLst>
           </a:prstGeom>
           <a:solidFill>
             <a:srgbClr val="FFFFFF"/>
@@ -15802,7 +13815,7 @@
       </p:sp>
       <p:pic>
         <p:nvPicPr>
-          <p:cNvPr id="6" name="Image 0" descr="/Users/mihailkraynev/Documents/Dev/ingosstrah project/08_presentation/build_source/img/icons/users_blue.png">    </p:cNvPr>
+          <p:cNvPr id="6" name="Image 0" descr="">    </p:cNvPr>
           <p:cNvPicPr>
             <a:picLocks noChangeAspect="1"/>
           </p:cNvPicPr>
@@ -15816,8 +13829,8 @@
         </p:blipFill>
         <p:spPr>
           <a:xfrm>
-            <a:off x="722376" y="1819656"/>
-            <a:ext cx="256032" cy="256032"/>
+            <a:off x="708660" y="1805940"/>
+            <a:ext cx="283464" cy="283464"/>
           </a:xfrm>
           <a:prstGeom prst="rect">
             <a:avLst/>
@@ -15935,8 +13948,10 @@
             <a:off x="3364992" y="1719072"/>
             <a:ext cx="457200" cy="457200"/>
           </a:xfrm>
-          <a:prstGeom prst="ellipse">
-            <a:avLst/>
+          <a:prstGeom prst="roundRect">
+            <a:avLst>
+              <a:gd name="adj" fmla="val 28000"/>
+            </a:avLst>
           </a:prstGeom>
           <a:solidFill>
             <a:srgbClr val="FFFFFF"/>
@@ -15946,7 +13961,7 @@
       </p:sp>
       <p:pic>
         <p:nvPicPr>
-          <p:cNvPr id="11" name="Image 1" descr="/Users/mihailkraynev/Documents/Dev/ingosstrah project/08_presentation/build_source/img/icons/user_blue.png">    </p:cNvPr>
+          <p:cNvPr id="11" name="Image 1" descr="">    </p:cNvPr>
           <p:cNvPicPr>
             <a:picLocks noChangeAspect="1"/>
           </p:cNvPicPr>
@@ -15960,8 +13975,8 @@
         </p:blipFill>
         <p:spPr>
           <a:xfrm>
-            <a:off x="3465576" y="1819656"/>
-            <a:ext cx="256032" cy="256032"/>
+            <a:off x="3451860" y="1805940"/>
+            <a:ext cx="283464" cy="283464"/>
           </a:xfrm>
           <a:prstGeom prst="rect">
             <a:avLst/>
@@ -16079,8 +14094,10 @@
             <a:off x="621792" y="3163824"/>
             <a:ext cx="457200" cy="457200"/>
           </a:xfrm>
-          <a:prstGeom prst="ellipse">
-            <a:avLst/>
+          <a:prstGeom prst="roundRect">
+            <a:avLst>
+              <a:gd name="adj" fmla="val 28000"/>
+            </a:avLst>
           </a:prstGeom>
           <a:solidFill>
             <a:srgbClr val="FFFFFF"/>
@@ -16090,7 +14107,7 @@
       </p:sp>
       <p:pic>
         <p:nvPicPr>
-          <p:cNvPr id="16" name="Image 2" descr="/Users/mihailkraynev/Documents/Dev/ingosstrah project/08_presentation/build_source/img/icons/wallet_blue.png">    </p:cNvPr>
+          <p:cNvPr id="16" name="Image 2" descr="">    </p:cNvPr>
           <p:cNvPicPr>
             <a:picLocks noChangeAspect="1"/>
           </p:cNvPicPr>
@@ -16104,8 +14121,8 @@
         </p:blipFill>
         <p:spPr>
           <a:xfrm>
-            <a:off x="722376" y="3264408"/>
-            <a:ext cx="256032" cy="256032"/>
+            <a:off x="708660" y="3250692"/>
+            <a:ext cx="283464" cy="283464"/>
           </a:xfrm>
           <a:prstGeom prst="rect">
             <a:avLst/>
@@ -16223,8 +14240,10 @@
             <a:off x="3364992" y="3163824"/>
             <a:ext cx="457200" cy="457200"/>
           </a:xfrm>
-          <a:prstGeom prst="ellipse">
-            <a:avLst/>
+          <a:prstGeom prst="roundRect">
+            <a:avLst>
+              <a:gd name="adj" fmla="val 28000"/>
+            </a:avLst>
           </a:prstGeom>
           <a:solidFill>
             <a:srgbClr val="FFFFFF"/>
@@ -16234,7 +14253,7 @@
       </p:sp>
       <p:pic>
         <p:nvPicPr>
-          <p:cNvPr id="21" name="Image 3" descr="/Users/mihailkraynev/Documents/Dev/ingosstrah project/08_presentation/build_source/img/icons/zap_blue.png">    </p:cNvPr>
+          <p:cNvPr id="21" name="Image 3" descr="">    </p:cNvPr>
           <p:cNvPicPr>
             <a:picLocks noChangeAspect="1"/>
           </p:cNvPicPr>
@@ -16248,8 +14267,8 @@
         </p:blipFill>
         <p:spPr>
           <a:xfrm>
-            <a:off x="3465576" y="3264408"/>
-            <a:ext cx="256032" cy="256032"/>
+            <a:off x="3451860" y="3250692"/>
+            <a:ext cx="283464" cy="283464"/>
           </a:xfrm>
           <a:prstGeom prst="rect">
             <a:avLst/>
@@ -16515,8 +14534,10 @@
             <a:off x="457200" y="4425696"/>
             <a:ext cx="365760" cy="365760"/>
           </a:xfrm>
-          <a:prstGeom prst="ellipse">
-            <a:avLst/>
+          <a:prstGeom prst="roundRect">
+            <a:avLst>
+              <a:gd name="adj" fmla="val 28000"/>
+            </a:avLst>
           </a:prstGeom>
           <a:solidFill>
             <a:srgbClr val="EEF1FD"/>
@@ -16526,7 +14547,7 @@
       </p:sp>
       <p:pic>
         <p:nvPicPr>
-          <p:cNvPr id="28" name="Image 4" descr="/Users/mihailkraynev/Documents/Dev/ingosstrah project/08_presentation/build_source/img/icons/circle-alert_blue.png">    </p:cNvPr>
+          <p:cNvPr id="28" name="Image 4" descr="">    </p:cNvPr>
           <p:cNvPicPr>
             <a:picLocks noChangeAspect="1"/>
           </p:cNvPicPr>
@@ -16540,8 +14561,8 @@
         </p:blipFill>
         <p:spPr>
           <a:xfrm>
-            <a:off x="537667" y="4506163"/>
-            <a:ext cx="204826" cy="204826"/>
+            <a:off x="526694" y="4495190"/>
+            <a:ext cx="226771" cy="226771"/>
           </a:xfrm>
           <a:prstGeom prst="rect">
             <a:avLst/>
@@ -16598,45 +14619,6 @@
               <a:t>звонки каждый день, Госуслуги за родителя, поездки «на всякий случай». Родитель скрывает симптомы, чтобы не беспокоить</a:t>
             </a:r>
             <a:endParaRPr lang="en-US" sz="1050" dirty="0"/>
-          </a:p>
-        </p:txBody>
-      </p:sp>
-      <p:sp>
-        <p:nvSpPr>
-          <p:cNvPr id="30" name="Text 23"/>
-          <p:cNvSpPr txBox="1"/>
-          <p:nvPr/>
-        </p:nvSpPr>
-        <p:spPr>
-          <a:xfrm>
-            <a:off x="457200" y="4736592"/>
-            <a:ext cx="7772400" cy="274320"/>
-          </a:xfrm>
-          <a:prstGeom prst="rect">
-            <a:avLst/>
-          </a:prstGeom>
-          <a:noFill/>
-          <a:ln/>
-        </p:spPr>
-        <p:txBody>
-          <a:bodyPr wrap="square" lIns="0" tIns="0" rIns="0" bIns="0" rtlCol="0" anchor="b"/>
-          <a:lstStyle/>
-          <a:p>
-            <a:pPr indent="0" marL="0">
-              <a:buNone/>
-            </a:pPr>
-            <a:r>
-              <a:rPr lang="en-US" sz="750" dirty="0">
-                <a:solidFill>
-                  <a:srgbClr val="5A6280"/>
-                </a:solidFill>
-                <a:latin typeface="Arial" pitchFamily="34" charset="0"/>
-                <a:ea typeface="Arial" pitchFamily="34" charset="-122"/>
-                <a:cs typeface="Arial" pitchFamily="34" charset="-120"/>
-              </a:rPr>
-              <a:t>Источники: концепция и пояснительная записка команды; признаки сильной проблемы проверяем в интервью 23-25.10</a:t>
-            </a:r>
-            <a:endParaRPr lang="en-US" sz="750" dirty="0"/>
           </a:p>
         </p:txBody>
       </p:sp>
@@ -16748,7 +14730,7 @@
                 <a:ea typeface="Arial" pitchFamily="34" charset="-122"/>
                 <a:cs typeface="Arial" pitchFamily="34" charset="-120"/>
               </a:rPr>
-              <a:t>Приложение: источники, проверены 22.10.2026</a:t>
+              <a:t>Приложение А: Источники</a:t>
             </a:r>
             <a:endParaRPr lang="en-US" sz="2100" dirty="0"/>
           </a:p>
@@ -17342,6 +15324,116 @@
               <a:t>20</a:t>
             </a:fld>
             <a:endParaRPr lang="en-US"/>
+          </a:p>
+        </p:txBody>
+      </p:sp>
+    </p:spTree>
+  </p:cSld>
+  <p:clrMapOvr>
+    <a:masterClrMapping/>
+  </p:clrMapOvr>
+</p:sld>
+</file>
+
+<file path=ppt/slides/slide21.xml><?xml version="1.0" encoding="utf-8"?>
+<p:sld xmlns:a="http://schemas.openxmlformats.org/drawingml/2006/main" xmlns:r="http://schemas.openxmlformats.org/officeDocument/2006/relationships" xmlns:p="http://schemas.openxmlformats.org/presentationml/2006/main">
+  <p:cSld name="Slide 21">
+    <p:bg>
+      <p:bgPr>
+        <a:solidFill>
+          <a:srgbClr val="1E3FD8"/>
+        </a:solidFill>
+      </p:bgPr>
+    </p:bg>
+    <p:spTree>
+      <p:nvGrpSpPr>
+        <p:cNvPr id="1" name=""/>
+        <p:cNvGrpSpPr/>
+        <p:nvPr/>
+      </p:nvGrpSpPr>
+      <p:grpSpPr>
+        <a:xfrm>
+          <a:off x="0" y="0"/>
+          <a:ext cx="0" cy="0"/>
+          <a:chOff x="0" y="0"/>
+          <a:chExt cx="0" cy="0"/>
+        </a:xfrm>
+      </p:grpSpPr>
+      <p:sp>
+        <p:nvSpPr>
+          <p:cNvPr id="2" name="Text 0"/>
+          <p:cNvSpPr txBox="1"/>
+          <p:nvPr/>
+        </p:nvSpPr>
+        <p:spPr>
+          <a:xfrm>
+            <a:off x="457200" y="1828800"/>
+            <a:ext cx="8229600" cy="914400"/>
+          </a:xfrm>
+          <a:prstGeom prst="rect">
+            <a:avLst/>
+          </a:prstGeom>
+          <a:noFill/>
+          <a:ln/>
+        </p:spPr>
+        <p:txBody>
+          <a:bodyPr wrap="square" lIns="0" tIns="0" rIns="0" bIns="0" rtlCol="0" anchor="ctr"/>
+          <a:lstStyle/>
+          <a:p>
+            <a:pPr algn="ctr" indent="0" marL="0">
+              <a:buNone/>
+            </a:pPr>
+            <a:r>
+              <a:rPr lang="en-US" sz="4000" b="1" dirty="0">
+                <a:solidFill>
+                  <a:srgbClr val="B8F02A"/>
+                </a:solidFill>
+                <a:latin typeface="Arial" pitchFamily="34" charset="0"/>
+                <a:ea typeface="Arial" pitchFamily="34" charset="-122"/>
+                <a:cs typeface="Arial" pitchFamily="34" charset="-120"/>
+              </a:rPr>
+              <a:t>Спасибо за внимание!</a:t>
+            </a:r>
+            <a:endParaRPr lang="en-US" sz="4000" dirty="0"/>
+          </a:p>
+        </p:txBody>
+      </p:sp>
+      <p:sp>
+        <p:nvSpPr>
+          <p:cNvPr id="3" name="Text 1"/>
+          <p:cNvSpPr txBox="1"/>
+          <p:nvPr/>
+        </p:nvSpPr>
+        <p:spPr>
+          <a:xfrm>
+            <a:off x="457200" y="2788920"/>
+            <a:ext cx="8229600" cy="365760"/>
+          </a:xfrm>
+          <a:prstGeom prst="rect">
+            <a:avLst/>
+          </a:prstGeom>
+          <a:noFill/>
+          <a:ln/>
+        </p:spPr>
+        <p:txBody>
+          <a:bodyPr wrap="square" lIns="0" tIns="0" rIns="0" bIns="0" rtlCol="0" anchor="ctr"/>
+          <a:lstStyle/>
+          <a:p>
+            <a:pPr algn="ctr" indent="0" marL="0">
+              <a:buNone/>
+            </a:pPr>
+            <a:r>
+              <a:rPr lang="en-US" sz="1400" b="1" dirty="0">
+                <a:solidFill>
+                  <a:srgbClr val="FFFFFF"/>
+                </a:solidFill>
+                <a:latin typeface="Arial" pitchFamily="34" charset="0"/>
+                <a:ea typeface="Arial" pitchFamily="34" charset="-122"/>
+                <a:cs typeface="Arial" pitchFamily="34" charset="-120"/>
+              </a:rPr>
+              <a:t>ИНГОССЕМЬЯ</a:t>
+            </a:r>
+            <a:endParaRPr lang="en-US" sz="1400" dirty="0"/>
           </a:p>
         </p:txBody>
       </p:sp>
@@ -18461,8 +16553,10 @@
             <a:off x="457200" y="3749040"/>
             <a:ext cx="384048" cy="384048"/>
           </a:xfrm>
-          <a:prstGeom prst="ellipse">
-            <a:avLst/>
+          <a:prstGeom prst="roundRect">
+            <a:avLst>
+              <a:gd name="adj" fmla="val 28000"/>
+            </a:avLst>
           </a:prstGeom>
           <a:solidFill>
             <a:srgbClr val="EEF1FD"/>
@@ -18472,7 +16566,7 @@
       </p:sp>
       <p:pic>
         <p:nvPicPr>
-          <p:cNvPr id="35" name="Image 0" descr="/Users/mihailkraynev/Documents/Dev/ingosstrah project/08_presentation/build_source/img/icons/route_blue.png">    </p:cNvPr>
+          <p:cNvPr id="35" name="Image 0" descr="">    </p:cNvPr>
           <p:cNvPicPr>
             <a:picLocks noChangeAspect="1"/>
           </p:cNvPicPr>
@@ -18486,8 +16580,8 @@
         </p:blipFill>
         <p:spPr>
           <a:xfrm>
-            <a:off x="541691" y="3833531"/>
-            <a:ext cx="215067" cy="215067"/>
+            <a:off x="530169" y="3822009"/>
+            <a:ext cx="238110" cy="238110"/>
           </a:xfrm>
           <a:prstGeom prst="rect">
             <a:avLst/>
@@ -18583,8 +16677,10 @@
             <a:off x="3261360" y="3749040"/>
             <a:ext cx="384048" cy="384048"/>
           </a:xfrm>
-          <a:prstGeom prst="ellipse">
-            <a:avLst/>
+          <a:prstGeom prst="roundRect">
+            <a:avLst>
+              <a:gd name="adj" fmla="val 28000"/>
+            </a:avLst>
           </a:prstGeom>
           <a:solidFill>
             <a:srgbClr val="EEF1FD"/>
@@ -18594,7 +16690,7 @@
       </p:sp>
       <p:pic>
         <p:nvPicPr>
-          <p:cNvPr id="39" name="Image 1" descr="/Users/mihailkraynev/Documents/Dev/ingosstrah project/08_presentation/build_source/img/icons/circle-alert_blue.png">    </p:cNvPr>
+          <p:cNvPr id="39" name="Image 1" descr="">    </p:cNvPr>
           <p:cNvPicPr>
             <a:picLocks noChangeAspect="1"/>
           </p:cNvPicPr>
@@ -18608,8 +16704,8 @@
         </p:blipFill>
         <p:spPr>
           <a:xfrm>
-            <a:off x="3345851" y="3833531"/>
-            <a:ext cx="215067" cy="215067"/>
+            <a:off x="3334329" y="3822009"/>
+            <a:ext cx="238110" cy="238110"/>
           </a:xfrm>
           <a:prstGeom prst="rect">
             <a:avLst/>
@@ -18705,8 +16801,10 @@
             <a:off x="6065520" y="3749040"/>
             <a:ext cx="384048" cy="384048"/>
           </a:xfrm>
-          <a:prstGeom prst="ellipse">
-            <a:avLst/>
+          <a:prstGeom prst="roundRect">
+            <a:avLst>
+              <a:gd name="adj" fmla="val 28000"/>
+            </a:avLst>
           </a:prstGeom>
           <a:solidFill>
             <a:srgbClr val="EEF1FD"/>
@@ -18716,7 +16814,7 @@
       </p:sp>
       <p:pic>
         <p:nvPicPr>
-          <p:cNvPr id="43" name="Image 2" descr="/Users/mihailkraynev/Documents/Dev/ingosstrah project/08_presentation/build_source/img/icons/ban_blue.png">    </p:cNvPr>
+          <p:cNvPr id="43" name="Image 2" descr="">    </p:cNvPr>
           <p:cNvPicPr>
             <a:picLocks noChangeAspect="1"/>
           </p:cNvPicPr>
@@ -18730,8 +16828,8 @@
         </p:blipFill>
         <p:spPr>
           <a:xfrm>
-            <a:off x="6150011" y="3833531"/>
-            <a:ext cx="215067" cy="215067"/>
+            <a:off x="6138489" y="3822009"/>
+            <a:ext cx="238110" cy="238110"/>
           </a:xfrm>
           <a:prstGeom prst="rect">
             <a:avLst/>
@@ -18813,45 +16911,6 @@
               <a:t>Опрос НАФИ 2016 года о тратах на уход не используем</a:t>
             </a:r>
             <a:endParaRPr lang="en-US" sz="1000" dirty="0"/>
-          </a:p>
-        </p:txBody>
-      </p:sp>
-      <p:sp>
-        <p:nvSpPr>
-          <p:cNvPr id="46" name="Text 41"/>
-          <p:cNvSpPr txBox="1"/>
-          <p:nvPr/>
-        </p:nvSpPr>
-        <p:spPr>
-          <a:xfrm>
-            <a:off x="457200" y="4736592"/>
-            <a:ext cx="7772400" cy="274320"/>
-          </a:xfrm>
-          <a:prstGeom prst="rect">
-            <a:avLst/>
-          </a:prstGeom>
-          <a:noFill/>
-          <a:ln/>
-        </p:spPr>
-        <p:txBody>
-          <a:bodyPr wrap="square" lIns="0" tIns="0" rIns="0" bIns="0" rtlCol="0" anchor="b"/>
-          <a:lstStyle/>
-          <a:p>
-            <a:pPr indent="0" marL="0">
-              <a:buNone/>
-            </a:pPr>
-            <a:r>
-              <a:rPr lang="en-US" sz="750" dirty="0">
-                <a:solidFill>
-                  <a:srgbClr val="5A6280"/>
-                </a:solidFill>
-                <a:latin typeface="Arial" pitchFamily="34" charset="0"/>
-                <a:ea typeface="Arial" pitchFamily="34" charset="-122"/>
-                <a:cs typeface="Arial" pitchFamily="34" charset="-120"/>
-              </a:rPr>
-              <a:t>Источники: S1 Росстат через Демоскоп, 01.01.2025; S2 ВЦИОМ, 18.09.2026, n=1600; S3 слова министра Мурашко, 07.2026, пересказ СМИ; S4 Минтруд через АСИ, 21.07.2026 (100% - 11%); S5 ВШЭ, 2020</a:t>
-            </a:r>
-            <a:endParaRPr lang="en-US" sz="750" dirty="0"/>
           </a:p>
         </p:txBody>
       </p:sp>
@@ -18978,134 +17037,12 @@
         <p:spPr>
           <a:xfrm>
             <a:off x="457200" y="1143000"/>
-            <a:ext cx="4206240" cy="365760"/>
+            <a:ext cx="2621280" cy="960120"/>
           </a:xfrm>
           <a:prstGeom prst="roundRect">
             <a:avLst>
-              <a:gd name="adj" fmla="val 20000"/>
+              <a:gd name="adj" fmla="val 7619"/>
             </a:avLst>
-          </a:prstGeom>
-          <a:solidFill>
-            <a:srgbClr val="B8F02A"/>
-          </a:solidFill>
-          <a:ln/>
-        </p:spPr>
-      </p:sp>
-      <p:sp>
-        <p:nvSpPr>
-          <p:cNvPr id="4" name="Text 2"/>
-          <p:cNvSpPr txBox="1"/>
-          <p:nvPr/>
-        </p:nvSpPr>
-        <p:spPr>
-          <a:xfrm>
-            <a:off x="594360" y="1143000"/>
-            <a:ext cx="4023360" cy="365760"/>
-          </a:xfrm>
-          <a:prstGeom prst="rect">
-            <a:avLst/>
-          </a:prstGeom>
-          <a:noFill/>
-          <a:ln/>
-        </p:spPr>
-        <p:txBody>
-          <a:bodyPr wrap="square" lIns="0" tIns="0" rIns="0" bIns="0" rtlCol="0" anchor="ctr"/>
-          <a:lstStyle/>
-          <a:p>
-            <a:pPr indent="0" marL="0">
-              <a:buNone/>
-            </a:pPr>
-            <a:r>
-              <a:rPr lang="en-US" sz="1300" b="1" dirty="0">
-                <a:solidFill>
-                  <a:srgbClr val="151B33"/>
-                </a:solidFill>
-                <a:latin typeface="Arial" pitchFamily="34" charset="0"/>
-                <a:ea typeface="Arial" pitchFamily="34" charset="-122"/>
-                <a:cs typeface="Arial" pitchFamily="34" charset="-120"/>
-              </a:rPr>
-              <a:t>Заполняется по итогам интервью 23-25.10</a:t>
-            </a:r>
-            <a:endParaRPr lang="en-US" sz="1300" dirty="0"/>
-          </a:p>
-        </p:txBody>
-      </p:sp>
-      <p:sp>
-        <p:nvSpPr>
-          <p:cNvPr id="5" name="Text 3"/>
-          <p:cNvSpPr txBox="1"/>
-          <p:nvPr/>
-        </p:nvSpPr>
-        <p:spPr>
-          <a:xfrm>
-            <a:off x="4846320" y="1143000"/>
-            <a:ext cx="3840480" cy="365760"/>
-          </a:xfrm>
-          <a:prstGeom prst="rect">
-            <a:avLst/>
-          </a:prstGeom>
-          <a:noFill/>
-          <a:ln/>
-        </p:spPr>
-        <p:txBody>
-          <a:bodyPr wrap="square" lIns="0" tIns="0" rIns="0" bIns="0" rtlCol="0" anchor="ctr"/>
-          <a:lstStyle/>
-          <a:p>
-            <a:pPr indent="0" marL="0">
-              <a:buNone/>
-            </a:pPr>
-            <a:r>
-              <a:rPr lang="en-US" sz="1000" dirty="0">
-                <a:solidFill>
-                  <a:srgbClr val="5A6280"/>
-                </a:solidFill>
-                <a:latin typeface="Arial" pitchFamily="34" charset="0"/>
-                <a:ea typeface="Arial" pitchFamily="34" charset="-122"/>
-                <a:cs typeface="Arial" pitchFamily="34" charset="-120"/>
-              </a:rPr>
-              <a:t>Порог H1: 60%+ тратят 3+ часа в неделю и имели упущенный эпизод за полгода</a:t>
-            </a:r>
-            <a:endParaRPr lang="en-US" sz="1000" dirty="0"/>
-          </a:p>
-        </p:txBody>
-      </p:sp>
-      <p:sp>
-        <p:nvSpPr>
-          <p:cNvPr id="6" name="Shape 4"/>
-          <p:cNvSpPr/>
-          <p:nvPr/>
-        </p:nvSpPr>
-        <p:spPr>
-          <a:xfrm>
-            <a:off x="457200" y="1691640"/>
-            <a:ext cx="2621280" cy="2880360"/>
-          </a:xfrm>
-          <a:prstGeom prst="roundRect">
-            <a:avLst>
-              <a:gd name="adj" fmla="val 2791"/>
-            </a:avLst>
-          </a:prstGeom>
-          <a:ln w="12700">
-            <a:solidFill>
-              <a:srgbClr val="D5DBF5"/>
-            </a:solidFill>
-            <a:prstDash val="solid"/>
-          </a:ln>
-        </p:spPr>
-      </p:sp>
-      <p:sp>
-        <p:nvSpPr>
-          <p:cNvPr id="7" name="Shape 5"/>
-          <p:cNvSpPr/>
-          <p:nvPr/>
-        </p:nvSpPr>
-        <p:spPr>
-          <a:xfrm>
-            <a:off x="640080" y="1856232"/>
-            <a:ext cx="384048" cy="384048"/>
-          </a:xfrm>
-          <a:prstGeom prst="ellipse">
-            <a:avLst/>
           </a:prstGeom>
           <a:solidFill>
             <a:srgbClr val="EEF1FD"/>
@@ -19113,9 +17050,31 @@
           <a:ln/>
         </p:spPr>
       </p:sp>
+      <p:sp>
+        <p:nvSpPr>
+          <p:cNvPr id="4" name="Shape 2"/>
+          <p:cNvSpPr/>
+          <p:nvPr/>
+        </p:nvSpPr>
+        <p:spPr>
+          <a:xfrm>
+            <a:off x="621792" y="1289304"/>
+            <a:ext cx="384048" cy="384048"/>
+          </a:xfrm>
+          <a:prstGeom prst="roundRect">
+            <a:avLst>
+              <a:gd name="adj" fmla="val 28000"/>
+            </a:avLst>
+          </a:prstGeom>
+          <a:solidFill>
+            <a:srgbClr val="FFFFFF"/>
+          </a:solidFill>
+          <a:ln/>
+        </p:spPr>
+      </p:sp>
       <p:pic>
         <p:nvPicPr>
-          <p:cNvPr id="8" name="Image 0" descr="/Users/mihailkraynev/Documents/Dev/ingosstrah project/08_presentation/build_source/img/icons/users_blue.png">    </p:cNvPr>
+          <p:cNvPr id="5" name="Image 0" descr="">    </p:cNvPr>
           <p:cNvPicPr>
             <a:picLocks noChangeAspect="1"/>
           </p:cNvPicPr>
@@ -19129,8 +17088,8 @@
         </p:blipFill>
         <p:spPr>
           <a:xfrm>
-            <a:off x="724571" y="1940723"/>
-            <a:ext cx="215067" cy="215067"/>
+            <a:off x="694761" y="1362273"/>
+            <a:ext cx="238110" cy="238110"/>
           </a:xfrm>
           <a:prstGeom prst="rect">
             <a:avLst/>
@@ -19139,13 +17098,13 @@
       </p:pic>
       <p:sp>
         <p:nvSpPr>
-          <p:cNvPr id="9" name="Text 6"/>
-          <p:cNvSpPr txBox="1"/>
-          <p:nvPr/>
-        </p:nvSpPr>
-        <p:spPr>
-          <a:xfrm>
-            <a:off x="1143000" y="1856232"/>
+          <p:cNvPr id="6" name="Text 3"/>
+          <p:cNvSpPr txBox="1"/>
+          <p:nvPr/>
+        </p:nvSpPr>
+        <p:spPr>
+          <a:xfrm>
+            <a:off x="1115568" y="1289304"/>
             <a:ext cx="1798320" cy="384048"/>
           </a:xfrm>
           <a:prstGeom prst="rect">
@@ -19170,7 +17129,7 @@
                 <a:ea typeface="Arial" pitchFamily="34" charset="-122"/>
                 <a:cs typeface="Arial" pitchFamily="34" charset="-120"/>
               </a:rPr>
-              <a:t>Респонденты</a:t>
+              <a:t>Интервью</a:t>
             </a:r>
             <a:endParaRPr lang="en-US" sz="1250" dirty="0"/>
           </a:p>
@@ -19178,197 +17137,85 @@
       </p:sp>
       <p:sp>
         <p:nvSpPr>
-          <p:cNvPr id="10" name="Text 7"/>
-          <p:cNvSpPr txBox="1"/>
-          <p:nvPr/>
-        </p:nvSpPr>
-        <p:spPr>
-          <a:xfrm>
-            <a:off x="640080" y="2423160"/>
-            <a:ext cx="2255520" cy="457200"/>
-          </a:xfrm>
-          <a:prstGeom prst="rect">
-            <a:avLst/>
-          </a:prstGeom>
-          <a:noFill/>
-          <a:ln/>
-        </p:spPr>
-        <p:txBody>
-          <a:bodyPr wrap="square" lIns="0" tIns="0" rIns="0" bIns="0" rtlCol="0" anchor="t"/>
-          <a:lstStyle/>
-          <a:p>
-            <a:pPr indent="0" marL="0">
-              <a:buNone/>
-            </a:pPr>
-            <a:r>
-              <a:rPr lang="en-US" sz="3000" b="1" dirty="0">
-                <a:solidFill>
-                  <a:srgbClr val="8FA3F0"/>
-                </a:solidFill>
-                <a:latin typeface="Arial" pitchFamily="34" charset="0"/>
-                <a:ea typeface="Arial" pitchFamily="34" charset="-122"/>
-                <a:cs typeface="Arial" pitchFamily="34" charset="-120"/>
-              </a:rPr>
-              <a:t>__</a:t>
-            </a:r>
-            <a:endParaRPr lang="en-US" sz="3000" dirty="0"/>
-          </a:p>
-        </p:txBody>
-      </p:sp>
-      <p:sp>
-        <p:nvSpPr>
-          <p:cNvPr id="11" name="Text 8"/>
-          <p:cNvSpPr txBox="1"/>
-          <p:nvPr/>
-        </p:nvSpPr>
-        <p:spPr>
-          <a:xfrm>
-            <a:off x="640080" y="2898648"/>
-            <a:ext cx="2255520" cy="274320"/>
-          </a:xfrm>
-          <a:prstGeom prst="rect">
-            <a:avLst/>
-          </a:prstGeom>
-          <a:noFill/>
-          <a:ln/>
-        </p:spPr>
-        <p:txBody>
-          <a:bodyPr wrap="square" lIns="0" tIns="0" rIns="0" bIns="0" rtlCol="0" anchor="t"/>
-          <a:lstStyle/>
-          <a:p>
-            <a:pPr indent="0" marL="0">
-              <a:buNone/>
-            </a:pPr>
-            <a:r>
-              <a:rPr lang="en-US" sz="1050" dirty="0">
-                <a:solidFill>
-                  <a:srgbClr val="151B33"/>
-                </a:solidFill>
-                <a:latin typeface="Arial" pitchFamily="34" charset="0"/>
-                <a:ea typeface="Arial" pitchFamily="34" charset="-122"/>
-                <a:cs typeface="Arial" pitchFamily="34" charset="-120"/>
-              </a:rPr>
-              <a:t>интервью, план 15+</a:t>
-            </a:r>
-            <a:endParaRPr lang="en-US" sz="1050" dirty="0"/>
-          </a:p>
-        </p:txBody>
-      </p:sp>
-      <p:sp>
-        <p:nvSpPr>
-          <p:cNvPr id="12" name="Text 9"/>
-          <p:cNvSpPr txBox="1"/>
-          <p:nvPr/>
-        </p:nvSpPr>
-        <p:spPr>
-          <a:xfrm>
-            <a:off x="640080" y="3337560"/>
-            <a:ext cx="2255520" cy="457200"/>
-          </a:xfrm>
-          <a:prstGeom prst="rect">
-            <a:avLst/>
-          </a:prstGeom>
-          <a:noFill/>
-          <a:ln/>
-        </p:spPr>
-        <p:txBody>
-          <a:bodyPr wrap="square" lIns="0" tIns="0" rIns="0" bIns="0" rtlCol="0" anchor="t"/>
-          <a:lstStyle/>
-          <a:p>
-            <a:pPr indent="0" marL="0">
-              <a:buNone/>
-            </a:pPr>
-            <a:r>
-              <a:rPr lang="en-US" sz="3000" b="1" dirty="0">
-                <a:solidFill>
-                  <a:srgbClr val="8FA3F0"/>
-                </a:solidFill>
-                <a:latin typeface="Arial" pitchFamily="34" charset="0"/>
-                <a:ea typeface="Arial" pitchFamily="34" charset="-122"/>
-                <a:cs typeface="Arial" pitchFamily="34" charset="-120"/>
-              </a:rPr>
-              <a:t>__</a:t>
-            </a:r>
-            <a:endParaRPr lang="en-US" sz="3000" dirty="0"/>
-          </a:p>
-        </p:txBody>
-      </p:sp>
-      <p:sp>
-        <p:nvSpPr>
-          <p:cNvPr id="13" name="Text 10"/>
-          <p:cNvSpPr txBox="1"/>
-          <p:nvPr/>
-        </p:nvSpPr>
-        <p:spPr>
-          <a:xfrm>
-            <a:off x="640080" y="3813048"/>
-            <a:ext cx="2255520" cy="274320"/>
-          </a:xfrm>
-          <a:prstGeom prst="rect">
-            <a:avLst/>
-          </a:prstGeom>
-          <a:noFill/>
-          <a:ln/>
-        </p:spPr>
-        <p:txBody>
-          <a:bodyPr wrap="square" lIns="0" tIns="0" rIns="0" bIns="0" rtlCol="0" anchor="t"/>
-          <a:lstStyle/>
-          <a:p>
-            <a:pPr indent="0" marL="0">
-              <a:buNone/>
-            </a:pPr>
-            <a:r>
-              <a:rPr lang="en-US" sz="1050" dirty="0">
-                <a:solidFill>
-                  <a:srgbClr val="151B33"/>
-                </a:solidFill>
-                <a:latin typeface="Arial" pitchFamily="34" charset="0"/>
-                <a:ea typeface="Arial" pitchFamily="34" charset="-122"/>
-                <a:cs typeface="Arial" pitchFamily="34" charset="-120"/>
-              </a:rPr>
-              <a:t>анкет, план 150+</a:t>
-            </a:r>
-            <a:endParaRPr lang="en-US" sz="1050" dirty="0"/>
-          </a:p>
-        </p:txBody>
-      </p:sp>
-      <p:sp>
-        <p:nvSpPr>
-          <p:cNvPr id="14" name="Shape 11"/>
+          <p:cNvPr id="7" name="Shape 4"/>
           <p:cNvSpPr/>
           <p:nvPr/>
         </p:nvSpPr>
         <p:spPr>
           <a:xfrm>
-            <a:off x="3261360" y="1691640"/>
-            <a:ext cx="2621280" cy="2880360"/>
+            <a:off x="621792" y="1783080"/>
+            <a:ext cx="1097280" cy="219456"/>
           </a:xfrm>
           <a:prstGeom prst="roundRect">
             <a:avLst>
-              <a:gd name="adj" fmla="val 2791"/>
+              <a:gd name="adj" fmla="val 20833"/>
             </a:avLst>
           </a:prstGeom>
+          <a:solidFill>
+            <a:srgbClr val="FFFFFF"/>
+          </a:solidFill>
           <a:ln w="12700">
             <a:solidFill>
-              <a:srgbClr val="D5DBF5"/>
+              <a:srgbClr val="8FA3F0"/>
             </a:solidFill>
-            <a:prstDash val="solid"/>
+            <a:prstDash val="dash"/>
           </a:ln>
         </p:spPr>
       </p:sp>
       <p:sp>
         <p:nvSpPr>
-          <p:cNvPr id="15" name="Shape 12"/>
+          <p:cNvPr id="8" name="Text 5"/>
+          <p:cNvSpPr txBox="1"/>
+          <p:nvPr/>
+        </p:nvSpPr>
+        <p:spPr>
+          <a:xfrm>
+            <a:off x="1828800" y="1783080"/>
+            <a:ext cx="1066800" cy="219456"/>
+          </a:xfrm>
+          <a:prstGeom prst="rect">
+            <a:avLst/>
+          </a:prstGeom>
+          <a:noFill/>
+          <a:ln/>
+        </p:spPr>
+        <p:txBody>
+          <a:bodyPr wrap="square" lIns="0" tIns="0" rIns="0" bIns="0" rtlCol="0" anchor="ctr"/>
+          <a:lstStyle/>
+          <a:p>
+            <a:pPr indent="0" marL="0">
+              <a:buNone/>
+            </a:pPr>
+            <a:r>
+              <a:rPr lang="en-US" sz="1000" dirty="0">
+                <a:solidFill>
+                  <a:srgbClr val="5A6280"/>
+                </a:solidFill>
+                <a:latin typeface="Arial" pitchFamily="34" charset="0"/>
+                <a:ea typeface="Arial" pitchFamily="34" charset="-122"/>
+                <a:cs typeface="Arial" pitchFamily="34" charset="-120"/>
+              </a:rPr>
+              <a:t>план 15+</a:t>
+            </a:r>
+            <a:endParaRPr lang="en-US" sz="1000" dirty="0"/>
+          </a:p>
+        </p:txBody>
+      </p:sp>
+      <p:sp>
+        <p:nvSpPr>
+          <p:cNvPr id="9" name="Shape 6"/>
           <p:cNvSpPr/>
           <p:nvPr/>
         </p:nvSpPr>
         <p:spPr>
           <a:xfrm>
-            <a:off x="3444240" y="1856232"/>
-            <a:ext cx="384048" cy="384048"/>
-          </a:xfrm>
-          <a:prstGeom prst="ellipse">
-            <a:avLst/>
+            <a:off x="3261360" y="1143000"/>
+            <a:ext cx="2621280" cy="960120"/>
+          </a:xfrm>
+          <a:prstGeom prst="roundRect">
+            <a:avLst>
+              <a:gd name="adj" fmla="val 7619"/>
+            </a:avLst>
           </a:prstGeom>
           <a:solidFill>
             <a:srgbClr val="EEF1FD"/>
@@ -19376,9 +17223,31 @@
           <a:ln/>
         </p:spPr>
       </p:sp>
+      <p:sp>
+        <p:nvSpPr>
+          <p:cNvPr id="10" name="Shape 7"/>
+          <p:cNvSpPr/>
+          <p:nvPr/>
+        </p:nvSpPr>
+        <p:spPr>
+          <a:xfrm>
+            <a:off x="3425952" y="1289304"/>
+            <a:ext cx="384048" cy="384048"/>
+          </a:xfrm>
+          <a:prstGeom prst="roundRect">
+            <a:avLst>
+              <a:gd name="adj" fmla="val 28000"/>
+            </a:avLst>
+          </a:prstGeom>
+          <a:solidFill>
+            <a:srgbClr val="FFFFFF"/>
+          </a:solidFill>
+          <a:ln/>
+        </p:spPr>
+      </p:sp>
       <p:pic>
         <p:nvPicPr>
-          <p:cNvPr id="16" name="Image 1" descr="/Users/mihailkraynev/Documents/Dev/ingosstrah project/08_presentation/build_source/img/icons/list-checks_blue.png">    </p:cNvPr>
+          <p:cNvPr id="11" name="Image 1" descr="">    </p:cNvPr>
           <p:cNvPicPr>
             <a:picLocks noChangeAspect="1"/>
           </p:cNvPicPr>
@@ -19392,8 +17261,8 @@
         </p:blipFill>
         <p:spPr>
           <a:xfrm>
-            <a:off x="3528731" y="1940723"/>
-            <a:ext cx="215067" cy="215067"/>
+            <a:off x="3498921" y="1362273"/>
+            <a:ext cx="238110" cy="238110"/>
           </a:xfrm>
           <a:prstGeom prst="rect">
             <a:avLst/>
@@ -19402,40 +17271,206 @@
       </p:pic>
       <p:sp>
         <p:nvSpPr>
+          <p:cNvPr id="12" name="Text 8"/>
+          <p:cNvSpPr txBox="1"/>
+          <p:nvPr/>
+        </p:nvSpPr>
+        <p:spPr>
+          <a:xfrm>
+            <a:off x="3919728" y="1289304"/>
+            <a:ext cx="1798320" cy="384048"/>
+          </a:xfrm>
+          <a:prstGeom prst="rect">
+            <a:avLst/>
+          </a:prstGeom>
+          <a:noFill/>
+          <a:ln/>
+        </p:spPr>
+        <p:txBody>
+          <a:bodyPr wrap="square" lIns="0" tIns="0" rIns="0" bIns="0" rtlCol="0" anchor="ctr"/>
+          <a:lstStyle/>
+          <a:p>
+            <a:pPr indent="0" marL="0">
+              <a:buNone/>
+            </a:pPr>
+            <a:r>
+              <a:rPr lang="en-US" sz="1250" b="1" dirty="0">
+                <a:solidFill>
+                  <a:srgbClr val="0A2A8A"/>
+                </a:solidFill>
+                <a:latin typeface="Arial" pitchFamily="34" charset="0"/>
+                <a:ea typeface="Arial" pitchFamily="34" charset="-122"/>
+                <a:cs typeface="Arial" pitchFamily="34" charset="-120"/>
+              </a:rPr>
+              <a:t>Анкеты</a:t>
+            </a:r>
+            <a:endParaRPr lang="en-US" sz="1250" dirty="0"/>
+          </a:p>
+        </p:txBody>
+      </p:sp>
+      <p:sp>
+        <p:nvSpPr>
+          <p:cNvPr id="13" name="Shape 9"/>
+          <p:cNvSpPr/>
+          <p:nvPr/>
+        </p:nvSpPr>
+        <p:spPr>
+          <a:xfrm>
+            <a:off x="3425952" y="1783080"/>
+            <a:ext cx="1097280" cy="219456"/>
+          </a:xfrm>
+          <a:prstGeom prst="roundRect">
+            <a:avLst>
+              <a:gd name="adj" fmla="val 20833"/>
+            </a:avLst>
+          </a:prstGeom>
+          <a:solidFill>
+            <a:srgbClr val="FFFFFF"/>
+          </a:solidFill>
+          <a:ln w="12700">
+            <a:solidFill>
+              <a:srgbClr val="8FA3F0"/>
+            </a:solidFill>
+            <a:prstDash val="dash"/>
+          </a:ln>
+        </p:spPr>
+      </p:sp>
+      <p:sp>
+        <p:nvSpPr>
+          <p:cNvPr id="14" name="Text 10"/>
+          <p:cNvSpPr txBox="1"/>
+          <p:nvPr/>
+        </p:nvSpPr>
+        <p:spPr>
+          <a:xfrm>
+            <a:off x="4632960" y="1783080"/>
+            <a:ext cx="1066800" cy="219456"/>
+          </a:xfrm>
+          <a:prstGeom prst="rect">
+            <a:avLst/>
+          </a:prstGeom>
+          <a:noFill/>
+          <a:ln/>
+        </p:spPr>
+        <p:txBody>
+          <a:bodyPr wrap="square" lIns="0" tIns="0" rIns="0" bIns="0" rtlCol="0" anchor="ctr"/>
+          <a:lstStyle/>
+          <a:p>
+            <a:pPr indent="0" marL="0">
+              <a:buNone/>
+            </a:pPr>
+            <a:r>
+              <a:rPr lang="en-US" sz="1000" dirty="0">
+                <a:solidFill>
+                  <a:srgbClr val="5A6280"/>
+                </a:solidFill>
+                <a:latin typeface="Arial" pitchFamily="34" charset="0"/>
+                <a:ea typeface="Arial" pitchFamily="34" charset="-122"/>
+                <a:cs typeface="Arial" pitchFamily="34" charset="-120"/>
+              </a:rPr>
+              <a:t>план 150+</a:t>
+            </a:r>
+            <a:endParaRPr lang="en-US" sz="1000" dirty="0"/>
+          </a:p>
+        </p:txBody>
+      </p:sp>
+      <p:sp>
+        <p:nvSpPr>
+          <p:cNvPr id="15" name="Shape 11"/>
+          <p:cNvSpPr/>
+          <p:nvPr/>
+        </p:nvSpPr>
+        <p:spPr>
+          <a:xfrm>
+            <a:off x="6065520" y="1143000"/>
+            <a:ext cx="2621280" cy="960120"/>
+          </a:xfrm>
+          <a:prstGeom prst="roundRect">
+            <a:avLst>
+              <a:gd name="adj" fmla="val 7619"/>
+            </a:avLst>
+          </a:prstGeom>
+          <a:solidFill>
+            <a:srgbClr val="0A2A8A"/>
+          </a:solidFill>
+          <a:ln/>
+        </p:spPr>
+      </p:sp>
+      <p:sp>
+        <p:nvSpPr>
+          <p:cNvPr id="16" name="Text 12"/>
+          <p:cNvSpPr txBox="1"/>
+          <p:nvPr/>
+        </p:nvSpPr>
+        <p:spPr>
+          <a:xfrm>
+            <a:off x="6248400" y="1271016"/>
+            <a:ext cx="2255520" cy="274320"/>
+          </a:xfrm>
+          <a:prstGeom prst="rect">
+            <a:avLst/>
+          </a:prstGeom>
+          <a:noFill/>
+          <a:ln/>
+        </p:spPr>
+        <p:txBody>
+          <a:bodyPr wrap="square" lIns="0" tIns="0" rIns="0" bIns="0" rtlCol="0" anchor="ctr"/>
+          <a:lstStyle/>
+          <a:p>
+            <a:pPr indent="0" marL="0">
+              <a:buNone/>
+            </a:pPr>
+            <a:r>
+              <a:rPr lang="en-US" sz="1250" b="1" dirty="0">
+                <a:solidFill>
+                  <a:srgbClr val="B8F02A"/>
+                </a:solidFill>
+                <a:latin typeface="Arial" pitchFamily="34" charset="0"/>
+                <a:ea typeface="Arial" pitchFamily="34" charset="-122"/>
+                <a:cs typeface="Arial" pitchFamily="34" charset="-120"/>
+              </a:rPr>
+              <a:t>Порог H1</a:t>
+            </a:r>
+            <a:endParaRPr lang="en-US" sz="1250" dirty="0"/>
+          </a:p>
+        </p:txBody>
+      </p:sp>
+      <p:sp>
+        <p:nvSpPr>
           <p:cNvPr id="17" name="Text 13"/>
           <p:cNvSpPr txBox="1"/>
           <p:nvPr/>
         </p:nvSpPr>
         <p:spPr>
           <a:xfrm>
-            <a:off x="3947160" y="1856232"/>
-            <a:ext cx="1798320" cy="384048"/>
-          </a:xfrm>
-          <a:prstGeom prst="rect">
-            <a:avLst/>
-          </a:prstGeom>
-          <a:noFill/>
-          <a:ln/>
-        </p:spPr>
-        <p:txBody>
-          <a:bodyPr wrap="square" lIns="0" tIns="0" rIns="0" bIns="0" rtlCol="0" anchor="ctr"/>
+            <a:off x="6248400" y="1581912"/>
+            <a:ext cx="2255520" cy="438912"/>
+          </a:xfrm>
+          <a:prstGeom prst="rect">
+            <a:avLst/>
+          </a:prstGeom>
+          <a:noFill/>
+          <a:ln/>
+        </p:spPr>
+        <p:txBody>
+          <a:bodyPr wrap="square" lIns="0" tIns="0" rIns="0" bIns="0" rtlCol="0" anchor="t"/>
           <a:lstStyle/>
           <a:p>
             <a:pPr indent="0" marL="0">
               <a:buNone/>
             </a:pPr>
             <a:r>
-              <a:rPr lang="en-US" sz="1250" b="1" dirty="0">
-                <a:solidFill>
-                  <a:srgbClr val="0A2A8A"/>
-                </a:solidFill>
-                <a:latin typeface="Arial" pitchFamily="34" charset="0"/>
-                <a:ea typeface="Arial" pitchFamily="34" charset="-122"/>
-                <a:cs typeface="Arial" pitchFamily="34" charset="-120"/>
-              </a:rPr>
-              <a:t>3 повторяющихся паттерна</a:t>
-            </a:r>
-            <a:endParaRPr lang="en-US" sz="1250" dirty="0"/>
+              <a:rPr lang="en-US" sz="1000" dirty="0">
+                <a:solidFill>
+                  <a:srgbClr val="FFFFFF"/>
+                </a:solidFill>
+                <a:latin typeface="Arial" pitchFamily="34" charset="0"/>
+                <a:ea typeface="Arial" pitchFamily="34" charset="-122"/>
+                <a:cs typeface="Arial" pitchFamily="34" charset="-120"/>
+              </a:rPr>
+              <a:t>60%+ тратят 3+ часа в неделю и имели упущенный эпизод за полгода</a:t>
+            </a:r>
+            <a:endParaRPr lang="en-US" sz="1000" dirty="0"/>
           </a:p>
         </p:txBody>
       </p:sp>
@@ -19447,357 +17482,36 @@
         </p:nvSpPr>
         <p:spPr>
           <a:xfrm>
-            <a:off x="3444240" y="2468880"/>
-            <a:ext cx="310896" cy="310896"/>
-          </a:xfrm>
-          <a:prstGeom prst="ellipse">
-            <a:avLst/>
-          </a:prstGeom>
-          <a:solidFill>
-            <a:srgbClr val="1E3FD8"/>
-          </a:solidFill>
-          <a:ln/>
-        </p:spPr>
-      </p:sp>
-      <p:sp>
-        <p:nvSpPr>
-          <p:cNvPr id="19" name="Text 15"/>
-          <p:cNvSpPr txBox="1"/>
-          <p:nvPr/>
-        </p:nvSpPr>
-        <p:spPr>
-          <a:xfrm>
-            <a:off x="3444240" y="2468880"/>
-            <a:ext cx="310896" cy="310896"/>
-          </a:xfrm>
-          <a:prstGeom prst="rect">
-            <a:avLst/>
-          </a:prstGeom>
-          <a:noFill/>
-          <a:ln/>
-        </p:spPr>
-        <p:txBody>
-          <a:bodyPr wrap="square" lIns="0" tIns="0" rIns="0" bIns="0" rtlCol="0" anchor="ctr"/>
-          <a:lstStyle/>
-          <a:p>
-            <a:pPr algn="ctr" indent="0" marL="0">
-              <a:buNone/>
-            </a:pPr>
-            <a:r>
-              <a:rPr lang="en-US" sz="1100" b="1" dirty="0">
-                <a:solidFill>
-                  <a:srgbClr val="FFFFFF"/>
-                </a:solidFill>
-                <a:latin typeface="Arial" pitchFamily="34" charset="0"/>
-                <a:ea typeface="Arial" pitchFamily="34" charset="-122"/>
-                <a:cs typeface="Arial" pitchFamily="34" charset="-120"/>
-              </a:rPr>
-              <a:t>1</a:t>
-            </a:r>
-            <a:endParaRPr lang="en-US" sz="1100" dirty="0"/>
-          </a:p>
-        </p:txBody>
-      </p:sp>
-      <p:sp>
-        <p:nvSpPr>
-          <p:cNvPr id="20" name="Text 16"/>
-          <p:cNvSpPr txBox="1"/>
-          <p:nvPr/>
-        </p:nvSpPr>
-        <p:spPr>
-          <a:xfrm>
-            <a:off x="3883152" y="2450592"/>
-            <a:ext cx="1844040" cy="548640"/>
-          </a:xfrm>
-          <a:prstGeom prst="rect">
-            <a:avLst/>
-          </a:prstGeom>
-          <a:noFill/>
-          <a:ln/>
-        </p:spPr>
-        <p:txBody>
-          <a:bodyPr wrap="square" lIns="0" tIns="0" rIns="0" bIns="0" rtlCol="0" anchor="t"/>
-          <a:lstStyle/>
-          <a:p>
-            <a:pPr indent="0" marL="0">
-              <a:buNone/>
-            </a:pPr>
-            <a:r>
-              <a:rPr lang="en-US" sz="1000" dirty="0">
-                <a:solidFill>
-                  <a:srgbClr val="5A6280"/>
-                </a:solidFill>
-                <a:latin typeface="Arial" pitchFamily="34" charset="0"/>
-                <a:ea typeface="Arial" pitchFamily="34" charset="-122"/>
-                <a:cs typeface="Arial" pitchFamily="34" charset="-120"/>
-              </a:rPr>
-              <a:t>Паттерн: ___</a:t>
-            </a:r>
-            <a:endParaRPr lang="en-US" sz="1000" dirty="0"/>
-          </a:p>
-          <a:p>
-            <a:pPr indent="0" marL="0">
-              <a:buNone/>
-            </a:pPr>
-            <a:r>
-              <a:rPr lang="en-US" sz="1000" dirty="0">
-                <a:solidFill>
-                  <a:srgbClr val="5A6280"/>
-                </a:solidFill>
-                <a:latin typeface="Arial" pitchFamily="34" charset="0"/>
-                <a:ea typeface="Arial" pitchFamily="34" charset="-122"/>
-                <a:cs typeface="Arial" pitchFamily="34" charset="-120"/>
-              </a:rPr>
-              <a:t>У __ из __ респондентов</a:t>
-            </a:r>
-            <a:endParaRPr lang="en-US" sz="1000" dirty="0"/>
-          </a:p>
-        </p:txBody>
-      </p:sp>
-      <p:sp>
-        <p:nvSpPr>
-          <p:cNvPr id="21" name="Shape 17"/>
-          <p:cNvSpPr/>
-          <p:nvPr/>
-        </p:nvSpPr>
-        <p:spPr>
-          <a:xfrm>
-            <a:off x="3444240" y="3246120"/>
-            <a:ext cx="310896" cy="310896"/>
-          </a:xfrm>
-          <a:prstGeom prst="ellipse">
-            <a:avLst/>
-          </a:prstGeom>
-          <a:solidFill>
-            <a:srgbClr val="1E3FD8"/>
-          </a:solidFill>
-          <a:ln/>
-        </p:spPr>
-      </p:sp>
-      <p:sp>
-        <p:nvSpPr>
-          <p:cNvPr id="22" name="Text 18"/>
-          <p:cNvSpPr txBox="1"/>
-          <p:nvPr/>
-        </p:nvSpPr>
-        <p:spPr>
-          <a:xfrm>
-            <a:off x="3444240" y="3246120"/>
-            <a:ext cx="310896" cy="310896"/>
-          </a:xfrm>
-          <a:prstGeom prst="rect">
-            <a:avLst/>
-          </a:prstGeom>
-          <a:noFill/>
-          <a:ln/>
-        </p:spPr>
-        <p:txBody>
-          <a:bodyPr wrap="square" lIns="0" tIns="0" rIns="0" bIns="0" rtlCol="0" anchor="ctr"/>
-          <a:lstStyle/>
-          <a:p>
-            <a:pPr algn="ctr" indent="0" marL="0">
-              <a:buNone/>
-            </a:pPr>
-            <a:r>
-              <a:rPr lang="en-US" sz="1100" b="1" dirty="0">
-                <a:solidFill>
-                  <a:srgbClr val="FFFFFF"/>
-                </a:solidFill>
-                <a:latin typeface="Arial" pitchFamily="34" charset="0"/>
-                <a:ea typeface="Arial" pitchFamily="34" charset="-122"/>
-                <a:cs typeface="Arial" pitchFamily="34" charset="-120"/>
-              </a:rPr>
-              <a:t>2</a:t>
-            </a:r>
-            <a:endParaRPr lang="en-US" sz="1100" dirty="0"/>
-          </a:p>
-        </p:txBody>
-      </p:sp>
-      <p:sp>
-        <p:nvSpPr>
-          <p:cNvPr id="23" name="Text 19"/>
-          <p:cNvSpPr txBox="1"/>
-          <p:nvPr/>
-        </p:nvSpPr>
-        <p:spPr>
-          <a:xfrm>
-            <a:off x="3883152" y="3227832"/>
-            <a:ext cx="1844040" cy="548640"/>
-          </a:xfrm>
-          <a:prstGeom prst="rect">
-            <a:avLst/>
-          </a:prstGeom>
-          <a:noFill/>
-          <a:ln/>
-        </p:spPr>
-        <p:txBody>
-          <a:bodyPr wrap="square" lIns="0" tIns="0" rIns="0" bIns="0" rtlCol="0" anchor="t"/>
-          <a:lstStyle/>
-          <a:p>
-            <a:pPr indent="0" marL="0">
-              <a:buNone/>
-            </a:pPr>
-            <a:r>
-              <a:rPr lang="en-US" sz="1000" dirty="0">
-                <a:solidFill>
-                  <a:srgbClr val="5A6280"/>
-                </a:solidFill>
-                <a:latin typeface="Arial" pitchFamily="34" charset="0"/>
-                <a:ea typeface="Arial" pitchFamily="34" charset="-122"/>
-                <a:cs typeface="Arial" pitchFamily="34" charset="-120"/>
-              </a:rPr>
-              <a:t>Паттерн: ___</a:t>
-            </a:r>
-            <a:endParaRPr lang="en-US" sz="1000" dirty="0"/>
-          </a:p>
-          <a:p>
-            <a:pPr indent="0" marL="0">
-              <a:buNone/>
-            </a:pPr>
-            <a:r>
-              <a:rPr lang="en-US" sz="1000" dirty="0">
-                <a:solidFill>
-                  <a:srgbClr val="5A6280"/>
-                </a:solidFill>
-                <a:latin typeface="Arial" pitchFamily="34" charset="0"/>
-                <a:ea typeface="Arial" pitchFamily="34" charset="-122"/>
-                <a:cs typeface="Arial" pitchFamily="34" charset="-120"/>
-              </a:rPr>
-              <a:t>У __ из __ респондентов</a:t>
-            </a:r>
-            <a:endParaRPr lang="en-US" sz="1000" dirty="0"/>
-          </a:p>
-        </p:txBody>
-      </p:sp>
-      <p:sp>
-        <p:nvSpPr>
-          <p:cNvPr id="24" name="Shape 20"/>
-          <p:cNvSpPr/>
-          <p:nvPr/>
-        </p:nvSpPr>
-        <p:spPr>
-          <a:xfrm>
-            <a:off x="3444240" y="4023360"/>
-            <a:ext cx="310896" cy="310896"/>
-          </a:xfrm>
-          <a:prstGeom prst="ellipse">
-            <a:avLst/>
-          </a:prstGeom>
-          <a:solidFill>
-            <a:srgbClr val="1E3FD8"/>
-          </a:solidFill>
-          <a:ln/>
-        </p:spPr>
-      </p:sp>
-      <p:sp>
-        <p:nvSpPr>
-          <p:cNvPr id="25" name="Text 21"/>
-          <p:cNvSpPr txBox="1"/>
-          <p:nvPr/>
-        </p:nvSpPr>
-        <p:spPr>
-          <a:xfrm>
-            <a:off x="3444240" y="4023360"/>
-            <a:ext cx="310896" cy="310896"/>
-          </a:xfrm>
-          <a:prstGeom prst="rect">
-            <a:avLst/>
-          </a:prstGeom>
-          <a:noFill/>
-          <a:ln/>
-        </p:spPr>
-        <p:txBody>
-          <a:bodyPr wrap="square" lIns="0" tIns="0" rIns="0" bIns="0" rtlCol="0" anchor="ctr"/>
-          <a:lstStyle/>
-          <a:p>
-            <a:pPr algn="ctr" indent="0" marL="0">
-              <a:buNone/>
-            </a:pPr>
-            <a:r>
-              <a:rPr lang="en-US" sz="1100" b="1" dirty="0">
-                <a:solidFill>
-                  <a:srgbClr val="FFFFFF"/>
-                </a:solidFill>
-                <a:latin typeface="Arial" pitchFamily="34" charset="0"/>
-                <a:ea typeface="Arial" pitchFamily="34" charset="-122"/>
-                <a:cs typeface="Arial" pitchFamily="34" charset="-120"/>
-              </a:rPr>
-              <a:t>3</a:t>
-            </a:r>
-            <a:endParaRPr lang="en-US" sz="1100" dirty="0"/>
-          </a:p>
-        </p:txBody>
-      </p:sp>
-      <p:sp>
-        <p:nvSpPr>
-          <p:cNvPr id="26" name="Text 22"/>
-          <p:cNvSpPr txBox="1"/>
-          <p:nvPr/>
-        </p:nvSpPr>
-        <p:spPr>
-          <a:xfrm>
-            <a:off x="3883152" y="4005072"/>
-            <a:ext cx="1844040" cy="548640"/>
-          </a:xfrm>
-          <a:prstGeom prst="rect">
-            <a:avLst/>
-          </a:prstGeom>
-          <a:noFill/>
-          <a:ln/>
-        </p:spPr>
-        <p:txBody>
-          <a:bodyPr wrap="square" lIns="0" tIns="0" rIns="0" bIns="0" rtlCol="0" anchor="t"/>
-          <a:lstStyle/>
-          <a:p>
-            <a:pPr indent="0" marL="0">
-              <a:buNone/>
-            </a:pPr>
-            <a:r>
-              <a:rPr lang="en-US" sz="1000" dirty="0">
-                <a:solidFill>
-                  <a:srgbClr val="5A6280"/>
-                </a:solidFill>
-                <a:latin typeface="Arial" pitchFamily="34" charset="0"/>
-                <a:ea typeface="Arial" pitchFamily="34" charset="-122"/>
-                <a:cs typeface="Arial" pitchFamily="34" charset="-120"/>
-              </a:rPr>
-              <a:t>Паттерн: ___</a:t>
-            </a:r>
-            <a:endParaRPr lang="en-US" sz="1000" dirty="0"/>
-          </a:p>
-          <a:p>
-            <a:pPr indent="0" marL="0">
-              <a:buNone/>
-            </a:pPr>
-            <a:r>
-              <a:rPr lang="en-US" sz="1000" dirty="0">
-                <a:solidFill>
-                  <a:srgbClr val="5A6280"/>
-                </a:solidFill>
-                <a:latin typeface="Arial" pitchFamily="34" charset="0"/>
-                <a:ea typeface="Arial" pitchFamily="34" charset="-122"/>
-                <a:cs typeface="Arial" pitchFamily="34" charset="-120"/>
-              </a:rPr>
-              <a:t>У __ из __ респондентов</a:t>
-            </a:r>
-            <a:endParaRPr lang="en-US" sz="1000" dirty="0"/>
-          </a:p>
-        </p:txBody>
-      </p:sp>
-      <p:sp>
-        <p:nvSpPr>
-          <p:cNvPr id="27" name="Shape 23"/>
-          <p:cNvSpPr/>
-          <p:nvPr/>
-        </p:nvSpPr>
-        <p:spPr>
-          <a:xfrm>
-            <a:off x="6065520" y="1691640"/>
-            <a:ext cx="2621280" cy="1348740"/>
+            <a:off x="457200" y="2286000"/>
+            <a:ext cx="5029200" cy="2286000"/>
           </a:xfrm>
           <a:prstGeom prst="roundRect">
             <a:avLst>
-              <a:gd name="adj" fmla="val 5424"/>
+              <a:gd name="adj" fmla="val 3200"/>
+            </a:avLst>
+          </a:prstGeom>
+          <a:ln w="12700">
+            <a:solidFill>
+              <a:srgbClr val="D5DBF5"/>
+            </a:solidFill>
+            <a:prstDash val="solid"/>
+          </a:ln>
+        </p:spPr>
+      </p:sp>
+      <p:sp>
+        <p:nvSpPr>
+          <p:cNvPr id="19" name="Shape 15"/>
+          <p:cNvSpPr/>
+          <p:nvPr/>
+        </p:nvSpPr>
+        <p:spPr>
+          <a:xfrm>
+            <a:off x="640080" y="2432304"/>
+            <a:ext cx="384048" cy="384048"/>
+          </a:xfrm>
+          <a:prstGeom prst="roundRect">
+            <a:avLst>
+              <a:gd name="adj" fmla="val 28000"/>
             </a:avLst>
           </a:prstGeom>
           <a:solidFill>
@@ -19806,29 +17520,9 @@
           <a:ln/>
         </p:spPr>
       </p:sp>
-      <p:sp>
-        <p:nvSpPr>
-          <p:cNvPr id="28" name="Shape 24"/>
-          <p:cNvSpPr/>
-          <p:nvPr/>
-        </p:nvSpPr>
-        <p:spPr>
-          <a:xfrm>
-            <a:off x="6248400" y="1856232"/>
-            <a:ext cx="384048" cy="384048"/>
-          </a:xfrm>
-          <a:prstGeom prst="ellipse">
-            <a:avLst/>
-          </a:prstGeom>
-          <a:solidFill>
-            <a:srgbClr val="FFFFFF"/>
-          </a:solidFill>
-          <a:ln/>
-        </p:spPr>
-      </p:sp>
       <p:pic>
         <p:nvPicPr>
-          <p:cNvPr id="29" name="Image 2" descr="/Users/mihailkraynev/Documents/Dev/ingosstrah project/08_presentation/build_source/img/icons/message-circle_blue.png">    </p:cNvPr>
+          <p:cNvPr id="20" name="Image 2" descr="">    </p:cNvPr>
           <p:cNvPicPr>
             <a:picLocks noChangeAspect="1"/>
           </p:cNvPicPr>
@@ -19842,8 +17536,8 @@
         </p:blipFill>
         <p:spPr>
           <a:xfrm>
-            <a:off x="6332891" y="1940723"/>
-            <a:ext cx="215067" cy="215067"/>
+            <a:off x="713049" y="2505273"/>
+            <a:ext cx="238110" cy="238110"/>
           </a:xfrm>
           <a:prstGeom prst="rect">
             <a:avLst/>
@@ -19852,14 +17546,289 @@
       </p:pic>
       <p:sp>
         <p:nvSpPr>
+          <p:cNvPr id="21" name="Text 16"/>
+          <p:cNvSpPr txBox="1"/>
+          <p:nvPr/>
+        </p:nvSpPr>
+        <p:spPr>
+          <a:xfrm>
+            <a:off x="1133856" y="2432304"/>
+            <a:ext cx="2743200" cy="384048"/>
+          </a:xfrm>
+          <a:prstGeom prst="rect">
+            <a:avLst/>
+          </a:prstGeom>
+          <a:noFill/>
+          <a:ln/>
+        </p:spPr>
+        <p:txBody>
+          <a:bodyPr wrap="square" lIns="0" tIns="0" rIns="0" bIns="0" rtlCol="0" anchor="ctr"/>
+          <a:lstStyle/>
+          <a:p>
+            <a:pPr indent="0" marL="0">
+              <a:buNone/>
+            </a:pPr>
+            <a:r>
+              <a:rPr lang="en-US" sz="1250" b="1" dirty="0">
+                <a:solidFill>
+                  <a:srgbClr val="0A2A8A"/>
+                </a:solidFill>
+                <a:latin typeface="Arial" pitchFamily="34" charset="0"/>
+                <a:ea typeface="Arial" pitchFamily="34" charset="-122"/>
+                <a:cs typeface="Arial" pitchFamily="34" charset="-120"/>
+              </a:rPr>
+              <a:t>Повторяющиеся паттерны</a:t>
+            </a:r>
+            <a:endParaRPr lang="en-US" sz="1250" dirty="0"/>
+          </a:p>
+        </p:txBody>
+      </p:sp>
+      <p:sp>
+        <p:nvSpPr>
+          <p:cNvPr id="22" name="Shape 17"/>
+          <p:cNvSpPr/>
+          <p:nvPr/>
+        </p:nvSpPr>
+        <p:spPr>
+          <a:xfrm>
+            <a:off x="3703320" y="2505456"/>
+            <a:ext cx="1600200" cy="237744"/>
+          </a:xfrm>
+          <a:prstGeom prst="roundRect">
+            <a:avLst>
+              <a:gd name="adj" fmla="val 50000"/>
+            </a:avLst>
+          </a:prstGeom>
+          <a:solidFill>
+            <a:srgbClr val="B8F02A"/>
+          </a:solidFill>
+          <a:ln/>
+        </p:spPr>
+      </p:sp>
+      <p:sp>
+        <p:nvSpPr>
+          <p:cNvPr id="23" name="Text 18"/>
+          <p:cNvSpPr txBox="1"/>
+          <p:nvPr/>
+        </p:nvSpPr>
+        <p:spPr>
+          <a:xfrm>
+            <a:off x="3703320" y="2505456"/>
+            <a:ext cx="1600200" cy="237744"/>
+          </a:xfrm>
+          <a:prstGeom prst="rect">
+            <a:avLst/>
+          </a:prstGeom>
+          <a:noFill/>
+          <a:ln/>
+        </p:spPr>
+        <p:txBody>
+          <a:bodyPr wrap="square" lIns="0" tIns="0" rIns="0" bIns="0" rtlCol="0" anchor="ctr"/>
+          <a:lstStyle/>
+          <a:p>
+            <a:pPr algn="ctr" indent="0" marL="0">
+              <a:buNone/>
+            </a:pPr>
+            <a:r>
+              <a:rPr lang="en-US" sz="900" b="1" dirty="0">
+                <a:solidFill>
+                  <a:srgbClr val="151B33"/>
+                </a:solidFill>
+                <a:latin typeface="Arial" pitchFamily="34" charset="0"/>
+                <a:ea typeface="Arial" pitchFamily="34" charset="-122"/>
+                <a:cs typeface="Arial" pitchFamily="34" charset="-120"/>
+              </a:rPr>
+              <a:t>Заполняем 23-25.10</a:t>
+            </a:r>
+            <a:endParaRPr lang="en-US" sz="900" dirty="0"/>
+          </a:p>
+        </p:txBody>
+      </p:sp>
+      <p:sp>
+        <p:nvSpPr>
+          <p:cNvPr id="24" name="Shape 19"/>
+          <p:cNvSpPr/>
+          <p:nvPr/>
+        </p:nvSpPr>
+        <p:spPr>
+          <a:xfrm>
+            <a:off x="640080" y="2999232"/>
+            <a:ext cx="4663440" cy="0"/>
+          </a:xfrm>
+          <a:prstGeom prst="line">
+            <a:avLst/>
+          </a:prstGeom>
+          <a:noFill/>
+          <a:ln w="9525">
+            <a:solidFill>
+              <a:srgbClr val="D5DBF5"/>
+            </a:solidFill>
+            <a:prstDash val="solid"/>
+          </a:ln>
+        </p:spPr>
+      </p:sp>
+      <p:sp>
+        <p:nvSpPr>
+          <p:cNvPr id="25" name="Shape 20"/>
+          <p:cNvSpPr/>
+          <p:nvPr/>
+        </p:nvSpPr>
+        <p:spPr>
+          <a:xfrm>
+            <a:off x="640080" y="3099816"/>
+            <a:ext cx="292608" cy="292608"/>
+          </a:xfrm>
+          <a:prstGeom prst="ellipse">
+            <a:avLst/>
+          </a:prstGeom>
+          <a:solidFill>
+            <a:srgbClr val="1E3FD8"/>
+          </a:solidFill>
+          <a:ln/>
+        </p:spPr>
+      </p:sp>
+      <p:sp>
+        <p:nvSpPr>
+          <p:cNvPr id="26" name="Text 21"/>
+          <p:cNvSpPr txBox="1"/>
+          <p:nvPr/>
+        </p:nvSpPr>
+        <p:spPr>
+          <a:xfrm>
+            <a:off x="640080" y="3099816"/>
+            <a:ext cx="292608" cy="292608"/>
+          </a:xfrm>
+          <a:prstGeom prst="rect">
+            <a:avLst/>
+          </a:prstGeom>
+          <a:noFill/>
+          <a:ln/>
+        </p:spPr>
+        <p:txBody>
+          <a:bodyPr wrap="square" lIns="0" tIns="0" rIns="0" bIns="0" rtlCol="0" anchor="ctr"/>
+          <a:lstStyle/>
+          <a:p>
+            <a:pPr algn="ctr" indent="0" marL="0">
+              <a:buNone/>
+            </a:pPr>
+            <a:r>
+              <a:rPr lang="en-US" sz="1050" b="1" dirty="0">
+                <a:solidFill>
+                  <a:srgbClr val="FFFFFF"/>
+                </a:solidFill>
+                <a:latin typeface="Arial" pitchFamily="34" charset="0"/>
+                <a:ea typeface="Arial" pitchFamily="34" charset="-122"/>
+                <a:cs typeface="Arial" pitchFamily="34" charset="-120"/>
+              </a:rPr>
+              <a:t>1</a:t>
+            </a:r>
+            <a:endParaRPr lang="en-US" sz="1050" dirty="0"/>
+          </a:p>
+        </p:txBody>
+      </p:sp>
+      <p:sp>
+        <p:nvSpPr>
+          <p:cNvPr id="27" name="Shape 22"/>
+          <p:cNvSpPr/>
+          <p:nvPr/>
+        </p:nvSpPr>
+        <p:spPr>
+          <a:xfrm>
+            <a:off x="1097280" y="3108960"/>
+            <a:ext cx="2743200" cy="274320"/>
+          </a:xfrm>
+          <a:prstGeom prst="roundRect">
+            <a:avLst>
+              <a:gd name="adj" fmla="val 16667"/>
+            </a:avLst>
+          </a:prstGeom>
+          <a:solidFill>
+            <a:srgbClr val="FFFFFF"/>
+          </a:solidFill>
+          <a:ln w="12700">
+            <a:solidFill>
+              <a:srgbClr val="8FA3F0"/>
+            </a:solidFill>
+            <a:prstDash val="dash"/>
+          </a:ln>
+        </p:spPr>
+      </p:sp>
+      <p:sp>
+        <p:nvSpPr>
+          <p:cNvPr id="28" name="Text 23"/>
+          <p:cNvSpPr txBox="1"/>
+          <p:nvPr/>
+        </p:nvSpPr>
+        <p:spPr>
+          <a:xfrm>
+            <a:off x="1188720" y="3108960"/>
+            <a:ext cx="2560320" cy="274320"/>
+          </a:xfrm>
+          <a:prstGeom prst="rect">
+            <a:avLst/>
+          </a:prstGeom>
+          <a:noFill/>
+          <a:ln/>
+        </p:spPr>
+        <p:txBody>
+          <a:bodyPr wrap="square" lIns="0" tIns="0" rIns="0" bIns="0" rtlCol="0" anchor="ctr"/>
+          <a:lstStyle/>
+          <a:p>
+            <a:pPr indent="0" marL="0">
+              <a:buNone/>
+            </a:pPr>
+            <a:r>
+              <a:rPr lang="en-US" sz="900" i="1" dirty="0">
+                <a:solidFill>
+                  <a:srgbClr val="8FA3F0"/>
+                </a:solidFill>
+                <a:latin typeface="Arial" pitchFamily="34" charset="0"/>
+                <a:ea typeface="Arial" pitchFamily="34" charset="-122"/>
+                <a:cs typeface="Arial" pitchFamily="34" charset="-120"/>
+              </a:rPr>
+              <a:t>паттерн</a:t>
+            </a:r>
+            <a:endParaRPr lang="en-US" sz="900" dirty="0"/>
+          </a:p>
+        </p:txBody>
+      </p:sp>
+      <p:sp>
+        <p:nvSpPr>
+          <p:cNvPr id="29" name="Shape 24"/>
+          <p:cNvSpPr/>
+          <p:nvPr/>
+        </p:nvSpPr>
+        <p:spPr>
+          <a:xfrm>
+            <a:off x="3977640" y="3108960"/>
+            <a:ext cx="1325880" cy="274320"/>
+          </a:xfrm>
+          <a:prstGeom prst="roundRect">
+            <a:avLst>
+              <a:gd name="adj" fmla="val 16667"/>
+            </a:avLst>
+          </a:prstGeom>
+          <a:solidFill>
+            <a:srgbClr val="FFFFFF"/>
+          </a:solidFill>
+          <a:ln w="12700">
+            <a:solidFill>
+              <a:srgbClr val="8FA3F0"/>
+            </a:solidFill>
+            <a:prstDash val="dash"/>
+          </a:ln>
+        </p:spPr>
+      </p:sp>
+      <p:sp>
+        <p:nvSpPr>
           <p:cNvPr id="30" name="Text 25"/>
           <p:cNvSpPr txBox="1"/>
           <p:nvPr/>
         </p:nvSpPr>
         <p:spPr>
           <a:xfrm>
-            <a:off x="6751320" y="1856232"/>
-            <a:ext cx="1798320" cy="384048"/>
+            <a:off x="4069080" y="3108960"/>
+            <a:ext cx="1143000" cy="274320"/>
           </a:xfrm>
           <a:prstGeom prst="rect">
             <a:avLst/>
@@ -19875,75 +17844,42 @@
               <a:buNone/>
             </a:pPr>
             <a:r>
-              <a:rPr lang="en-US" sz="1250" b="1" dirty="0">
-                <a:solidFill>
-                  <a:srgbClr val="0A2A8A"/>
-                </a:solidFill>
-                <a:latin typeface="Arial" pitchFamily="34" charset="0"/>
-                <a:ea typeface="Arial" pitchFamily="34" charset="-122"/>
-                <a:cs typeface="Arial" pitchFamily="34" charset="-120"/>
-              </a:rPr>
-              <a:t>Цитаты</a:t>
-            </a:r>
-            <a:endParaRPr lang="en-US" sz="1250" dirty="0"/>
-          </a:p>
-        </p:txBody>
-      </p:sp>
-      <p:sp>
-        <p:nvSpPr>
-          <p:cNvPr id="31" name="Text 26"/>
-          <p:cNvSpPr txBox="1"/>
-          <p:nvPr/>
-        </p:nvSpPr>
-        <p:spPr>
-          <a:xfrm>
-            <a:off x="6248400" y="2377440"/>
-            <a:ext cx="2255520" cy="548640"/>
-          </a:xfrm>
-          <a:prstGeom prst="rect">
-            <a:avLst/>
-          </a:prstGeom>
-          <a:noFill/>
-          <a:ln/>
-        </p:spPr>
-        <p:txBody>
-          <a:bodyPr wrap="square" lIns="0" tIns="0" rIns="0" bIns="0" rtlCol="0" anchor="t"/>
-          <a:lstStyle/>
-          <a:p>
-            <a:pPr indent="0" marL="0">
-              <a:buNone/>
-            </a:pPr>
-            <a:r>
-              <a:rPr lang="en-US" sz="1100" i="1" dirty="0">
-                <a:solidFill>
-                  <a:srgbClr val="5A6280"/>
-                </a:solidFill>
-                <a:latin typeface="Arial" pitchFamily="34" charset="0"/>
-                <a:ea typeface="Arial" pitchFamily="34" charset="-122"/>
-                <a:cs typeface="Arial" pitchFamily="34" charset="-120"/>
-              </a:rPr>
-              <a:t>«___»</a:t>
-            </a:r>
-            <a:endParaRPr lang="en-US" sz="1100" dirty="0"/>
-          </a:p>
-          <a:p>
-            <a:pPr indent="0" marL="0">
-              <a:buNone/>
-            </a:pPr>
-            <a:r>
-              <a:rPr lang="en-US" sz="1100" i="1" dirty="0">
-                <a:solidFill>
-                  <a:srgbClr val="5A6280"/>
-                </a:solidFill>
-                <a:latin typeface="Arial" pitchFamily="34" charset="0"/>
-                <a:ea typeface="Arial" pitchFamily="34" charset="-122"/>
-                <a:cs typeface="Arial" pitchFamily="34" charset="-120"/>
-              </a:rPr>
-              <a:t>«___»</a:t>
-            </a:r>
-            <a:endParaRPr lang="en-US" sz="1100" dirty="0"/>
-          </a:p>
-        </p:txBody>
+              <a:rPr lang="en-US" sz="900" i="1" dirty="0">
+                <a:solidFill>
+                  <a:srgbClr val="8FA3F0"/>
+                </a:solidFill>
+                <a:latin typeface="Arial" pitchFamily="34" charset="0"/>
+                <a:ea typeface="Arial" pitchFamily="34" charset="-122"/>
+                <a:cs typeface="Arial" pitchFamily="34" charset="-120"/>
+              </a:rPr>
+              <a:t>у скольких из N</a:t>
+            </a:r>
+            <a:endParaRPr lang="en-US" sz="900" dirty="0"/>
+          </a:p>
+        </p:txBody>
+      </p:sp>
+      <p:sp>
+        <p:nvSpPr>
+          <p:cNvPr id="31" name="Shape 26"/>
+          <p:cNvSpPr/>
+          <p:nvPr/>
+        </p:nvSpPr>
+        <p:spPr>
+          <a:xfrm>
+            <a:off x="640080" y="3502152"/>
+            <a:ext cx="4663440" cy="0"/>
+          </a:xfrm>
+          <a:prstGeom prst="line">
+            <a:avLst/>
+          </a:prstGeom>
+          <a:noFill/>
+          <a:ln w="9525">
+            <a:solidFill>
+              <a:srgbClr val="D5DBF5"/>
+            </a:solidFill>
+            <a:prstDash val="solid"/>
+          </a:ln>
+        </p:spPr>
       </p:sp>
       <p:sp>
         <p:nvSpPr>
@@ -19953,12 +17889,417 @@
         </p:nvSpPr>
         <p:spPr>
           <a:xfrm>
-            <a:off x="6065520" y="3223260"/>
-            <a:ext cx="2621280" cy="1348740"/>
+            <a:off x="640080" y="3602736"/>
+            <a:ext cx="292608" cy="292608"/>
+          </a:xfrm>
+          <a:prstGeom prst="ellipse">
+            <a:avLst/>
+          </a:prstGeom>
+          <a:solidFill>
+            <a:srgbClr val="1E3FD8"/>
+          </a:solidFill>
+          <a:ln/>
+        </p:spPr>
+      </p:sp>
+      <p:sp>
+        <p:nvSpPr>
+          <p:cNvPr id="33" name="Text 28"/>
+          <p:cNvSpPr txBox="1"/>
+          <p:nvPr/>
+        </p:nvSpPr>
+        <p:spPr>
+          <a:xfrm>
+            <a:off x="640080" y="3602736"/>
+            <a:ext cx="292608" cy="292608"/>
+          </a:xfrm>
+          <a:prstGeom prst="rect">
+            <a:avLst/>
+          </a:prstGeom>
+          <a:noFill/>
+          <a:ln/>
+        </p:spPr>
+        <p:txBody>
+          <a:bodyPr wrap="square" lIns="0" tIns="0" rIns="0" bIns="0" rtlCol="0" anchor="ctr"/>
+          <a:lstStyle/>
+          <a:p>
+            <a:pPr algn="ctr" indent="0" marL="0">
+              <a:buNone/>
+            </a:pPr>
+            <a:r>
+              <a:rPr lang="en-US" sz="1050" b="1" dirty="0">
+                <a:solidFill>
+                  <a:srgbClr val="FFFFFF"/>
+                </a:solidFill>
+                <a:latin typeface="Arial" pitchFamily="34" charset="0"/>
+                <a:ea typeface="Arial" pitchFamily="34" charset="-122"/>
+                <a:cs typeface="Arial" pitchFamily="34" charset="-120"/>
+              </a:rPr>
+              <a:t>2</a:t>
+            </a:r>
+            <a:endParaRPr lang="en-US" sz="1050" dirty="0"/>
+          </a:p>
+        </p:txBody>
+      </p:sp>
+      <p:sp>
+        <p:nvSpPr>
+          <p:cNvPr id="34" name="Shape 29"/>
+          <p:cNvSpPr/>
+          <p:nvPr/>
+        </p:nvSpPr>
+        <p:spPr>
+          <a:xfrm>
+            <a:off x="1097280" y="3611880"/>
+            <a:ext cx="2743200" cy="274320"/>
           </a:xfrm>
           <a:prstGeom prst="roundRect">
             <a:avLst>
-              <a:gd name="adj" fmla="val 5424"/>
+              <a:gd name="adj" fmla="val 16667"/>
+            </a:avLst>
+          </a:prstGeom>
+          <a:solidFill>
+            <a:srgbClr val="FFFFFF"/>
+          </a:solidFill>
+          <a:ln w="12700">
+            <a:solidFill>
+              <a:srgbClr val="8FA3F0"/>
+            </a:solidFill>
+            <a:prstDash val="dash"/>
+          </a:ln>
+        </p:spPr>
+      </p:sp>
+      <p:sp>
+        <p:nvSpPr>
+          <p:cNvPr id="35" name="Text 30"/>
+          <p:cNvSpPr txBox="1"/>
+          <p:nvPr/>
+        </p:nvSpPr>
+        <p:spPr>
+          <a:xfrm>
+            <a:off x="1188720" y="3611880"/>
+            <a:ext cx="2560320" cy="274320"/>
+          </a:xfrm>
+          <a:prstGeom prst="rect">
+            <a:avLst/>
+          </a:prstGeom>
+          <a:noFill/>
+          <a:ln/>
+        </p:spPr>
+        <p:txBody>
+          <a:bodyPr wrap="square" lIns="0" tIns="0" rIns="0" bIns="0" rtlCol="0" anchor="ctr"/>
+          <a:lstStyle/>
+          <a:p>
+            <a:pPr indent="0" marL="0">
+              <a:buNone/>
+            </a:pPr>
+            <a:r>
+              <a:rPr lang="en-US" sz="900" i="1" dirty="0">
+                <a:solidFill>
+                  <a:srgbClr val="8FA3F0"/>
+                </a:solidFill>
+                <a:latin typeface="Arial" pitchFamily="34" charset="0"/>
+                <a:ea typeface="Arial" pitchFamily="34" charset="-122"/>
+                <a:cs typeface="Arial" pitchFamily="34" charset="-120"/>
+              </a:rPr>
+              <a:t>паттерн</a:t>
+            </a:r>
+            <a:endParaRPr lang="en-US" sz="900" dirty="0"/>
+          </a:p>
+        </p:txBody>
+      </p:sp>
+      <p:sp>
+        <p:nvSpPr>
+          <p:cNvPr id="36" name="Shape 31"/>
+          <p:cNvSpPr/>
+          <p:nvPr/>
+        </p:nvSpPr>
+        <p:spPr>
+          <a:xfrm>
+            <a:off x="3977640" y="3611880"/>
+            <a:ext cx="1325880" cy="274320"/>
+          </a:xfrm>
+          <a:prstGeom prst="roundRect">
+            <a:avLst>
+              <a:gd name="adj" fmla="val 16667"/>
+            </a:avLst>
+          </a:prstGeom>
+          <a:solidFill>
+            <a:srgbClr val="FFFFFF"/>
+          </a:solidFill>
+          <a:ln w="12700">
+            <a:solidFill>
+              <a:srgbClr val="8FA3F0"/>
+            </a:solidFill>
+            <a:prstDash val="dash"/>
+          </a:ln>
+        </p:spPr>
+      </p:sp>
+      <p:sp>
+        <p:nvSpPr>
+          <p:cNvPr id="37" name="Text 32"/>
+          <p:cNvSpPr txBox="1"/>
+          <p:nvPr/>
+        </p:nvSpPr>
+        <p:spPr>
+          <a:xfrm>
+            <a:off x="4069080" y="3611880"/>
+            <a:ext cx="1143000" cy="274320"/>
+          </a:xfrm>
+          <a:prstGeom prst="rect">
+            <a:avLst/>
+          </a:prstGeom>
+          <a:noFill/>
+          <a:ln/>
+        </p:spPr>
+        <p:txBody>
+          <a:bodyPr wrap="square" lIns="0" tIns="0" rIns="0" bIns="0" rtlCol="0" anchor="ctr"/>
+          <a:lstStyle/>
+          <a:p>
+            <a:pPr indent="0" marL="0">
+              <a:buNone/>
+            </a:pPr>
+            <a:r>
+              <a:rPr lang="en-US" sz="900" i="1" dirty="0">
+                <a:solidFill>
+                  <a:srgbClr val="8FA3F0"/>
+                </a:solidFill>
+                <a:latin typeface="Arial" pitchFamily="34" charset="0"/>
+                <a:ea typeface="Arial" pitchFamily="34" charset="-122"/>
+                <a:cs typeface="Arial" pitchFamily="34" charset="-120"/>
+              </a:rPr>
+              <a:t>у скольких из N</a:t>
+            </a:r>
+            <a:endParaRPr lang="en-US" sz="900" dirty="0"/>
+          </a:p>
+        </p:txBody>
+      </p:sp>
+      <p:sp>
+        <p:nvSpPr>
+          <p:cNvPr id="38" name="Shape 33"/>
+          <p:cNvSpPr/>
+          <p:nvPr/>
+        </p:nvSpPr>
+        <p:spPr>
+          <a:xfrm>
+            <a:off x="640080" y="4005072"/>
+            <a:ext cx="4663440" cy="0"/>
+          </a:xfrm>
+          <a:prstGeom prst="line">
+            <a:avLst/>
+          </a:prstGeom>
+          <a:noFill/>
+          <a:ln w="9525">
+            <a:solidFill>
+              <a:srgbClr val="D5DBF5"/>
+            </a:solidFill>
+            <a:prstDash val="solid"/>
+          </a:ln>
+        </p:spPr>
+      </p:sp>
+      <p:sp>
+        <p:nvSpPr>
+          <p:cNvPr id="39" name="Shape 34"/>
+          <p:cNvSpPr/>
+          <p:nvPr/>
+        </p:nvSpPr>
+        <p:spPr>
+          <a:xfrm>
+            <a:off x="640080" y="4105656"/>
+            <a:ext cx="292608" cy="292608"/>
+          </a:xfrm>
+          <a:prstGeom prst="ellipse">
+            <a:avLst/>
+          </a:prstGeom>
+          <a:solidFill>
+            <a:srgbClr val="1E3FD8"/>
+          </a:solidFill>
+          <a:ln/>
+        </p:spPr>
+      </p:sp>
+      <p:sp>
+        <p:nvSpPr>
+          <p:cNvPr id="40" name="Text 35"/>
+          <p:cNvSpPr txBox="1"/>
+          <p:nvPr/>
+        </p:nvSpPr>
+        <p:spPr>
+          <a:xfrm>
+            <a:off x="640080" y="4105656"/>
+            <a:ext cx="292608" cy="292608"/>
+          </a:xfrm>
+          <a:prstGeom prst="rect">
+            <a:avLst/>
+          </a:prstGeom>
+          <a:noFill/>
+          <a:ln/>
+        </p:spPr>
+        <p:txBody>
+          <a:bodyPr wrap="square" lIns="0" tIns="0" rIns="0" bIns="0" rtlCol="0" anchor="ctr"/>
+          <a:lstStyle/>
+          <a:p>
+            <a:pPr algn="ctr" indent="0" marL="0">
+              <a:buNone/>
+            </a:pPr>
+            <a:r>
+              <a:rPr lang="en-US" sz="1050" b="1" dirty="0">
+                <a:solidFill>
+                  <a:srgbClr val="FFFFFF"/>
+                </a:solidFill>
+                <a:latin typeface="Arial" pitchFamily="34" charset="0"/>
+                <a:ea typeface="Arial" pitchFamily="34" charset="-122"/>
+                <a:cs typeface="Arial" pitchFamily="34" charset="-120"/>
+              </a:rPr>
+              <a:t>3</a:t>
+            </a:r>
+            <a:endParaRPr lang="en-US" sz="1050" dirty="0"/>
+          </a:p>
+        </p:txBody>
+      </p:sp>
+      <p:sp>
+        <p:nvSpPr>
+          <p:cNvPr id="41" name="Shape 36"/>
+          <p:cNvSpPr/>
+          <p:nvPr/>
+        </p:nvSpPr>
+        <p:spPr>
+          <a:xfrm>
+            <a:off x="1097280" y="4114800"/>
+            <a:ext cx="2743200" cy="274320"/>
+          </a:xfrm>
+          <a:prstGeom prst="roundRect">
+            <a:avLst>
+              <a:gd name="adj" fmla="val 16667"/>
+            </a:avLst>
+          </a:prstGeom>
+          <a:solidFill>
+            <a:srgbClr val="FFFFFF"/>
+          </a:solidFill>
+          <a:ln w="12700">
+            <a:solidFill>
+              <a:srgbClr val="8FA3F0"/>
+            </a:solidFill>
+            <a:prstDash val="dash"/>
+          </a:ln>
+        </p:spPr>
+      </p:sp>
+      <p:sp>
+        <p:nvSpPr>
+          <p:cNvPr id="42" name="Text 37"/>
+          <p:cNvSpPr txBox="1"/>
+          <p:nvPr/>
+        </p:nvSpPr>
+        <p:spPr>
+          <a:xfrm>
+            <a:off x="1188720" y="4114800"/>
+            <a:ext cx="2560320" cy="274320"/>
+          </a:xfrm>
+          <a:prstGeom prst="rect">
+            <a:avLst/>
+          </a:prstGeom>
+          <a:noFill/>
+          <a:ln/>
+        </p:spPr>
+        <p:txBody>
+          <a:bodyPr wrap="square" lIns="0" tIns="0" rIns="0" bIns="0" rtlCol="0" anchor="ctr"/>
+          <a:lstStyle/>
+          <a:p>
+            <a:pPr indent="0" marL="0">
+              <a:buNone/>
+            </a:pPr>
+            <a:r>
+              <a:rPr lang="en-US" sz="900" i="1" dirty="0">
+                <a:solidFill>
+                  <a:srgbClr val="8FA3F0"/>
+                </a:solidFill>
+                <a:latin typeface="Arial" pitchFamily="34" charset="0"/>
+                <a:ea typeface="Arial" pitchFamily="34" charset="-122"/>
+                <a:cs typeface="Arial" pitchFamily="34" charset="-120"/>
+              </a:rPr>
+              <a:t>паттерн</a:t>
+            </a:r>
+            <a:endParaRPr lang="en-US" sz="900" dirty="0"/>
+          </a:p>
+        </p:txBody>
+      </p:sp>
+      <p:sp>
+        <p:nvSpPr>
+          <p:cNvPr id="43" name="Shape 38"/>
+          <p:cNvSpPr/>
+          <p:nvPr/>
+        </p:nvSpPr>
+        <p:spPr>
+          <a:xfrm>
+            <a:off x="3977640" y="4114800"/>
+            <a:ext cx="1325880" cy="274320"/>
+          </a:xfrm>
+          <a:prstGeom prst="roundRect">
+            <a:avLst>
+              <a:gd name="adj" fmla="val 16667"/>
+            </a:avLst>
+          </a:prstGeom>
+          <a:solidFill>
+            <a:srgbClr val="FFFFFF"/>
+          </a:solidFill>
+          <a:ln w="12700">
+            <a:solidFill>
+              <a:srgbClr val="8FA3F0"/>
+            </a:solidFill>
+            <a:prstDash val="dash"/>
+          </a:ln>
+        </p:spPr>
+      </p:sp>
+      <p:sp>
+        <p:nvSpPr>
+          <p:cNvPr id="44" name="Text 39"/>
+          <p:cNvSpPr txBox="1"/>
+          <p:nvPr/>
+        </p:nvSpPr>
+        <p:spPr>
+          <a:xfrm>
+            <a:off x="4069080" y="4114800"/>
+            <a:ext cx="1143000" cy="274320"/>
+          </a:xfrm>
+          <a:prstGeom prst="rect">
+            <a:avLst/>
+          </a:prstGeom>
+          <a:noFill/>
+          <a:ln/>
+        </p:spPr>
+        <p:txBody>
+          <a:bodyPr wrap="square" lIns="0" tIns="0" rIns="0" bIns="0" rtlCol="0" anchor="ctr"/>
+          <a:lstStyle/>
+          <a:p>
+            <a:pPr indent="0" marL="0">
+              <a:buNone/>
+            </a:pPr>
+            <a:r>
+              <a:rPr lang="en-US" sz="900" i="1" dirty="0">
+                <a:solidFill>
+                  <a:srgbClr val="8FA3F0"/>
+                </a:solidFill>
+                <a:latin typeface="Arial" pitchFamily="34" charset="0"/>
+                <a:ea typeface="Arial" pitchFamily="34" charset="-122"/>
+                <a:cs typeface="Arial" pitchFamily="34" charset="-120"/>
+              </a:rPr>
+              <a:t>у скольких из N</a:t>
+            </a:r>
+            <a:endParaRPr lang="en-US" sz="900" dirty="0"/>
+          </a:p>
+        </p:txBody>
+      </p:sp>
+      <p:sp>
+        <p:nvSpPr>
+          <p:cNvPr id="45" name="Shape 40"/>
+          <p:cNvSpPr/>
+          <p:nvPr/>
+        </p:nvSpPr>
+        <p:spPr>
+          <a:xfrm>
+            <a:off x="5669280" y="2286000"/>
+            <a:ext cx="3017520" cy="1051560"/>
+          </a:xfrm>
+          <a:prstGeom prst="roundRect">
+            <a:avLst>
+              <a:gd name="adj" fmla="val 6957"/>
             </a:avLst>
           </a:prstGeom>
           <a:solidFill>
@@ -19969,17 +18310,19 @@
       </p:sp>
       <p:sp>
         <p:nvSpPr>
-          <p:cNvPr id="33" name="Shape 28"/>
+          <p:cNvPr id="46" name="Shape 41"/>
           <p:cNvSpPr/>
           <p:nvPr/>
         </p:nvSpPr>
         <p:spPr>
           <a:xfrm>
-            <a:off x="6248400" y="3387852"/>
+            <a:off x="5833872" y="2432304"/>
             <a:ext cx="384048" cy="384048"/>
           </a:xfrm>
-          <a:prstGeom prst="ellipse">
-            <a:avLst/>
+          <a:prstGeom prst="roundRect">
+            <a:avLst>
+              <a:gd name="adj" fmla="val 28000"/>
+            </a:avLst>
           </a:prstGeom>
           <a:solidFill>
             <a:srgbClr val="FFFFFF"/>
@@ -19989,7 +18332,7 @@
       </p:sp>
       <p:pic>
         <p:nvPicPr>
-          <p:cNvPr id="34" name="Image 3" descr="/Users/mihailkraynev/Documents/Dev/ingosstrah project/08_presentation/build_source/img/icons/circle-alert_blue.png">    </p:cNvPr>
+          <p:cNvPr id="47" name="Image 3" descr="">    </p:cNvPr>
           <p:cNvPicPr>
             <a:picLocks noChangeAspect="1"/>
           </p:cNvPicPr>
@@ -20003,8 +18346,8 @@
         </p:blipFill>
         <p:spPr>
           <a:xfrm>
-            <a:off x="6332891" y="3472343"/>
-            <a:ext cx="215067" cy="215067"/>
+            <a:off x="5906841" y="2505273"/>
+            <a:ext cx="238110" cy="238110"/>
           </a:xfrm>
           <a:prstGeom prst="rect">
             <a:avLst/>
@@ -20013,14 +18356,14 @@
       </p:pic>
       <p:sp>
         <p:nvSpPr>
-          <p:cNvPr id="35" name="Text 29"/>
-          <p:cNvSpPr txBox="1"/>
-          <p:nvPr/>
-        </p:nvSpPr>
-        <p:spPr>
-          <a:xfrm>
-            <a:off x="6751320" y="3387852"/>
-            <a:ext cx="1798320" cy="384048"/>
+          <p:cNvPr id="48" name="Text 42"/>
+          <p:cNvSpPr txBox="1"/>
+          <p:nvPr/>
+        </p:nvSpPr>
+        <p:spPr>
+          <a:xfrm>
+            <a:off x="6327648" y="2432304"/>
+            <a:ext cx="2194560" cy="384048"/>
           </a:xfrm>
           <a:prstGeom prst="rect">
             <a:avLst/>
@@ -20038,6 +18381,179 @@
             <a:r>
               <a:rPr lang="en-US" sz="1250" b="1" dirty="0">
                 <a:solidFill>
+                  <a:srgbClr val="0A2A8A"/>
+                </a:solidFill>
+                <a:latin typeface="Arial" pitchFamily="34" charset="0"/>
+                <a:ea typeface="Arial" pitchFamily="34" charset="-122"/>
+                <a:cs typeface="Arial" pitchFamily="34" charset="-120"/>
+              </a:rPr>
+              <a:t>Цитаты</a:t>
+            </a:r>
+            <a:endParaRPr lang="en-US" sz="1250" dirty="0"/>
+          </a:p>
+        </p:txBody>
+      </p:sp>
+      <p:sp>
+        <p:nvSpPr>
+          <p:cNvPr id="49" name="Shape 43"/>
+          <p:cNvSpPr/>
+          <p:nvPr/>
+        </p:nvSpPr>
+        <p:spPr>
+          <a:xfrm>
+            <a:off x="5833872" y="2926080"/>
+            <a:ext cx="2688336" cy="274320"/>
+          </a:xfrm>
+          <a:prstGeom prst="roundRect">
+            <a:avLst>
+              <a:gd name="adj" fmla="val 16667"/>
+            </a:avLst>
+          </a:prstGeom>
+          <a:solidFill>
+            <a:srgbClr val="FFFFFF"/>
+          </a:solidFill>
+          <a:ln w="12700">
+            <a:solidFill>
+              <a:srgbClr val="8FA3F0"/>
+            </a:solidFill>
+            <a:prstDash val="dash"/>
+          </a:ln>
+        </p:spPr>
+      </p:sp>
+      <p:sp>
+        <p:nvSpPr>
+          <p:cNvPr id="50" name="Text 44"/>
+          <p:cNvSpPr txBox="1"/>
+          <p:nvPr/>
+        </p:nvSpPr>
+        <p:spPr>
+          <a:xfrm>
+            <a:off x="5925312" y="2926080"/>
+            <a:ext cx="2505456" cy="274320"/>
+          </a:xfrm>
+          <a:prstGeom prst="rect">
+            <a:avLst/>
+          </a:prstGeom>
+          <a:noFill/>
+          <a:ln/>
+        </p:spPr>
+        <p:txBody>
+          <a:bodyPr wrap="square" lIns="0" tIns="0" rIns="0" bIns="0" rtlCol="0" anchor="ctr"/>
+          <a:lstStyle/>
+          <a:p>
+            <a:pPr indent="0" marL="0">
+              <a:buNone/>
+            </a:pPr>
+            <a:r>
+              <a:rPr lang="en-US" sz="900" i="1" dirty="0">
+                <a:solidFill>
+                  <a:srgbClr val="8FA3F0"/>
+                </a:solidFill>
+                <a:latin typeface="Arial" pitchFamily="34" charset="0"/>
+                <a:ea typeface="Arial" pitchFamily="34" charset="-122"/>
+                <a:cs typeface="Arial" pitchFamily="34" charset="-120"/>
+              </a:rPr>
+              <a:t>цитата респондента</a:t>
+            </a:r>
+            <a:endParaRPr lang="en-US" sz="900" dirty="0"/>
+          </a:p>
+        </p:txBody>
+      </p:sp>
+      <p:sp>
+        <p:nvSpPr>
+          <p:cNvPr id="51" name="Shape 45"/>
+          <p:cNvSpPr/>
+          <p:nvPr/>
+        </p:nvSpPr>
+        <p:spPr>
+          <a:xfrm>
+            <a:off x="5669280" y="3520440"/>
+            <a:ext cx="3017520" cy="1051560"/>
+          </a:xfrm>
+          <a:prstGeom prst="roundRect">
+            <a:avLst>
+              <a:gd name="adj" fmla="val 6957"/>
+            </a:avLst>
+          </a:prstGeom>
+          <a:solidFill>
+            <a:srgbClr val="EEF1FD"/>
+          </a:solidFill>
+          <a:ln/>
+        </p:spPr>
+      </p:sp>
+      <p:sp>
+        <p:nvSpPr>
+          <p:cNvPr id="52" name="Shape 46"/>
+          <p:cNvSpPr/>
+          <p:nvPr/>
+        </p:nvSpPr>
+        <p:spPr>
+          <a:xfrm>
+            <a:off x="5833872" y="3666744"/>
+            <a:ext cx="384048" cy="384048"/>
+          </a:xfrm>
+          <a:prstGeom prst="roundRect">
+            <a:avLst>
+              <a:gd name="adj" fmla="val 28000"/>
+            </a:avLst>
+          </a:prstGeom>
+          <a:solidFill>
+            <a:srgbClr val="FFFFFF"/>
+          </a:solidFill>
+          <a:ln/>
+        </p:spPr>
+      </p:sp>
+      <p:pic>
+        <p:nvPicPr>
+          <p:cNvPr id="53" name="Image 4" descr="">    </p:cNvPr>
+          <p:cNvPicPr>
+            <a:picLocks noChangeAspect="1"/>
+          </p:cNvPicPr>
+          <p:nvPr/>
+        </p:nvPicPr>
+        <p:blipFill>
+          <a:blip r:embed="rId5"/>
+          <a:stretch>
+            <a:fillRect/>
+          </a:stretch>
+        </p:blipFill>
+        <p:spPr>
+          <a:xfrm>
+            <a:off x="5906841" y="3739713"/>
+            <a:ext cx="238110" cy="238110"/>
+          </a:xfrm>
+          <a:prstGeom prst="rect">
+            <a:avLst/>
+          </a:prstGeom>
+        </p:spPr>
+      </p:pic>
+      <p:sp>
+        <p:nvSpPr>
+          <p:cNvPr id="54" name="Text 47"/>
+          <p:cNvSpPr txBox="1"/>
+          <p:nvPr/>
+        </p:nvSpPr>
+        <p:spPr>
+          <a:xfrm>
+            <a:off x="6327648" y="3666744"/>
+            <a:ext cx="2194560" cy="384048"/>
+          </a:xfrm>
+          <a:prstGeom prst="rect">
+            <a:avLst/>
+          </a:prstGeom>
+          <a:noFill/>
+          <a:ln/>
+        </p:spPr>
+        <p:txBody>
+          <a:bodyPr wrap="square" lIns="0" tIns="0" rIns="0" bIns="0" rtlCol="0" anchor="ctr"/>
+          <a:lstStyle/>
+          <a:p>
+            <a:pPr indent="0" marL="0">
+              <a:buNone/>
+            </a:pPr>
+            <a:r>
+              <a:rPr lang="en-US" sz="1250" b="1" dirty="0">
+                <a:solidFill>
                   <a:srgbClr val="C0392B"/>
                 </a:solidFill>
                 <a:latin typeface="Arial" pitchFamily="34" charset="0"/>
@@ -20052,96 +18568,67 @@
       </p:sp>
       <p:sp>
         <p:nvSpPr>
-          <p:cNvPr id="36" name="Text 30"/>
-          <p:cNvSpPr txBox="1"/>
-          <p:nvPr/>
-        </p:nvSpPr>
-        <p:spPr>
-          <a:xfrm>
-            <a:off x="6248400" y="3909060"/>
-            <a:ext cx="2255520" cy="548640"/>
-          </a:xfrm>
-          <a:prstGeom prst="rect">
-            <a:avLst/>
-          </a:prstGeom>
-          <a:noFill/>
-          <a:ln/>
-        </p:spPr>
-        <p:txBody>
-          <a:bodyPr wrap="square" lIns="0" tIns="0" rIns="0" bIns="0" rtlCol="0" anchor="t"/>
+          <p:cNvPr id="55" name="Shape 48"/>
+          <p:cNvSpPr/>
+          <p:nvPr/>
+        </p:nvSpPr>
+        <p:spPr>
+          <a:xfrm>
+            <a:off x="5833872" y="4160520"/>
+            <a:ext cx="2688336" cy="274320"/>
+          </a:xfrm>
+          <a:prstGeom prst="roundRect">
+            <a:avLst>
+              <a:gd name="adj" fmla="val 16667"/>
+            </a:avLst>
+          </a:prstGeom>
+          <a:solidFill>
+            <a:srgbClr val="FFFFFF"/>
+          </a:solidFill>
+          <a:ln w="12700">
+            <a:solidFill>
+              <a:srgbClr val="8FA3F0"/>
+            </a:solidFill>
+            <a:prstDash val="dash"/>
+          </a:ln>
+        </p:spPr>
+      </p:sp>
+      <p:sp>
+        <p:nvSpPr>
+          <p:cNvPr id="56" name="Text 49"/>
+          <p:cNvSpPr txBox="1"/>
+          <p:nvPr/>
+        </p:nvSpPr>
+        <p:spPr>
+          <a:xfrm>
+            <a:off x="5925312" y="4160520"/>
+            <a:ext cx="2505456" cy="274320"/>
+          </a:xfrm>
+          <a:prstGeom prst="rect">
+            <a:avLst/>
+          </a:prstGeom>
+          <a:noFill/>
+          <a:ln/>
+        </p:spPr>
+        <p:txBody>
+          <a:bodyPr wrap="square" lIns="0" tIns="0" rIns="0" bIns="0" rtlCol="0" anchor="ctr"/>
           <a:lstStyle/>
           <a:p>
             <a:pPr indent="0" marL="0">
               <a:buNone/>
             </a:pPr>
             <a:r>
-              <a:rPr lang="en-US" sz="1050" dirty="0">
-                <a:solidFill>
-                  <a:srgbClr val="5A6280"/>
-                </a:solidFill>
-                <a:latin typeface="Arial" pitchFamily="34" charset="0"/>
-                <a:ea typeface="Arial" pitchFamily="34" charset="-122"/>
-                <a:cs typeface="Arial" pitchFamily="34" charset="-120"/>
-              </a:rPr>
-              <a:t>___</a:t>
-            </a:r>
-            <a:endParaRPr lang="en-US" sz="1050" dirty="0"/>
-          </a:p>
-          <a:p>
-            <a:pPr indent="0" marL="0">
-              <a:buNone/>
-            </a:pPr>
-            <a:r>
-              <a:rPr lang="en-US" sz="1050" dirty="0">
-                <a:solidFill>
-                  <a:srgbClr val="5A6280"/>
-                </a:solidFill>
-                <a:latin typeface="Arial" pitchFamily="34" charset="0"/>
-                <a:ea typeface="Arial" pitchFamily="34" charset="-122"/>
-                <a:cs typeface="Arial" pitchFamily="34" charset="-120"/>
-              </a:rPr>
-              <a:t>Что меняем: ___</a:t>
-            </a:r>
-            <a:endParaRPr lang="en-US" sz="1050" dirty="0"/>
-          </a:p>
-        </p:txBody>
-      </p:sp>
-      <p:sp>
-        <p:nvSpPr>
-          <p:cNvPr id="37" name="Text 31"/>
-          <p:cNvSpPr txBox="1"/>
-          <p:nvPr/>
-        </p:nvSpPr>
-        <p:spPr>
-          <a:xfrm>
-            <a:off x="457200" y="4736592"/>
-            <a:ext cx="7772400" cy="274320"/>
-          </a:xfrm>
-          <a:prstGeom prst="rect">
-            <a:avLst/>
-          </a:prstGeom>
-          <a:noFill/>
-          <a:ln/>
-        </p:spPr>
-        <p:txBody>
-          <a:bodyPr wrap="square" lIns="0" tIns="0" rIns="0" bIns="0" rtlCol="0" anchor="b"/>
-          <a:lstStyle/>
-          <a:p>
-            <a:pPr indent="0" marL="0">
-              <a:buNone/>
-            </a:pPr>
-            <a:r>
-              <a:rPr lang="en-US" sz="750" dirty="0">
-                <a:solidFill>
-                  <a:srgbClr val="5A6280"/>
-                </a:solidFill>
-                <a:latin typeface="Arial" pitchFamily="34" charset="0"/>
-                <a:ea typeface="Arial" pitchFamily="34" charset="-122"/>
-                <a:cs typeface="Arial" pitchFamily="34" charset="-120"/>
-              </a:rPr>
-              <a:t>Источники: собственное полевое исследование 23-25.10.2026: интервью и онлайн-анкета; результаты также заменят допущения 60% и 70% в оценке рынка</a:t>
-            </a:r>
-            <a:endParaRPr lang="en-US" sz="750" dirty="0"/>
+              <a:rPr lang="en-US" sz="900" i="1" dirty="0">
+                <a:solidFill>
+                  <a:srgbClr val="8FA3F0"/>
+                </a:solidFill>
+                <a:latin typeface="Arial" pitchFamily="34" charset="0"/>
+                <a:ea typeface="Arial" pitchFamily="34" charset="-122"/>
+                <a:cs typeface="Arial" pitchFamily="34" charset="-120"/>
+              </a:rPr>
+              <a:t>что не подтвердилось и что меняем</a:t>
+            </a:r>
+            <a:endParaRPr lang="en-US" sz="900" dirty="0"/>
           </a:p>
         </p:txBody>
       </p:sp>
@@ -20394,8 +18881,10 @@
             <a:off x="741970" y="1627632"/>
             <a:ext cx="512064" cy="512064"/>
           </a:xfrm>
-          <a:prstGeom prst="ellipse">
-            <a:avLst/>
+          <a:prstGeom prst="roundRect">
+            <a:avLst>
+              <a:gd name="adj" fmla="val 28000"/>
+            </a:avLst>
           </a:prstGeom>
           <a:solidFill>
             <a:srgbClr val="FFFFFF"/>
@@ -20405,7 +18894,7 @@
       </p:sp>
       <p:pic>
         <p:nvPicPr>
-          <p:cNvPr id="8" name="Image 0" descr="/Users/mihailkraynev/Documents/Dev/ingosstrah project/08_presentation/build_source/img/icons/user_blue.png">    </p:cNvPr>
+          <p:cNvPr id="8" name="Image 0" descr="">    </p:cNvPr>
           <p:cNvPicPr>
             <a:picLocks noChangeAspect="1"/>
           </p:cNvPicPr>
@@ -20419,8 +18908,8 @@
         </p:blipFill>
         <p:spPr>
           <a:xfrm>
-            <a:off x="854624" y="1740286"/>
-            <a:ext cx="286756" cy="286756"/>
+            <a:off x="839262" y="1724924"/>
+            <a:ext cx="317480" cy="317480"/>
           </a:xfrm>
           <a:prstGeom prst="rect">
             <a:avLst/>
@@ -20639,8 +19128,10 @@
             <a:off x="1933303" y="1627632"/>
             <a:ext cx="512064" cy="512064"/>
           </a:xfrm>
-          <a:prstGeom prst="ellipse">
-            <a:avLst/>
+          <a:prstGeom prst="roundRect">
+            <a:avLst>
+              <a:gd name="adj" fmla="val 28000"/>
+            </a:avLst>
           </a:prstGeom>
           <a:solidFill>
             <a:srgbClr val="FFFFFF"/>
@@ -20650,7 +19141,7 @@
       </p:sp>
       <p:pic>
         <p:nvPicPr>
-          <p:cNvPr id="16" name="Image 1" descr="/Users/mihailkraynev/Documents/Dev/ingosstrah project/08_presentation/build_source/img/icons/users_blue.png">    </p:cNvPr>
+          <p:cNvPr id="16" name="Image 1" descr="">    </p:cNvPr>
           <p:cNvPicPr>
             <a:picLocks noChangeAspect="1"/>
           </p:cNvPicPr>
@@ -20664,8 +19155,8 @@
         </p:blipFill>
         <p:spPr>
           <a:xfrm>
-            <a:off x="2045957" y="1740286"/>
-            <a:ext cx="286756" cy="286756"/>
+            <a:off x="2030595" y="1724924"/>
+            <a:ext cx="317480" cy="317480"/>
           </a:xfrm>
           <a:prstGeom prst="rect">
             <a:avLst/>
@@ -20884,8 +19375,10 @@
             <a:off x="3124635" y="1627632"/>
             <a:ext cx="512064" cy="512064"/>
           </a:xfrm>
-          <a:prstGeom prst="ellipse">
-            <a:avLst/>
+          <a:prstGeom prst="roundRect">
+            <a:avLst>
+              <a:gd name="adj" fmla="val 28000"/>
+            </a:avLst>
           </a:prstGeom>
           <a:solidFill>
             <a:srgbClr val="FFFFFF"/>
@@ -20895,7 +19388,7 @@
       </p:sp>
       <p:pic>
         <p:nvPicPr>
-          <p:cNvPr id="24" name="Image 2" descr="/Users/mihailkraynev/Documents/Dev/ingosstrah project/08_presentation/build_source/img/icons/video_blue.png">    </p:cNvPr>
+          <p:cNvPr id="24" name="Image 2" descr="">    </p:cNvPr>
           <p:cNvPicPr>
             <a:picLocks noChangeAspect="1"/>
           </p:cNvPicPr>
@@ -20909,8 +19402,8 @@
         </p:blipFill>
         <p:spPr>
           <a:xfrm>
-            <a:off x="3237290" y="1740286"/>
-            <a:ext cx="286756" cy="286756"/>
+            <a:off x="3221928" y="1724924"/>
+            <a:ext cx="317480" cy="317480"/>
           </a:xfrm>
           <a:prstGeom prst="rect">
             <a:avLst/>
@@ -21129,8 +19622,10 @@
             <a:off x="4315968" y="1627632"/>
             <a:ext cx="512064" cy="512064"/>
           </a:xfrm>
-          <a:prstGeom prst="ellipse">
-            <a:avLst/>
+          <a:prstGeom prst="roundRect">
+            <a:avLst>
+              <a:gd name="adj" fmla="val 28000"/>
+            </a:avLst>
           </a:prstGeom>
           <a:solidFill>
             <a:srgbClr val="FFFFFF"/>
@@ -21140,7 +19635,7 @@
       </p:sp>
       <p:pic>
         <p:nvPicPr>
-          <p:cNvPr id="32" name="Image 3" descr="/Users/mihailkraynev/Documents/Dev/ingosstrah project/08_presentation/build_source/img/icons/shield-check_blue.png">    </p:cNvPr>
+          <p:cNvPr id="32" name="Image 3" descr="">    </p:cNvPr>
           <p:cNvPicPr>
             <a:picLocks noChangeAspect="1"/>
           </p:cNvPicPr>
@@ -21154,8 +19649,8 @@
         </p:blipFill>
         <p:spPr>
           <a:xfrm>
-            <a:off x="4428622" y="1740286"/>
-            <a:ext cx="286756" cy="286756"/>
+            <a:off x="4413260" y="1724924"/>
+            <a:ext cx="317480" cy="317480"/>
           </a:xfrm>
           <a:prstGeom prst="rect">
             <a:avLst/>
@@ -21374,8 +19869,10 @@
             <a:off x="5507301" y="1627632"/>
             <a:ext cx="512064" cy="512064"/>
           </a:xfrm>
-          <a:prstGeom prst="ellipse">
-            <a:avLst/>
+          <a:prstGeom prst="roundRect">
+            <a:avLst>
+              <a:gd name="adj" fmla="val 28000"/>
+            </a:avLst>
           </a:prstGeom>
           <a:solidFill>
             <a:srgbClr val="B8F02A"/>
@@ -21385,7 +19882,7 @@
       </p:sp>
       <p:pic>
         <p:nvPicPr>
-          <p:cNvPr id="40" name="Image 4" descr="/Users/mihailkraynev/Documents/Dev/ingosstrah project/08_presentation/build_source/img/icons/heart-handshake_navy.png">    </p:cNvPr>
+          <p:cNvPr id="40" name="Image 4" descr="">    </p:cNvPr>
           <p:cNvPicPr>
             <a:picLocks noChangeAspect="1"/>
           </p:cNvPicPr>
@@ -21399,8 +19896,8 @@
         </p:blipFill>
         <p:spPr>
           <a:xfrm>
-            <a:off x="5619955" y="1740286"/>
-            <a:ext cx="286756" cy="286756"/>
+            <a:off x="5604593" y="1724924"/>
+            <a:ext cx="317480" cy="317480"/>
           </a:xfrm>
           <a:prstGeom prst="rect">
             <a:avLst/>
@@ -21619,8 +20116,10 @@
             <a:off x="6698633" y="1627632"/>
             <a:ext cx="512064" cy="512064"/>
           </a:xfrm>
-          <a:prstGeom prst="ellipse">
-            <a:avLst/>
+          <a:prstGeom prst="roundRect">
+            <a:avLst>
+              <a:gd name="adj" fmla="val 28000"/>
+            </a:avLst>
           </a:prstGeom>
           <a:solidFill>
             <a:srgbClr val="FFFFFF"/>
@@ -21630,7 +20129,7 @@
       </p:sp>
       <p:pic>
         <p:nvPicPr>
-          <p:cNvPr id="48" name="Image 5" descr="/Users/mihailkraynev/Documents/Dev/ingosstrah project/08_presentation/build_source/img/icons/stethoscope_blue.png">    </p:cNvPr>
+          <p:cNvPr id="48" name="Image 5" descr="">    </p:cNvPr>
           <p:cNvPicPr>
             <a:picLocks noChangeAspect="1"/>
           </p:cNvPicPr>
@@ -21644,8 +20143,8 @@
         </p:blipFill>
         <p:spPr>
           <a:xfrm>
-            <a:off x="6811287" y="1740286"/>
-            <a:ext cx="286756" cy="286756"/>
+            <a:off x="6795925" y="1724924"/>
+            <a:ext cx="317480" cy="317480"/>
           </a:xfrm>
           <a:prstGeom prst="rect">
             <a:avLst/>
@@ -21864,8 +20363,10 @@
             <a:off x="7889966" y="1627632"/>
             <a:ext cx="512064" cy="512064"/>
           </a:xfrm>
-          <a:prstGeom prst="ellipse">
-            <a:avLst/>
+          <a:prstGeom prst="roundRect">
+            <a:avLst>
+              <a:gd name="adj" fmla="val 28000"/>
+            </a:avLst>
           </a:prstGeom>
           <a:solidFill>
             <a:srgbClr val="FFFFFF"/>
@@ -21875,7 +20376,7 @@
       </p:sp>
       <p:pic>
         <p:nvPicPr>
-          <p:cNvPr id="56" name="Image 6" descr="/Users/mihailkraynev/Documents/Dev/ingosstrah project/08_presentation/build_source/img/icons/bed-double_blue.png">    </p:cNvPr>
+          <p:cNvPr id="56" name="Image 6" descr="">    </p:cNvPr>
           <p:cNvPicPr>
             <a:picLocks noChangeAspect="1"/>
           </p:cNvPicPr>
@@ -21889,8 +20390,8 @@
         </p:blipFill>
         <p:spPr>
           <a:xfrm>
-            <a:off x="8002620" y="1740286"/>
-            <a:ext cx="286756" cy="286756"/>
+            <a:off x="7987258" y="1724924"/>
+            <a:ext cx="317480" cy="317480"/>
           </a:xfrm>
           <a:prstGeom prst="rect">
             <a:avLst/>
@@ -22148,45 +20649,6 @@
               <a:t>Только ИНГОССЕМЬЯ организует помощь до страхового случая</a:t>
             </a:r>
             <a:endParaRPr lang="en-US" sz="1150" dirty="0"/>
-          </a:p>
-        </p:txBody>
-      </p:sp>
-      <p:sp>
-        <p:nvSpPr>
-          <p:cNvPr id="64" name="Text 55"/>
-          <p:cNvSpPr txBox="1"/>
-          <p:nvPr/>
-        </p:nvSpPr>
-        <p:spPr>
-          <a:xfrm>
-            <a:off x="457200" y="4736592"/>
-            <a:ext cx="7772400" cy="274320"/>
-          </a:xfrm>
-          <a:prstGeom prst="rect">
-            <a:avLst/>
-          </a:prstGeom>
-          <a:noFill/>
-          <a:ln/>
-        </p:spPr>
-        <p:txBody>
-          <a:bodyPr wrap="square" lIns="0" tIns="0" rIns="0" bIns="0" rtlCol="0" anchor="b"/>
-          <a:lstStyle/>
-          <a:p>
-            <a:pPr indent="0" marL="0">
-              <a:buNone/>
-            </a:pPr>
-            <a:r>
-              <a:rPr lang="en-US" sz="750" dirty="0">
-                <a:solidFill>
-                  <a:srgbClr val="5A6280"/>
-                </a:solidFill>
-                <a:latin typeface="Arial" pitchFamily="34" charset="0"/>
-                <a:ea typeface="Arial" pitchFamily="34" charset="-122"/>
-                <a:cs typeface="Arial" pitchFamily="34" charset="-120"/>
-              </a:rPr>
-              <a:t>Источники: S6 Peterburg2, 14.08.2026; S7 360.ru, 09.2026; S9 ingos.ru, ДМС 43 050-78 120 руб. в год; S8 Коммерсантъ, 02.09.2026. Цена подписки: допущение, кратность: расчет</a:t>
-            </a:r>
-            <a:endParaRPr lang="en-US" sz="750" dirty="0"/>
           </a:p>
         </p:txBody>
       </p:sp>
@@ -22312,8 +20774,8 @@
         </p:nvSpPr>
         <p:spPr>
           <a:xfrm>
-            <a:off x="777240" y="1143000"/>
-            <a:ext cx="3200400" cy="3200400"/>
+            <a:off x="731520" y="1143000"/>
+            <a:ext cx="3291840" cy="3291840"/>
           </a:xfrm>
           <a:prstGeom prst="ellipse">
             <a:avLst/>
@@ -22337,8 +20799,8 @@
         </p:nvSpPr>
         <p:spPr>
           <a:xfrm>
-            <a:off x="1325880" y="2240280"/>
-            <a:ext cx="2103120" cy="2103120"/>
+            <a:off x="1303020" y="2286000"/>
+            <a:ext cx="2148840" cy="2148840"/>
           </a:xfrm>
           <a:prstGeom prst="ellipse">
             <a:avLst/>
@@ -22357,8 +20819,8 @@
         </p:nvSpPr>
         <p:spPr>
           <a:xfrm>
-            <a:off x="1897380" y="3383280"/>
-            <a:ext cx="960120" cy="960120"/>
+            <a:off x="1874520" y="3429000"/>
+            <a:ext cx="1005840" cy="1005840"/>
           </a:xfrm>
           <a:prstGeom prst="ellipse">
             <a:avLst/>
@@ -22377,24 +20839,24 @@
         </p:nvSpPr>
         <p:spPr>
           <a:xfrm>
-            <a:off x="1005840" y="1344168"/>
-            <a:ext cx="2743200" cy="256032"/>
-          </a:xfrm>
-          <a:prstGeom prst="rect">
-            <a:avLst/>
-          </a:prstGeom>
-          <a:noFill/>
-          <a:ln/>
-        </p:spPr>
-        <p:txBody>
-          <a:bodyPr wrap="square" lIns="0" tIns="0" rIns="0" bIns="0" rtlCol="0" anchor="t"/>
+            <a:off x="1457403" y="1490472"/>
+            <a:ext cx="1840074" cy="237744"/>
+          </a:xfrm>
+          <a:prstGeom prst="rect">
+            <a:avLst/>
+          </a:prstGeom>
+          <a:noFill/>
+          <a:ln/>
+        </p:spPr>
+        <p:txBody>
+          <a:bodyPr wrap="square" lIns="0" tIns="0" rIns="0" bIns="0" rtlCol="0" anchor="ctr"/>
           <a:lstStyle/>
           <a:p>
             <a:pPr algn="ctr" indent="0" marL="0">
               <a:buNone/>
             </a:pPr>
             <a:r>
-              <a:rPr lang="en-US" sz="1200" b="1" dirty="0">
+              <a:rPr lang="en-US" sz="1050" b="1" dirty="0">
                 <a:solidFill>
                   <a:srgbClr val="0A2A8A"/>
                 </a:solidFill>
@@ -22408,7 +20870,7 @@
               <a:buNone/>
             </a:pPr>
             <a:r>
-              <a:rPr lang="en-US" sz="1200" b="1" dirty="0">
+              <a:rPr lang="en-US" sz="1050" b="1" dirty="0">
                 <a:solidFill>
                   <a:srgbClr val="151B33"/>
                 </a:solidFill>
@@ -22418,7 +20880,7 @@
               </a:rPr>
               <a:t>5,85 млн семей</a:t>
             </a:r>
-            <a:endParaRPr lang="en-US" sz="1200" dirty="0"/>
+            <a:endParaRPr lang="en-US" sz="1050" dirty="0"/>
           </a:p>
         </p:txBody>
       </p:sp>
@@ -22430,24 +20892,24 @@
         </p:nvSpPr>
         <p:spPr>
           <a:xfrm>
-            <a:off x="1005840" y="1600200"/>
-            <a:ext cx="2743200" cy="219456"/>
-          </a:xfrm>
-          <a:prstGeom prst="rect">
-            <a:avLst/>
-          </a:prstGeom>
-          <a:noFill/>
-          <a:ln/>
-        </p:spPr>
-        <p:txBody>
-          <a:bodyPr wrap="square" lIns="0" tIns="0" rIns="0" bIns="0" rtlCol="0" anchor="t"/>
+            <a:off x="1210325" y="1737360"/>
+            <a:ext cx="2334229" cy="201168"/>
+          </a:xfrm>
+          <a:prstGeom prst="rect">
+            <a:avLst/>
+          </a:prstGeom>
+          <a:noFill/>
+          <a:ln/>
+        </p:spPr>
+        <p:txBody>
+          <a:bodyPr wrap="square" lIns="0" tIns="0" rIns="0" bIns="0" rtlCol="0" anchor="ctr"/>
           <a:lstStyle/>
           <a:p>
             <a:pPr algn="ctr" indent="0" marL="0">
               <a:buNone/>
             </a:pPr>
             <a:r>
-              <a:rPr lang="en-US" sz="1000" dirty="0">
+              <a:rPr lang="en-US" sz="950" dirty="0">
                 <a:solidFill>
                   <a:srgbClr val="5A6280"/>
                 </a:solidFill>
@@ -22457,166 +20919,166 @@
               </a:rPr>
               <a:t>208,2 млрд руб. в год</a:t>
             </a:r>
+            <a:endParaRPr lang="en-US" sz="950" dirty="0"/>
+          </a:p>
+        </p:txBody>
+      </p:sp>
+      <p:sp>
+        <p:nvSpPr>
+          <p:cNvPr id="8" name="Text 6"/>
+          <p:cNvSpPr txBox="1"/>
+          <p:nvPr/>
+        </p:nvSpPr>
+        <p:spPr>
+          <a:xfrm>
+            <a:off x="1589438" y="2743200"/>
+            <a:ext cx="1576004" cy="237744"/>
+          </a:xfrm>
+          <a:prstGeom prst="rect">
+            <a:avLst/>
+          </a:prstGeom>
+          <a:noFill/>
+          <a:ln/>
+        </p:spPr>
+        <p:txBody>
+          <a:bodyPr wrap="square" lIns="0" tIns="0" rIns="0" bIns="0" rtlCol="0" anchor="ctr"/>
+          <a:lstStyle/>
+          <a:p>
+            <a:pPr algn="ctr" indent="0" marL="0">
+              <a:buNone/>
+            </a:pPr>
+            <a:r>
+              <a:rPr lang="en-US" sz="1050" b="1" dirty="0">
+                <a:solidFill>
+                  <a:srgbClr val="0A2A8A"/>
+                </a:solidFill>
+                <a:latin typeface="Arial" pitchFamily="34" charset="0"/>
+                <a:ea typeface="Arial" pitchFamily="34" charset="-122"/>
+                <a:cs typeface="Arial" pitchFamily="34" charset="-120"/>
+              </a:rPr>
+              <a:t>SAM </a:t>
+            </a:r>
+            <a:pPr algn="ctr" indent="0" marL="0">
+              <a:buNone/>
+            </a:pPr>
+            <a:r>
+              <a:rPr lang="en-US" sz="1050" b="1" dirty="0">
+                <a:solidFill>
+                  <a:srgbClr val="151B33"/>
+                </a:solidFill>
+                <a:latin typeface="Arial" pitchFamily="34" charset="0"/>
+                <a:ea typeface="Arial" pitchFamily="34" charset="-122"/>
+                <a:cs typeface="Arial" pitchFamily="34" charset="-120"/>
+              </a:rPr>
+              <a:t>2,05 млн семей</a:t>
+            </a:r>
+            <a:endParaRPr lang="en-US" sz="1050" dirty="0"/>
+          </a:p>
+        </p:txBody>
+      </p:sp>
+      <p:sp>
+        <p:nvSpPr>
+          <p:cNvPr id="9" name="Text 7"/>
+          <p:cNvSpPr txBox="1"/>
+          <p:nvPr/>
+        </p:nvSpPr>
+        <p:spPr>
+          <a:xfrm>
+            <a:off x="1463705" y="2990088"/>
+            <a:ext cx="1827470" cy="201168"/>
+          </a:xfrm>
+          <a:prstGeom prst="rect">
+            <a:avLst/>
+          </a:prstGeom>
+          <a:noFill/>
+          <a:ln/>
+        </p:spPr>
+        <p:txBody>
+          <a:bodyPr wrap="square" lIns="0" tIns="0" rIns="0" bIns="0" rtlCol="0" anchor="ctr"/>
+          <a:lstStyle/>
+          <a:p>
+            <a:pPr algn="ctr" indent="0" marL="0">
+              <a:buNone/>
+            </a:pPr>
+            <a:r>
+              <a:rPr lang="en-US" sz="950" dirty="0">
+                <a:solidFill>
+                  <a:srgbClr val="151B33"/>
+                </a:solidFill>
+                <a:latin typeface="Arial" pitchFamily="34" charset="0"/>
+                <a:ea typeface="Arial" pitchFamily="34" charset="-122"/>
+                <a:cs typeface="Arial" pitchFamily="34" charset="-120"/>
+              </a:rPr>
+              <a:t>72,9 млрд руб. в год</a:t>
+            </a:r>
+            <a:endParaRPr lang="en-US" sz="950" dirty="0"/>
+          </a:p>
+        </p:txBody>
+      </p:sp>
+      <p:sp>
+        <p:nvSpPr>
+          <p:cNvPr id="10" name="Text 8"/>
+          <p:cNvSpPr txBox="1"/>
+          <p:nvPr/>
+        </p:nvSpPr>
+        <p:spPr>
+          <a:xfrm>
+            <a:off x="2011680" y="3648456"/>
+            <a:ext cx="731520" cy="219456"/>
+          </a:xfrm>
+          <a:prstGeom prst="rect">
+            <a:avLst/>
+          </a:prstGeom>
+          <a:noFill/>
+          <a:ln/>
+        </p:spPr>
+        <p:txBody>
+          <a:bodyPr wrap="square" lIns="0" tIns="0" rIns="0" bIns="0" rtlCol="0" anchor="ctr"/>
+          <a:lstStyle/>
+          <a:p>
+            <a:pPr algn="ctr" indent="0" marL="0">
+              <a:buNone/>
+            </a:pPr>
+            <a:r>
+              <a:rPr lang="en-US" sz="1000" b="1" dirty="0">
+                <a:solidFill>
+                  <a:srgbClr val="B8F02A"/>
+                </a:solidFill>
+                <a:latin typeface="Arial" pitchFamily="34" charset="0"/>
+                <a:ea typeface="Arial" pitchFamily="34" charset="-122"/>
+                <a:cs typeface="Arial" pitchFamily="34" charset="-120"/>
+              </a:rPr>
+              <a:t>SOM</a:t>
+            </a:r>
             <a:endParaRPr lang="en-US" sz="1000" dirty="0"/>
           </a:p>
         </p:txBody>
       </p:sp>
       <p:sp>
         <p:nvSpPr>
-          <p:cNvPr id="8" name="Text 6"/>
-          <p:cNvSpPr txBox="1"/>
-          <p:nvPr/>
-        </p:nvSpPr>
-        <p:spPr>
-          <a:xfrm>
-            <a:off x="1325880" y="2423160"/>
-            <a:ext cx="2103120" cy="256032"/>
-          </a:xfrm>
-          <a:prstGeom prst="rect">
-            <a:avLst/>
-          </a:prstGeom>
-          <a:noFill/>
-          <a:ln/>
-        </p:spPr>
-        <p:txBody>
-          <a:bodyPr wrap="square" lIns="0" tIns="0" rIns="0" bIns="0" rtlCol="0" anchor="t"/>
+          <p:cNvPr id="11" name="Text 9"/>
+          <p:cNvSpPr txBox="1"/>
+          <p:nvPr/>
+        </p:nvSpPr>
+        <p:spPr>
+          <a:xfrm>
+            <a:off x="1965960" y="3886200"/>
+            <a:ext cx="822960" cy="237744"/>
+          </a:xfrm>
+          <a:prstGeom prst="rect">
+            <a:avLst/>
+          </a:prstGeom>
+          <a:noFill/>
+          <a:ln/>
+        </p:spPr>
+        <p:txBody>
+          <a:bodyPr wrap="square" lIns="0" tIns="0" rIns="0" bIns="0" rtlCol="0" anchor="ctr"/>
           <a:lstStyle/>
           <a:p>
             <a:pPr algn="ctr" indent="0" marL="0">
               <a:buNone/>
             </a:pPr>
             <a:r>
-              <a:rPr lang="en-US" sz="1200" b="1" dirty="0">
-                <a:solidFill>
-                  <a:srgbClr val="0A2A8A"/>
-                </a:solidFill>
-                <a:latin typeface="Arial" pitchFamily="34" charset="0"/>
-                <a:ea typeface="Arial" pitchFamily="34" charset="-122"/>
-                <a:cs typeface="Arial" pitchFamily="34" charset="-120"/>
-              </a:rPr>
-              <a:t>SAM </a:t>
-            </a:r>
-            <a:pPr algn="ctr" indent="0" marL="0">
-              <a:buNone/>
-            </a:pPr>
-            <a:r>
-              <a:rPr lang="en-US" sz="1200" b="1" dirty="0">
-                <a:solidFill>
-                  <a:srgbClr val="151B33"/>
-                </a:solidFill>
-                <a:latin typeface="Arial" pitchFamily="34" charset="0"/>
-                <a:ea typeface="Arial" pitchFamily="34" charset="-122"/>
-                <a:cs typeface="Arial" pitchFamily="34" charset="-120"/>
-              </a:rPr>
-              <a:t>2,05 млн семей</a:t>
-            </a:r>
-            <a:endParaRPr lang="en-US" sz="1200" dirty="0"/>
-          </a:p>
-        </p:txBody>
-      </p:sp>
-      <p:sp>
-        <p:nvSpPr>
-          <p:cNvPr id="9" name="Text 7"/>
-          <p:cNvSpPr txBox="1"/>
-          <p:nvPr/>
-        </p:nvSpPr>
-        <p:spPr>
-          <a:xfrm>
-            <a:off x="1325880" y="2679192"/>
-            <a:ext cx="2103120" cy="219456"/>
-          </a:xfrm>
-          <a:prstGeom prst="rect">
-            <a:avLst/>
-          </a:prstGeom>
-          <a:noFill/>
-          <a:ln/>
-        </p:spPr>
-        <p:txBody>
-          <a:bodyPr wrap="square" lIns="0" tIns="0" rIns="0" bIns="0" rtlCol="0" anchor="t"/>
-          <a:lstStyle/>
-          <a:p>
-            <a:pPr algn="ctr" indent="0" marL="0">
-              <a:buNone/>
-            </a:pPr>
-            <a:r>
-              <a:rPr lang="en-US" sz="1000" dirty="0">
-                <a:solidFill>
-                  <a:srgbClr val="151B33"/>
-                </a:solidFill>
-                <a:latin typeface="Arial" pitchFamily="34" charset="0"/>
-                <a:ea typeface="Arial" pitchFamily="34" charset="-122"/>
-                <a:cs typeface="Arial" pitchFamily="34" charset="-120"/>
-              </a:rPr>
-              <a:t>72,9 млрд руб. в год</a:t>
-            </a:r>
-            <a:endParaRPr lang="en-US" sz="1000" dirty="0"/>
-          </a:p>
-        </p:txBody>
-      </p:sp>
-      <p:sp>
-        <p:nvSpPr>
-          <p:cNvPr id="10" name="Text 8"/>
-          <p:cNvSpPr txBox="1"/>
-          <p:nvPr/>
-        </p:nvSpPr>
-        <p:spPr>
-          <a:xfrm>
-            <a:off x="1897380" y="3611880"/>
-            <a:ext cx="960120" cy="228600"/>
-          </a:xfrm>
-          <a:prstGeom prst="rect">
-            <a:avLst/>
-          </a:prstGeom>
-          <a:noFill/>
-          <a:ln/>
-        </p:spPr>
-        <p:txBody>
-          <a:bodyPr wrap="square" lIns="0" tIns="0" rIns="0" bIns="0" rtlCol="0" anchor="ctr"/>
-          <a:lstStyle/>
-          <a:p>
-            <a:pPr algn="ctr" indent="0" marL="0">
-              <a:buNone/>
-            </a:pPr>
-            <a:r>
-              <a:rPr lang="en-US" sz="1050" b="1" dirty="0">
-                <a:solidFill>
-                  <a:srgbClr val="B8F02A"/>
-                </a:solidFill>
-                <a:latin typeface="Arial" pitchFamily="34" charset="0"/>
-                <a:ea typeface="Arial" pitchFamily="34" charset="-122"/>
-                <a:cs typeface="Arial" pitchFamily="34" charset="-120"/>
-              </a:rPr>
-              <a:t>SOM</a:t>
-            </a:r>
-            <a:endParaRPr lang="en-US" sz="1050" dirty="0"/>
-          </a:p>
-        </p:txBody>
-      </p:sp>
-      <p:sp>
-        <p:nvSpPr>
-          <p:cNvPr id="11" name="Text 9"/>
-          <p:cNvSpPr txBox="1"/>
-          <p:nvPr/>
-        </p:nvSpPr>
-        <p:spPr>
-          <a:xfrm>
-            <a:off x="1897380" y="3840480"/>
-            <a:ext cx="960120" cy="256032"/>
-          </a:xfrm>
-          <a:prstGeom prst="rect">
-            <a:avLst/>
-          </a:prstGeom>
-          <a:noFill/>
-          <a:ln/>
-        </p:spPr>
-        <p:txBody>
-          <a:bodyPr wrap="square" lIns="0" tIns="0" rIns="0" bIns="0" rtlCol="0" anchor="ctr"/>
-          <a:lstStyle/>
-          <a:p>
-            <a:pPr algn="ctr" indent="0" marL="0">
-              <a:buNone/>
-            </a:pPr>
-            <a:r>
               <a:rPr lang="en-US" sz="1100" b="1" dirty="0">
                 <a:solidFill>
                   <a:srgbClr val="FFFFFF"/>
@@ -22639,7 +21101,7 @@
         </p:nvSpPr>
         <p:spPr>
           <a:xfrm>
-            <a:off x="548640" y="4398264"/>
+            <a:off x="548640" y="4489704"/>
             <a:ext cx="3657600" cy="182880"/>
           </a:xfrm>
           <a:prstGeom prst="rect">
@@ -23897,45 +22359,6 @@
               <a:t>Две доли пока допущения, поэтому это порядок величины. Даже при 40% вместо 60% TAM 3,9 млн семей</a:t>
             </a:r>
             <a:endParaRPr lang="en-US" sz="950" dirty="0"/>
-          </a:p>
-        </p:txBody>
-      </p:sp>
-      <p:sp>
-        <p:nvSpPr>
-          <p:cNvPr id="49" name="Text 47"/>
-          <p:cNvSpPr txBox="1"/>
-          <p:nvPr/>
-        </p:nvSpPr>
-        <p:spPr>
-          <a:xfrm>
-            <a:off x="457200" y="4736592"/>
-            <a:ext cx="7772400" cy="274320"/>
-          </a:xfrm>
-          <a:prstGeom prst="rect">
-            <a:avLst/>
-          </a:prstGeom>
-          <a:noFill/>
-          <a:ln/>
-        </p:spPr>
-        <p:txBody>
-          <a:bodyPr wrap="square" lIns="0" tIns="0" rIns="0" bIns="0" rtlCol="0" anchor="b"/>
-          <a:lstStyle/>
-          <a:p>
-            <a:pPr indent="0" marL="0">
-              <a:buNone/>
-            </a:pPr>
-            <a:r>
-              <a:rPr lang="en-US" sz="750" dirty="0">
-                <a:solidFill>
-                  <a:srgbClr val="5A6280"/>
-                </a:solidFill>
-                <a:latin typeface="Arial" pitchFamily="34" charset="0"/>
-                <a:ea typeface="Arial" pitchFamily="34" charset="-122"/>
-                <a:cs typeface="Arial" pitchFamily="34" charset="-120"/>
-              </a:rPr>
-              <a:t>Источники: S1 Росстат через Демоскоп; S3 Мурашко, 07.2026; доли 60%, 70%, 35%: допущения команды, проверяем анкетой и тестом цены; расчет 05_finance/results.json</a:t>
-            </a:r>
-            <a:endParaRPr lang="en-US" sz="750" dirty="0"/>
           </a:p>
         </p:txBody>
       </p:sp>
@@ -24055,7 +22478,7 @@
       </p:sp>
       <p:pic>
         <p:nvPicPr>
-          <p:cNvPr id="3" name="Image 0" descr="/Users/mihailkraynev/Documents/Dev/ingosstrah project/08_presentation/build_source/img/ph_event.png">    </p:cNvPr>
+          <p:cNvPr id="3" name="Image 0" descr="">    </p:cNvPr>
           <p:cNvPicPr>
             <a:picLocks noChangeAspect="1"/>
           </p:cNvPicPr>
@@ -24610,8 +23033,10 @@
             <a:off x="6309572" y="1363980"/>
             <a:ext cx="457200" cy="457200"/>
           </a:xfrm>
-          <a:prstGeom prst="ellipse">
-            <a:avLst/>
+          <a:prstGeom prst="roundRect">
+            <a:avLst>
+              <a:gd name="adj" fmla="val 28000"/>
+            </a:avLst>
           </a:prstGeom>
           <a:solidFill>
             <a:srgbClr val="FFFFFF"/>
@@ -24621,7 +23046,7 @@
       </p:sp>
       <p:pic>
         <p:nvPicPr>
-          <p:cNvPr id="21" name="Image 1" descr="/Users/mihailkraynev/Documents/Dev/ingosstrah project/08_presentation/build_source/img/icons/hand-coins_blue.png">    </p:cNvPr>
+          <p:cNvPr id="21" name="Image 1" descr="">    </p:cNvPr>
           <p:cNvPicPr>
             <a:picLocks noChangeAspect="1"/>
           </p:cNvPicPr>
@@ -24635,8 +23060,8 @@
         </p:blipFill>
         <p:spPr>
           <a:xfrm>
-            <a:off x="6410156" y="1464564"/>
-            <a:ext cx="256032" cy="256032"/>
+            <a:off x="6396440" y="1450848"/>
+            <a:ext cx="283464" cy="283464"/>
           </a:xfrm>
           <a:prstGeom prst="rect">
             <a:avLst/>
@@ -24754,8 +23179,10 @@
             <a:off x="6309572" y="2446020"/>
             <a:ext cx="457200" cy="457200"/>
           </a:xfrm>
-          <a:prstGeom prst="ellipse">
-            <a:avLst/>
+          <a:prstGeom prst="roundRect">
+            <a:avLst>
+              <a:gd name="adj" fmla="val 28000"/>
+            </a:avLst>
           </a:prstGeom>
           <a:solidFill>
             <a:srgbClr val="FFFFFF"/>
@@ -24765,7 +23192,7 @@
       </p:sp>
       <p:pic>
         <p:nvPicPr>
-          <p:cNvPr id="26" name="Image 2" descr="/Users/mihailkraynev/Documents/Dev/ingosstrah project/08_presentation/build_source/img/icons/bell_blue.png">    </p:cNvPr>
+          <p:cNvPr id="26" name="Image 2" descr="">    </p:cNvPr>
           <p:cNvPicPr>
             <a:picLocks noChangeAspect="1"/>
           </p:cNvPicPr>
@@ -24779,8 +23206,8 @@
         </p:blipFill>
         <p:spPr>
           <a:xfrm>
-            <a:off x="6410156" y="2546604"/>
-            <a:ext cx="256032" cy="256032"/>
+            <a:off x="6396440" y="2532888"/>
+            <a:ext cx="283464" cy="283464"/>
           </a:xfrm>
           <a:prstGeom prst="rect">
             <a:avLst/>
@@ -24898,8 +23325,10 @@
             <a:off x="6309572" y="3528060"/>
             <a:ext cx="457200" cy="457200"/>
           </a:xfrm>
-          <a:prstGeom prst="ellipse">
-            <a:avLst/>
+          <a:prstGeom prst="roundRect">
+            <a:avLst>
+              <a:gd name="adj" fmla="val 28000"/>
+            </a:avLst>
           </a:prstGeom>
           <a:solidFill>
             <a:srgbClr val="FFFFFF"/>
@@ -24909,7 +23338,7 @@
       </p:sp>
       <p:pic>
         <p:nvPicPr>
-          <p:cNvPr id="31" name="Image 3" descr="/Users/mihailkraynev/Documents/Dev/ingosstrah project/08_presentation/build_source/img/icons/phone_blue.png">    </p:cNvPr>
+          <p:cNvPr id="31" name="Image 3" descr="">    </p:cNvPr>
           <p:cNvPicPr>
             <a:picLocks noChangeAspect="1"/>
           </p:cNvPicPr>
@@ -24923,8 +23352,8 @@
         </p:blipFill>
         <p:spPr>
           <a:xfrm>
-            <a:off x="6410156" y="3628644"/>
-            <a:ext cx="256032" cy="256032"/>
+            <a:off x="6396440" y="3614928"/>
+            <a:ext cx="283464" cy="283464"/>
           </a:xfrm>
           <a:prstGeom prst="rect">
             <a:avLst/>
@@ -25045,45 +23474,6 @@
               <a:t>Родитель сам решает, что видит ребенок</a:t>
             </a:r>
             <a:endParaRPr lang="en-US" sz="1050" dirty="0"/>
-          </a:p>
-        </p:txBody>
-      </p:sp>
-      <p:sp>
-        <p:nvSpPr>
-          <p:cNvPr id="35" name="Text 29"/>
-          <p:cNvSpPr txBox="1"/>
-          <p:nvPr/>
-        </p:nvSpPr>
-        <p:spPr>
-          <a:xfrm>
-            <a:off x="457200" y="4736592"/>
-            <a:ext cx="7772400" cy="274320"/>
-          </a:xfrm>
-          <a:prstGeom prst="rect">
-            <a:avLst/>
-          </a:prstGeom>
-          <a:noFill/>
-          <a:ln/>
-        </p:spPr>
-        <p:txBody>
-          <a:bodyPr wrap="square" lIns="0" tIns="0" rIns="0" bIns="0" rtlCol="0" anchor="b"/>
-          <a:lstStyle/>
-          <a:p>
-            <a:pPr indent="0" marL="0">
-              <a:buNone/>
-            </a:pPr>
-            <a:r>
-              <a:rPr lang="en-US" sz="750" dirty="0">
-                <a:solidFill>
-                  <a:srgbClr val="5A6280"/>
-                </a:solidFill>
-                <a:latin typeface="Arial" pitchFamily="34" charset="0"/>
-                <a:ea typeface="Arial" pitchFamily="34" charset="-122"/>
-                <a:cs typeface="Arial" pitchFamily="34" charset="-120"/>
-              </a:rPr>
-              <a:t>Источники: формула ценностного предложения из материалов кейса; цена 2 490 руб.: допущение, проверяем тестом цены; сиделка: S6, S7</a:t>
-            </a:r>
-            <a:endParaRPr lang="en-US" sz="750" dirty="0"/>
           </a:p>
         </p:txBody>
       </p:sp>
@@ -25203,7 +23593,7 @@
       </p:sp>
       <p:pic>
         <p:nvPicPr>
-          <p:cNvPr id="3" name="Image 0" descr="/Users/mihailkraynev/Documents/Dev/ingosstrah project/08_presentation/build_source/img/scenario.png">    </p:cNvPr>
+          <p:cNvPr id="3" name="Image 0" descr="">    </p:cNvPr>
           <p:cNvPicPr>
             <a:picLocks noChangeAspect="1"/>
           </p:cNvPicPr>
@@ -25225,45 +23615,6 @@
           </a:prstGeom>
         </p:spPr>
       </p:pic>
-      <p:sp>
-        <p:nvSpPr>
-          <p:cNvPr id="4" name="Text 1"/>
-          <p:cNvSpPr txBox="1"/>
-          <p:nvPr/>
-        </p:nvSpPr>
-        <p:spPr>
-          <a:xfrm>
-            <a:off x="457200" y="4736592"/>
-            <a:ext cx="7772400" cy="274320"/>
-          </a:xfrm>
-          <a:prstGeom prst="rect">
-            <a:avLst/>
-          </a:prstGeom>
-          <a:noFill/>
-          <a:ln/>
-        </p:spPr>
-        <p:txBody>
-          <a:bodyPr wrap="square" lIns="0" tIns="0" rIns="0" bIns="0" rtlCol="0" anchor="b"/>
-          <a:lstStyle/>
-          <a:p>
-            <a:pPr indent="0" marL="0">
-              <a:buNone/>
-            </a:pPr>
-            <a:r>
-              <a:rPr lang="en-US" sz="750" dirty="0">
-                <a:solidFill>
-                  <a:srgbClr val="5A6280"/>
-                </a:solidFill>
-                <a:latin typeface="Arial" pitchFamily="34" charset="0"/>
-                <a:ea typeface="Arial" pitchFamily="34" charset="-122"/>
-                <a:cs typeface="Arial" pitchFamily="34" charset="-120"/>
-              </a:rPr>
-              <a:t>Источники: сервисный сценарий команды, 07_docs/diagrams/Пользовательский_сценарий; нагрузка 48,3 минуты на семью: расчет финмодели</a:t>
-            </a:r>
-            <a:endParaRPr lang="en-US" sz="750" dirty="0"/>
-          </a:p>
-        </p:txBody>
-      </p:sp>
       <p:sp>
         <p:nvSpPr>
           <p:cNvPr id="25" name="Slide Number Placeholder 0"/>
@@ -25380,7 +23731,7 @@
       </p:sp>
       <p:pic>
         <p:nvPicPr>
-          <p:cNvPr id="3" name="Image 0" descr="/Users/mihailkraynev/Documents/Dev/ingosstrah project/08_presentation/build_source/img/desk_feed.png">    </p:cNvPr>
+          <p:cNvPr id="3" name="Image 0" descr="">    </p:cNvPr>
           <p:cNvPicPr>
             <a:picLocks noChangeAspect="1"/>
           </p:cNvPicPr>
@@ -25404,7 +23755,7 @@
       </p:pic>
       <p:pic>
         <p:nvPicPr>
-          <p:cNvPr id="4" name="Image 1" descr="/Users/mihailkraynev/Documents/Dev/ingosstrah project/08_presentation/build_source/img/ph_feed.png">    </p:cNvPr>
+          <p:cNvPr id="4" name="Image 1" descr="">    </p:cNvPr>
           <p:cNvPicPr>
             <a:picLocks noChangeAspect="1"/>
           </p:cNvPicPr>
@@ -25428,7 +23779,7 @@
       </p:pic>
       <p:pic>
         <p:nvPicPr>
-          <p:cNvPr id="5" name="Image 2" descr="/Users/mihailkraynev/Documents/Dev/ingosstrah project/08_presentation/build_source/img/ph_summary.png">    </p:cNvPr>
+          <p:cNvPr id="5" name="Image 2" descr="">    </p:cNvPr>
           <p:cNvPicPr>
             <a:picLocks noChangeAspect="1"/>
           </p:cNvPicPr>
@@ -25564,45 +23915,6 @@
               <a:t>Месячная сводка</a:t>
             </a:r>
             <a:endParaRPr lang="en-US" sz="1000" dirty="0"/>
-          </a:p>
-        </p:txBody>
-      </p:sp>
-      <p:sp>
-        <p:nvSpPr>
-          <p:cNvPr id="9" name="Text 4"/>
-          <p:cNvSpPr txBox="1"/>
-          <p:nvPr/>
-        </p:nvSpPr>
-        <p:spPr>
-          <a:xfrm>
-            <a:off x="457200" y="4736592"/>
-            <a:ext cx="7772400" cy="274320"/>
-          </a:xfrm>
-          <a:prstGeom prst="rect">
-            <a:avLst/>
-          </a:prstGeom>
-          <a:noFill/>
-          <a:ln/>
-        </p:spPr>
-        <p:txBody>
-          <a:bodyPr wrap="square" lIns="0" tIns="0" rIns="0" bIns="0" rtlCol="0" anchor="b"/>
-          <a:lstStyle/>
-          <a:p>
-            <a:pPr indent="0" marL="0">
-              <a:buNone/>
-            </a:pPr>
-            <a:r>
-              <a:rPr lang="en-US" sz="750" dirty="0">
-                <a:solidFill>
-                  <a:srgbClr val="5A6280"/>
-                </a:solidFill>
-                <a:latin typeface="Arial" pitchFamily="34" charset="0"/>
-                <a:ea typeface="Arial" pitchFamily="34" charset="-122"/>
-                <a:cs typeface="Arial" pitchFamily="34" charset="-120"/>
-              </a:rPr>
-              <a:t>Источники: кликабельный прототип 06_prototype/Прототип_ИНГОССЕМЬЯ.html, режимы «Телефон» и «Компьютер»; данные семей вымышленные</a:t>
-            </a:r>
-            <a:endParaRPr lang="en-US" sz="750" dirty="0"/>
           </a:p>
         </p:txBody>
       </p:sp>
